--- a/docs/DC_Express_User_Manual.pptx
+++ b/docs/DC_Express_User_Manual.pptx
@@ -3139,7 +3139,7 @@
     <p:bg>
       <p:bgPr>
         <a:solidFill>
-          <a:srgbClr val="1A1A2E"/>
+          <a:srgbClr val="FFFFFF"/>
         </a:solidFill>
         <a:effectLst/>
       </p:bgPr>
@@ -3166,7 +3166,7 @@
             <a:avLst/>
           </a:prstGeom>
           <a:solidFill>
-            <a:srgbClr val="0096D6"/>
+            <a:srgbClr val="0070C0"/>
           </a:solidFill>
           <a:ln>
             <a:noFill/>
@@ -3210,7 +3210,7 @@
             <a:avLst/>
           </a:prstGeom>
           <a:solidFill>
-            <a:srgbClr val="00D4AA"/>
+            <a:srgbClr val="00A585"/>
           </a:solidFill>
           <a:ln>
             <a:noFill/>
@@ -3264,7 +3264,7 @@
             <a:pPr algn="l">
               <a:defRPr sz="5200" b="1">
                 <a:solidFill>
-                  <a:srgbClr val="0096D6"/>
+                  <a:srgbClr val="0070C0"/>
                 </a:solidFill>
                 <a:latin typeface="맑은 고딕"/>
               </a:defRPr>
@@ -3300,7 +3300,7 @@
             <a:pPr algn="l">
               <a:defRPr sz="2400" b="0">
                 <a:solidFill>
-                  <a:srgbClr val="E5E7EB"/>
+                  <a:srgbClr val="5A5A6E"/>
                 </a:solidFill>
                 <a:latin typeface="맑은 고딕"/>
               </a:defRPr>
@@ -3326,7 +3326,7 @@
             <a:avLst/>
           </a:prstGeom>
           <a:solidFill>
-            <a:srgbClr val="00D4AA"/>
+            <a:srgbClr val="00A585"/>
           </a:solidFill>
           <a:ln>
             <a:noFill/>
@@ -3380,7 +3380,7 @@
             <a:pPr algn="l">
               <a:defRPr sz="2800" b="1">
                 <a:solidFill>
-                  <a:srgbClr val="FFFFFF"/>
+                  <a:srgbClr val="1F1F1F"/>
                 </a:solidFill>
                 <a:latin typeface="맑은 고딕"/>
               </a:defRPr>
@@ -3416,7 +3416,7 @@
             <a:pPr algn="l">
               <a:defRPr sz="1600" b="0">
                 <a:solidFill>
-                  <a:srgbClr val="94A3B8"/>
+                  <a:srgbClr val="5A5A6E"/>
                 </a:solidFill>
                 <a:latin typeface="맑은 고딕"/>
               </a:defRPr>
@@ -3442,7 +3442,7 @@
             <a:avLst/>
           </a:prstGeom>
           <a:solidFill>
-            <a:srgbClr val="0096D6"/>
+            <a:srgbClr val="0070C0"/>
           </a:solidFill>
           <a:ln>
             <a:noFill/>
@@ -3486,7 +3486,7 @@
             <a:avLst/>
           </a:prstGeom>
           <a:solidFill>
-            <a:srgbClr val="00D4AA"/>
+            <a:srgbClr val="00A585"/>
           </a:solidFill>
           <a:ln>
             <a:noFill/>
@@ -3529,7 +3529,7 @@
     <p:bg>
       <p:bgPr>
         <a:solidFill>
-          <a:srgbClr val="1A1A2E"/>
+          <a:srgbClr val="FFFFFF"/>
         </a:solidFill>
         <a:effectLst/>
       </p:bgPr>
@@ -3556,7 +3556,7 @@
             <a:avLst/>
           </a:prstGeom>
           <a:solidFill>
-            <a:srgbClr val="00D4AA"/>
+            <a:srgbClr val="00A585"/>
           </a:solidFill>
           <a:ln>
             <a:noFill/>
@@ -3600,7 +3600,7 @@
             <a:avLst/>
           </a:prstGeom>
           <a:solidFill>
-            <a:srgbClr val="00D4AA"/>
+            <a:srgbClr val="00A585"/>
           </a:solidFill>
           <a:ln>
             <a:noFill/>
@@ -3667,7 +3667,7 @@
             <a:pPr algn="l">
               <a:defRPr sz="4000" b="1">
                 <a:solidFill>
-                  <a:srgbClr val="FFFFFF"/>
+                  <a:srgbClr val="1F1F1F"/>
                 </a:solidFill>
                 <a:latin typeface="맑은 고딕"/>
               </a:defRPr>
@@ -3703,7 +3703,7 @@
             <a:pPr algn="l">
               <a:defRPr sz="1800" b="0">
                 <a:solidFill>
-                  <a:srgbClr val="94A3B8"/>
+                  <a:srgbClr val="5A5A6E"/>
                 </a:solidFill>
                 <a:latin typeface="맑은 고딕"/>
               </a:defRPr>
@@ -3729,7 +3729,7 @@
             <a:avLst/>
           </a:prstGeom>
           <a:solidFill>
-            <a:srgbClr val="00D4AA"/>
+            <a:srgbClr val="00A585"/>
           </a:solidFill>
           <a:ln>
             <a:noFill/>
@@ -3773,7 +3773,7 @@
             <a:avLst/>
           </a:prstGeom>
           <a:solidFill>
-            <a:srgbClr val="00D4AA"/>
+            <a:srgbClr val="00A585"/>
           </a:solidFill>
           <a:ln>
             <a:noFill/>
@@ -3816,7 +3816,7 @@
     <p:bg>
       <p:bgPr>
         <a:solidFill>
-          <a:srgbClr val="1A1A2E"/>
+          <a:srgbClr val="FFFFFF"/>
         </a:solidFill>
         <a:effectLst/>
       </p:bgPr>
@@ -3843,7 +3843,7 @@
             <a:avLst/>
           </a:prstGeom>
           <a:solidFill>
-            <a:srgbClr val="00D4AA"/>
+            <a:srgbClr val="00A585"/>
           </a:solidFill>
           <a:ln>
             <a:noFill/>
@@ -3897,7 +3897,7 @@
             <a:pPr algn="l">
               <a:defRPr sz="2600" b="1">
                 <a:solidFill>
-                  <a:srgbClr val="FFFFFF"/>
+                  <a:srgbClr val="1F1F1F"/>
                 </a:solidFill>
                 <a:latin typeface="맑은 고딕"/>
               </a:defRPr>
@@ -3923,7 +3923,7 @@
             <a:avLst/>
           </a:prstGeom>
           <a:solidFill>
-            <a:srgbClr val="00D4AA"/>
+            <a:srgbClr val="00A585"/>
           </a:solidFill>
           <a:ln>
             <a:noFill/>
@@ -3967,11 +3967,11 @@
             <a:avLst/>
           </a:prstGeom>
           <a:solidFill>
-            <a:srgbClr val="24243E"/>
+            <a:srgbClr val="F8F9FB"/>
           </a:solidFill>
           <a:ln w="12700">
             <a:solidFill>
-              <a:srgbClr val="333355"/>
+              <a:srgbClr val="E0E0E8"/>
             </a:solidFill>
           </a:ln>
           <a:effectLst/>
@@ -4032,7 +4032,7 @@
               </a:spcAft>
               <a:defRPr sz="1600" b="0">
                 <a:solidFill>
-                  <a:srgbClr val="FFFFFF"/>
+                  <a:srgbClr val="1F1F1F"/>
                 </a:solidFill>
                 <a:latin typeface="맑은 고딕"/>
               </a:defRPr>
@@ -4054,7 +4054,7 @@
               </a:spcAft>
               <a:defRPr sz="1600" b="0">
                 <a:solidFill>
-                  <a:srgbClr val="FFFFFF"/>
+                  <a:srgbClr val="1F1F1F"/>
                 </a:solidFill>
                 <a:latin typeface="맑은 고딕"/>
               </a:defRPr>
@@ -4076,7 +4076,7 @@
               </a:spcAft>
               <a:defRPr sz="1600" b="0">
                 <a:solidFill>
-                  <a:srgbClr val="FFFFFF"/>
+                  <a:srgbClr val="1F1F1F"/>
                 </a:solidFill>
                 <a:latin typeface="맑은 고딕"/>
               </a:defRPr>
@@ -4098,7 +4098,7 @@
               </a:spcAft>
               <a:defRPr sz="1600" b="0">
                 <a:solidFill>
-                  <a:srgbClr val="FFFFFF"/>
+                  <a:srgbClr val="1F1F1F"/>
                 </a:solidFill>
                 <a:latin typeface="맑은 고딕"/>
               </a:defRPr>
@@ -4120,7 +4120,7 @@
               </a:spcAft>
               <a:defRPr sz="1600" b="0">
                 <a:solidFill>
-                  <a:srgbClr val="FFFFFF"/>
+                  <a:srgbClr val="1F1F1F"/>
                 </a:solidFill>
                 <a:latin typeface="맑은 고딕"/>
               </a:defRPr>
@@ -4156,7 +4156,7 @@
             <a:pPr algn="r">
               <a:defRPr sz="1000" b="0">
                 <a:solidFill>
-                  <a:srgbClr val="94A3B8"/>
+                  <a:srgbClr val="8C8C9A"/>
                 </a:solidFill>
                 <a:latin typeface="맑은 고딕"/>
               </a:defRPr>
@@ -4181,7 +4181,7 @@
     <p:bg>
       <p:bgPr>
         <a:solidFill>
-          <a:srgbClr val="1A1A2E"/>
+          <a:srgbClr val="FFFFFF"/>
         </a:solidFill>
         <a:effectLst/>
       </p:bgPr>
@@ -4208,7 +4208,7 @@
             <a:avLst/>
           </a:prstGeom>
           <a:solidFill>
-            <a:srgbClr val="00D4AA"/>
+            <a:srgbClr val="00A585"/>
           </a:solidFill>
           <a:ln>
             <a:noFill/>
@@ -4262,7 +4262,7 @@
             <a:pPr algn="l">
               <a:defRPr sz="2600" b="1">
                 <a:solidFill>
-                  <a:srgbClr val="FFFFFF"/>
+                  <a:srgbClr val="1F1F1F"/>
                 </a:solidFill>
                 <a:latin typeface="맑은 고딕"/>
               </a:defRPr>
@@ -4288,7 +4288,7 @@
             <a:avLst/>
           </a:prstGeom>
           <a:solidFill>
-            <a:srgbClr val="00D4AA"/>
+            <a:srgbClr val="00A585"/>
           </a:solidFill>
           <a:ln>
             <a:noFill/>
@@ -4332,11 +4332,11 @@
             <a:avLst/>
           </a:prstGeom>
           <a:solidFill>
-            <a:srgbClr val="24243E"/>
+            <a:srgbClr val="F8F9FB"/>
           </a:solidFill>
           <a:ln w="12700">
             <a:solidFill>
-              <a:srgbClr val="333355"/>
+              <a:srgbClr val="E0E0E8"/>
             </a:solidFill>
           </a:ln>
           <a:effectLst/>
@@ -4388,7 +4388,7 @@
             <a:pPr algn="l">
               <a:defRPr sz="1600" b="1">
                 <a:solidFill>
-                  <a:srgbClr val="00D4AA"/>
+                  <a:srgbClr val="00A585"/>
                 </a:solidFill>
                 <a:latin typeface="맑은 고딕"/>
               </a:defRPr>
@@ -4433,7 +4433,7 @@
               </a:spcAft>
               <a:defRPr sz="1400" b="0">
                 <a:solidFill>
-                  <a:srgbClr val="FFFFFF"/>
+                  <a:srgbClr val="1F1F1F"/>
                 </a:solidFill>
                 <a:latin typeface="맑은 고딕"/>
               </a:defRPr>
@@ -4455,7 +4455,7 @@
               </a:spcAft>
               <a:defRPr sz="1300">
                 <a:solidFill>
-                  <a:srgbClr val="94A3B8"/>
+                  <a:srgbClr val="8C8C9A"/>
                 </a:solidFill>
                 <a:latin typeface="맑은 고딕"/>
               </a:defRPr>
@@ -4477,7 +4477,7 @@
               </a:spcAft>
               <a:defRPr sz="1400" b="0">
                 <a:solidFill>
-                  <a:srgbClr val="FFFFFF"/>
+                  <a:srgbClr val="1F1F1F"/>
                 </a:solidFill>
                 <a:latin typeface="맑은 고딕"/>
               </a:defRPr>
@@ -4499,7 +4499,7 @@
               </a:spcAft>
               <a:defRPr sz="1300">
                 <a:solidFill>
-                  <a:srgbClr val="94A3B8"/>
+                  <a:srgbClr val="8C8C9A"/>
                 </a:solidFill>
                 <a:latin typeface="맑은 고딕"/>
               </a:defRPr>
@@ -4521,7 +4521,7 @@
               </a:spcAft>
               <a:defRPr sz="1400" b="0">
                 <a:solidFill>
-                  <a:srgbClr val="FFFFFF"/>
+                  <a:srgbClr val="1F1F1F"/>
                 </a:solidFill>
                 <a:latin typeface="맑은 고딕"/>
               </a:defRPr>
@@ -4543,7 +4543,7 @@
               </a:spcAft>
               <a:defRPr sz="1300">
                 <a:solidFill>
-                  <a:srgbClr val="94A3B8"/>
+                  <a:srgbClr val="8C8C9A"/>
                 </a:solidFill>
                 <a:latin typeface="맑은 고딕"/>
               </a:defRPr>
@@ -4565,7 +4565,7 @@
               </a:spcAft>
               <a:defRPr sz="1400" b="0">
                 <a:solidFill>
-                  <a:srgbClr val="FFFFFF"/>
+                  <a:srgbClr val="1F1F1F"/>
                 </a:solidFill>
                 <a:latin typeface="맑은 고딕"/>
               </a:defRPr>
@@ -4591,11 +4591,11 @@
             <a:avLst/>
           </a:prstGeom>
           <a:solidFill>
-            <a:srgbClr val="24243E"/>
+            <a:srgbClr val="F8F9FB"/>
           </a:solidFill>
           <a:ln w="12700">
             <a:solidFill>
-              <a:srgbClr val="333355"/>
+              <a:srgbClr val="E0E0E8"/>
             </a:solidFill>
           </a:ln>
           <a:effectLst/>
@@ -4647,7 +4647,7 @@
             <a:pPr algn="l">
               <a:defRPr sz="1600" b="1">
                 <a:solidFill>
-                  <a:srgbClr val="00D4AA"/>
+                  <a:srgbClr val="00A585"/>
                 </a:solidFill>
                 <a:latin typeface="맑은 고딕"/>
               </a:defRPr>
@@ -4692,7 +4692,7 @@
               </a:spcAft>
               <a:defRPr sz="1400" b="0">
                 <a:solidFill>
-                  <a:srgbClr val="FFFFFF"/>
+                  <a:srgbClr val="1F1F1F"/>
                 </a:solidFill>
                 <a:latin typeface="맑은 고딕"/>
               </a:defRPr>
@@ -4714,7 +4714,7 @@
               </a:spcAft>
               <a:defRPr sz="1400" b="0">
                 <a:solidFill>
-                  <a:srgbClr val="FFFFFF"/>
+                  <a:srgbClr val="1F1F1F"/>
                 </a:solidFill>
                 <a:latin typeface="맑은 고딕"/>
               </a:defRPr>
@@ -4736,7 +4736,7 @@
               </a:spcAft>
               <a:defRPr sz="1300">
                 <a:solidFill>
-                  <a:srgbClr val="94A3B8"/>
+                  <a:srgbClr val="8C8C9A"/>
                 </a:solidFill>
                 <a:latin typeface="맑은 고딕"/>
               </a:defRPr>
@@ -4758,7 +4758,7 @@
               </a:spcAft>
               <a:defRPr sz="1300">
                 <a:solidFill>
-                  <a:srgbClr val="94A3B8"/>
+                  <a:srgbClr val="8C8C9A"/>
                 </a:solidFill>
                 <a:latin typeface="맑은 고딕"/>
               </a:defRPr>
@@ -4780,7 +4780,7 @@
               </a:spcAft>
               <a:defRPr sz="1300">
                 <a:solidFill>
-                  <a:srgbClr val="94A3B8"/>
+                  <a:srgbClr val="8C8C9A"/>
                 </a:solidFill>
                 <a:latin typeface="맑은 고딕"/>
               </a:defRPr>
@@ -4816,7 +4816,7 @@
             <a:pPr algn="r">
               <a:defRPr sz="1000" b="0">
                 <a:solidFill>
-                  <a:srgbClr val="94A3B8"/>
+                  <a:srgbClr val="8C8C9A"/>
                 </a:solidFill>
                 <a:latin typeface="맑은 고딕"/>
               </a:defRPr>
@@ -4841,7 +4841,7 @@
     <p:bg>
       <p:bgPr>
         <a:solidFill>
-          <a:srgbClr val="1A1A2E"/>
+          <a:srgbClr val="FFFFFF"/>
         </a:solidFill>
         <a:effectLst/>
       </p:bgPr>
@@ -4868,7 +4868,7 @@
             <a:avLst/>
           </a:prstGeom>
           <a:solidFill>
-            <a:srgbClr val="00D4AA"/>
+            <a:srgbClr val="00A585"/>
           </a:solidFill>
           <a:ln>
             <a:noFill/>
@@ -4922,7 +4922,7 @@
             <a:pPr algn="l">
               <a:defRPr sz="2600" b="1">
                 <a:solidFill>
-                  <a:srgbClr val="FFFFFF"/>
+                  <a:srgbClr val="1F1F1F"/>
                 </a:solidFill>
                 <a:latin typeface="맑은 고딕"/>
               </a:defRPr>
@@ -4948,7 +4948,7 @@
             <a:avLst/>
           </a:prstGeom>
           <a:solidFill>
-            <a:srgbClr val="00D4AA"/>
+            <a:srgbClr val="00A585"/>
           </a:solidFill>
           <a:ln>
             <a:noFill/>
@@ -4992,11 +4992,11 @@
             <a:avLst/>
           </a:prstGeom>
           <a:solidFill>
-            <a:srgbClr val="24243E"/>
+            <a:srgbClr val="F8F9FB"/>
           </a:solidFill>
           <a:ln w="12700">
             <a:solidFill>
-              <a:srgbClr val="333355"/>
+              <a:srgbClr val="E0E0E8"/>
             </a:solidFill>
           </a:ln>
           <a:effectLst/>
@@ -5048,7 +5048,7 @@
             <a:pPr algn="l">
               <a:defRPr sz="1600" b="1">
                 <a:solidFill>
-                  <a:srgbClr val="00D4AA"/>
+                  <a:srgbClr val="00A585"/>
                 </a:solidFill>
                 <a:latin typeface="맑은 고딕"/>
               </a:defRPr>
@@ -5093,7 +5093,7 @@
               </a:spcAft>
               <a:defRPr sz="1400" b="0">
                 <a:solidFill>
-                  <a:srgbClr val="FFFFFF"/>
+                  <a:srgbClr val="1F1F1F"/>
                 </a:solidFill>
                 <a:latin typeface="맑은 고딕"/>
               </a:defRPr>
@@ -5115,7 +5115,7 @@
               </a:spcAft>
               <a:defRPr sz="1400" b="0">
                 <a:solidFill>
-                  <a:srgbClr val="FFFFFF"/>
+                  <a:srgbClr val="1F1F1F"/>
                 </a:solidFill>
                 <a:latin typeface="맑은 고딕"/>
               </a:defRPr>
@@ -5137,7 +5137,7 @@
               </a:spcAft>
               <a:defRPr sz="1400" b="0">
                 <a:solidFill>
-                  <a:srgbClr val="FFFFFF"/>
+                  <a:srgbClr val="1F1F1F"/>
                 </a:solidFill>
                 <a:latin typeface="맑은 고딕"/>
               </a:defRPr>
@@ -5159,7 +5159,7 @@
               </a:spcAft>
               <a:defRPr sz="1400" b="0">
                 <a:solidFill>
-                  <a:srgbClr val="FFFFFF"/>
+                  <a:srgbClr val="1F1F1F"/>
                 </a:solidFill>
                 <a:latin typeface="맑은 고딕"/>
               </a:defRPr>
@@ -5185,11 +5185,11 @@
             <a:avLst/>
           </a:prstGeom>
           <a:solidFill>
-            <a:srgbClr val="24243E"/>
+            <a:srgbClr val="F8F9FB"/>
           </a:solidFill>
           <a:ln w="12700">
             <a:solidFill>
-              <a:srgbClr val="333355"/>
+              <a:srgbClr val="E0E0E8"/>
             </a:solidFill>
           </a:ln>
           <a:effectLst/>
@@ -5241,7 +5241,7 @@
             <a:pPr algn="l">
               <a:defRPr sz="1600" b="1">
                 <a:solidFill>
-                  <a:srgbClr val="00D4AA"/>
+                  <a:srgbClr val="00A585"/>
                 </a:solidFill>
                 <a:latin typeface="맑은 고딕"/>
               </a:defRPr>
@@ -5286,7 +5286,7 @@
               </a:spcAft>
               <a:defRPr sz="1400" b="0">
                 <a:solidFill>
-                  <a:srgbClr val="FFFFFF"/>
+                  <a:srgbClr val="1F1F1F"/>
                 </a:solidFill>
                 <a:latin typeface="맑은 고딕"/>
               </a:defRPr>
@@ -5308,7 +5308,7 @@
               </a:spcAft>
               <a:defRPr sz="1400" b="0">
                 <a:solidFill>
-                  <a:srgbClr val="FFFFFF"/>
+                  <a:srgbClr val="1F1F1F"/>
                 </a:solidFill>
                 <a:latin typeface="맑은 고딕"/>
               </a:defRPr>
@@ -5330,7 +5330,7 @@
               </a:spcAft>
               <a:defRPr sz="1400" b="0">
                 <a:solidFill>
-                  <a:srgbClr val="FFFFFF"/>
+                  <a:srgbClr val="1F1F1F"/>
                 </a:solidFill>
                 <a:latin typeface="맑은 고딕"/>
               </a:defRPr>
@@ -5352,7 +5352,7 @@
               </a:spcAft>
               <a:defRPr sz="1400" b="0">
                 <a:solidFill>
-                  <a:srgbClr val="FFFFFF"/>
+                  <a:srgbClr val="1F1F1F"/>
                 </a:solidFill>
                 <a:latin typeface="맑은 고딕"/>
               </a:defRPr>
@@ -5374,7 +5374,7 @@
               </a:spcAft>
               <a:defRPr sz="1400" b="0">
                 <a:solidFill>
-                  <a:srgbClr val="FFFFFF"/>
+                  <a:srgbClr val="1F1F1F"/>
                 </a:solidFill>
                 <a:latin typeface="맑은 고딕"/>
               </a:defRPr>
@@ -5396,7 +5396,7 @@
               </a:spcAft>
               <a:defRPr sz="1400" b="0">
                 <a:solidFill>
-                  <a:srgbClr val="FFFFFF"/>
+                  <a:srgbClr val="1F1F1F"/>
                 </a:solidFill>
                 <a:latin typeface="맑은 고딕"/>
               </a:defRPr>
@@ -5432,7 +5432,7 @@
             <a:pPr algn="r">
               <a:defRPr sz="1000" b="0">
                 <a:solidFill>
-                  <a:srgbClr val="94A3B8"/>
+                  <a:srgbClr val="8C8C9A"/>
                 </a:solidFill>
                 <a:latin typeface="맑은 고딕"/>
               </a:defRPr>
@@ -5457,7 +5457,7 @@
     <p:bg>
       <p:bgPr>
         <a:solidFill>
-          <a:srgbClr val="1A1A2E"/>
+          <a:srgbClr val="FFFFFF"/>
         </a:solidFill>
         <a:effectLst/>
       </p:bgPr>
@@ -5484,7 +5484,7 @@
             <a:avLst/>
           </a:prstGeom>
           <a:solidFill>
-            <a:srgbClr val="00D4AA"/>
+            <a:srgbClr val="00A585"/>
           </a:solidFill>
           <a:ln>
             <a:noFill/>
@@ -5538,7 +5538,7 @@
             <a:pPr algn="l">
               <a:defRPr sz="2600" b="1">
                 <a:solidFill>
-                  <a:srgbClr val="FFFFFF"/>
+                  <a:srgbClr val="1F1F1F"/>
                 </a:solidFill>
                 <a:latin typeface="맑은 고딕"/>
               </a:defRPr>
@@ -5564,7 +5564,7 @@
             <a:avLst/>
           </a:prstGeom>
           <a:solidFill>
-            <a:srgbClr val="00D4AA"/>
+            <a:srgbClr val="00A585"/>
           </a:solidFill>
           <a:ln>
             <a:noFill/>
@@ -5608,11 +5608,11 @@
             <a:avLst/>
           </a:prstGeom>
           <a:solidFill>
-            <a:srgbClr val="24243E"/>
+            <a:srgbClr val="F8F9FB"/>
           </a:solidFill>
           <a:ln w="12700">
             <a:solidFill>
-              <a:srgbClr val="333355"/>
+              <a:srgbClr val="E0E0E8"/>
             </a:solidFill>
           </a:ln>
           <a:effectLst/>
@@ -5664,7 +5664,7 @@
             <a:pPr algn="l">
               <a:defRPr sz="1600" b="1">
                 <a:solidFill>
-                  <a:srgbClr val="00D4AA"/>
+                  <a:srgbClr val="00A585"/>
                 </a:solidFill>
                 <a:latin typeface="맑은 고딕"/>
               </a:defRPr>
@@ -5709,7 +5709,7 @@
               </a:spcAft>
               <a:defRPr sz="1400" b="0">
                 <a:solidFill>
-                  <a:srgbClr val="FFFFFF"/>
+                  <a:srgbClr val="1F1F1F"/>
                 </a:solidFill>
                 <a:latin typeface="맑은 고딕"/>
               </a:defRPr>
@@ -5731,7 +5731,7 @@
               </a:spcAft>
               <a:defRPr sz="1400" b="0">
                 <a:solidFill>
-                  <a:srgbClr val="FFFFFF"/>
+                  <a:srgbClr val="1F1F1F"/>
                 </a:solidFill>
                 <a:latin typeface="맑은 고딕"/>
               </a:defRPr>
@@ -5753,7 +5753,7 @@
               </a:spcAft>
               <a:defRPr sz="1400" b="0">
                 <a:solidFill>
-                  <a:srgbClr val="FFFFFF"/>
+                  <a:srgbClr val="1F1F1F"/>
                 </a:solidFill>
                 <a:latin typeface="맑은 고딕"/>
               </a:defRPr>
@@ -5775,7 +5775,7 @@
               </a:spcAft>
               <a:defRPr sz="1400" b="0">
                 <a:solidFill>
-                  <a:srgbClr val="FFFFFF"/>
+                  <a:srgbClr val="1F1F1F"/>
                 </a:solidFill>
                 <a:latin typeface="맑은 고딕"/>
               </a:defRPr>
@@ -5801,11 +5801,11 @@
             <a:avLst/>
           </a:prstGeom>
           <a:solidFill>
-            <a:srgbClr val="24243E"/>
+            <a:srgbClr val="F8F9FB"/>
           </a:solidFill>
           <a:ln w="12700">
             <a:solidFill>
-              <a:srgbClr val="333355"/>
+              <a:srgbClr val="E0E0E8"/>
             </a:solidFill>
           </a:ln>
           <a:effectLst/>
@@ -5857,7 +5857,7 @@
             <a:pPr algn="l">
               <a:defRPr sz="1600" b="1">
                 <a:solidFill>
-                  <a:srgbClr val="00D4AA"/>
+                  <a:srgbClr val="00A585"/>
                 </a:solidFill>
                 <a:latin typeface="맑은 고딕"/>
               </a:defRPr>
@@ -5902,7 +5902,7 @@
               </a:spcAft>
               <a:defRPr sz="1400" b="0">
                 <a:solidFill>
-                  <a:srgbClr val="FFFFFF"/>
+                  <a:srgbClr val="1F1F1F"/>
                 </a:solidFill>
                 <a:latin typeface="맑은 고딕"/>
               </a:defRPr>
@@ -5924,7 +5924,7 @@
               </a:spcAft>
               <a:defRPr sz="1400" b="0">
                 <a:solidFill>
-                  <a:srgbClr val="FFFFFF"/>
+                  <a:srgbClr val="1F1F1F"/>
                 </a:solidFill>
                 <a:latin typeface="맑은 고딕"/>
               </a:defRPr>
@@ -5946,7 +5946,7 @@
               </a:spcAft>
               <a:defRPr sz="1400" b="0">
                 <a:solidFill>
-                  <a:srgbClr val="FFFFFF"/>
+                  <a:srgbClr val="1F1F1F"/>
                 </a:solidFill>
                 <a:latin typeface="맑은 고딕"/>
               </a:defRPr>
@@ -5968,7 +5968,7 @@
               </a:spcAft>
               <a:defRPr sz="1300">
                 <a:solidFill>
-                  <a:srgbClr val="94A3B8"/>
+                  <a:srgbClr val="8C8C9A"/>
                 </a:solidFill>
                 <a:latin typeface="맑은 고딕"/>
               </a:defRPr>
@@ -5990,7 +5990,7 @@
               </a:spcAft>
               <a:defRPr sz="1300">
                 <a:solidFill>
-                  <a:srgbClr val="94A3B8"/>
+                  <a:srgbClr val="8C8C9A"/>
                 </a:solidFill>
                 <a:latin typeface="맑은 고딕"/>
               </a:defRPr>
@@ -6026,7 +6026,7 @@
             <a:pPr algn="r">
               <a:defRPr sz="1000" b="0">
                 <a:solidFill>
-                  <a:srgbClr val="94A3B8"/>
+                  <a:srgbClr val="8C8C9A"/>
                 </a:solidFill>
                 <a:latin typeface="맑은 고딕"/>
               </a:defRPr>
@@ -6051,7 +6051,7 @@
     <p:bg>
       <p:bgPr>
         <a:solidFill>
-          <a:srgbClr val="1A1A2E"/>
+          <a:srgbClr val="FFFFFF"/>
         </a:solidFill>
         <a:effectLst/>
       </p:bgPr>
@@ -6078,7 +6078,7 @@
             <a:avLst/>
           </a:prstGeom>
           <a:solidFill>
-            <a:srgbClr val="00D4AA"/>
+            <a:srgbClr val="00A585"/>
           </a:solidFill>
           <a:ln>
             <a:noFill/>
@@ -6132,7 +6132,7 @@
             <a:pPr algn="l">
               <a:defRPr sz="2600" b="1">
                 <a:solidFill>
-                  <a:srgbClr val="FFFFFF"/>
+                  <a:srgbClr val="1F1F1F"/>
                 </a:solidFill>
                 <a:latin typeface="맑은 고딕"/>
               </a:defRPr>
@@ -6158,7 +6158,7 @@
             <a:avLst/>
           </a:prstGeom>
           <a:solidFill>
-            <a:srgbClr val="00D4AA"/>
+            <a:srgbClr val="00A585"/>
           </a:solidFill>
           <a:ln>
             <a:noFill/>
@@ -6202,11 +6202,11 @@
             <a:avLst/>
           </a:prstGeom>
           <a:solidFill>
-            <a:srgbClr val="24243E"/>
+            <a:srgbClr val="F8F9FB"/>
           </a:solidFill>
           <a:ln w="12700">
             <a:solidFill>
-              <a:srgbClr val="333355"/>
+              <a:srgbClr val="E0E0E8"/>
             </a:solidFill>
           </a:ln>
           <a:effectLst/>
@@ -6258,7 +6258,7 @@
             <a:pPr algn="l">
               <a:defRPr sz="1600" b="1">
                 <a:solidFill>
-                  <a:srgbClr val="00D4AA"/>
+                  <a:srgbClr val="00A585"/>
                 </a:solidFill>
                 <a:latin typeface="맑은 고딕"/>
               </a:defRPr>
@@ -6303,7 +6303,7 @@
               </a:spcAft>
               <a:defRPr sz="1400" b="0">
                 <a:solidFill>
-                  <a:srgbClr val="FFFFFF"/>
+                  <a:srgbClr val="1F1F1F"/>
                 </a:solidFill>
                 <a:latin typeface="맑은 고딕"/>
               </a:defRPr>
@@ -6325,7 +6325,7 @@
               </a:spcAft>
               <a:defRPr sz="1400" b="0">
                 <a:solidFill>
-                  <a:srgbClr val="FFFFFF"/>
+                  <a:srgbClr val="1F1F1F"/>
                 </a:solidFill>
                 <a:latin typeface="맑은 고딕"/>
               </a:defRPr>
@@ -6347,7 +6347,7 @@
               </a:spcAft>
               <a:defRPr sz="1400" b="0">
                 <a:solidFill>
-                  <a:srgbClr val="FFFFFF"/>
+                  <a:srgbClr val="1F1F1F"/>
                 </a:solidFill>
                 <a:latin typeface="맑은 고딕"/>
               </a:defRPr>
@@ -6369,7 +6369,7 @@
               </a:spcAft>
               <a:defRPr sz="1400" b="0">
                 <a:solidFill>
-                  <a:srgbClr val="FFFFFF"/>
+                  <a:srgbClr val="1F1F1F"/>
                 </a:solidFill>
                 <a:latin typeface="맑은 고딕"/>
               </a:defRPr>
@@ -6391,7 +6391,7 @@
               </a:spcAft>
               <a:defRPr sz="1400" b="0">
                 <a:solidFill>
-                  <a:srgbClr val="FFFFFF"/>
+                  <a:srgbClr val="1F1F1F"/>
                 </a:solidFill>
                 <a:latin typeface="맑은 고딕"/>
               </a:defRPr>
@@ -6417,11 +6417,11 @@
             <a:avLst/>
           </a:prstGeom>
           <a:solidFill>
-            <a:srgbClr val="24243E"/>
+            <a:srgbClr val="F8F9FB"/>
           </a:solidFill>
           <a:ln w="12700">
             <a:solidFill>
-              <a:srgbClr val="333355"/>
+              <a:srgbClr val="E0E0E8"/>
             </a:solidFill>
           </a:ln>
           <a:effectLst/>
@@ -6473,7 +6473,7 @@
             <a:pPr algn="l">
               <a:defRPr sz="1600" b="1">
                 <a:solidFill>
-                  <a:srgbClr val="00D4AA"/>
+                  <a:srgbClr val="00A585"/>
                 </a:solidFill>
                 <a:latin typeface="맑은 고딕"/>
               </a:defRPr>
@@ -6518,7 +6518,7 @@
               </a:spcAft>
               <a:defRPr sz="1400" b="0">
                 <a:solidFill>
-                  <a:srgbClr val="FFFFFF"/>
+                  <a:srgbClr val="1F1F1F"/>
                 </a:solidFill>
                 <a:latin typeface="맑은 고딕"/>
               </a:defRPr>
@@ -6540,7 +6540,7 @@
               </a:spcAft>
               <a:defRPr sz="1400" b="0">
                 <a:solidFill>
-                  <a:srgbClr val="FFFFFF"/>
+                  <a:srgbClr val="1F1F1F"/>
                 </a:solidFill>
                 <a:latin typeface="맑은 고딕"/>
               </a:defRPr>
@@ -6562,7 +6562,7 @@
               </a:spcAft>
               <a:defRPr sz="1400" b="0">
                 <a:solidFill>
-                  <a:srgbClr val="FFFFFF"/>
+                  <a:srgbClr val="1F1F1F"/>
                 </a:solidFill>
                 <a:latin typeface="맑은 고딕"/>
               </a:defRPr>
@@ -6584,7 +6584,7 @@
               </a:spcAft>
               <a:defRPr sz="1400" b="0">
                 <a:solidFill>
-                  <a:srgbClr val="FFFFFF"/>
+                  <a:srgbClr val="1F1F1F"/>
                 </a:solidFill>
                 <a:latin typeface="맑은 고딕"/>
               </a:defRPr>
@@ -6606,7 +6606,7 @@
               </a:spcAft>
               <a:defRPr sz="1400" b="0">
                 <a:solidFill>
-                  <a:srgbClr val="FFFFFF"/>
+                  <a:srgbClr val="1F1F1F"/>
                 </a:solidFill>
                 <a:latin typeface="맑은 고딕"/>
               </a:defRPr>
@@ -6642,7 +6642,7 @@
             <a:pPr algn="r">
               <a:defRPr sz="1000" b="0">
                 <a:solidFill>
-                  <a:srgbClr val="94A3B8"/>
+                  <a:srgbClr val="8C8C9A"/>
                 </a:solidFill>
                 <a:latin typeface="맑은 고딕"/>
               </a:defRPr>
@@ -6667,7 +6667,7 @@
     <p:bg>
       <p:bgPr>
         <a:solidFill>
-          <a:srgbClr val="1A1A2E"/>
+          <a:srgbClr val="FFFFFF"/>
         </a:solidFill>
         <a:effectLst/>
       </p:bgPr>
@@ -6694,7 +6694,7 @@
             <a:avLst/>
           </a:prstGeom>
           <a:solidFill>
-            <a:srgbClr val="00D4AA"/>
+            <a:srgbClr val="00A585"/>
           </a:solidFill>
           <a:ln>
             <a:noFill/>
@@ -6748,7 +6748,7 @@
             <a:pPr algn="l">
               <a:defRPr sz="2600" b="1">
                 <a:solidFill>
-                  <a:srgbClr val="FFFFFF"/>
+                  <a:srgbClr val="1F1F1F"/>
                 </a:solidFill>
                 <a:latin typeface="맑은 고딕"/>
               </a:defRPr>
@@ -6774,7 +6774,7 @@
             <a:avLst/>
           </a:prstGeom>
           <a:solidFill>
-            <a:srgbClr val="00D4AA"/>
+            <a:srgbClr val="00A585"/>
           </a:solidFill>
           <a:ln>
             <a:noFill/>
@@ -6818,11 +6818,11 @@
             <a:avLst/>
           </a:prstGeom>
           <a:solidFill>
-            <a:srgbClr val="24243E"/>
+            <a:srgbClr val="F8F9FB"/>
           </a:solidFill>
           <a:ln w="12700">
             <a:solidFill>
-              <a:srgbClr val="333355"/>
+              <a:srgbClr val="E0E0E8"/>
             </a:solidFill>
           </a:ln>
           <a:effectLst/>
@@ -6883,7 +6883,7 @@
               </a:spcAft>
               <a:defRPr sz="1600" b="0">
                 <a:solidFill>
-                  <a:srgbClr val="FFFFFF"/>
+                  <a:srgbClr val="1F1F1F"/>
                 </a:solidFill>
                 <a:latin typeface="맑은 고딕"/>
               </a:defRPr>
@@ -6905,7 +6905,7 @@
               </a:spcAft>
               <a:defRPr sz="1600" b="0">
                 <a:solidFill>
-                  <a:srgbClr val="FFFFFF"/>
+                  <a:srgbClr val="1F1F1F"/>
                 </a:solidFill>
                 <a:latin typeface="맑은 고딕"/>
               </a:defRPr>
@@ -6927,7 +6927,7 @@
               </a:spcAft>
               <a:defRPr sz="1600" b="0">
                 <a:solidFill>
-                  <a:srgbClr val="FFFFFF"/>
+                  <a:srgbClr val="1F1F1F"/>
                 </a:solidFill>
                 <a:latin typeface="맑은 고딕"/>
               </a:defRPr>
@@ -6949,7 +6949,7 @@
               </a:spcAft>
               <a:defRPr sz="1600" b="0">
                 <a:solidFill>
-                  <a:srgbClr val="FFFFFF"/>
+                  <a:srgbClr val="1F1F1F"/>
                 </a:solidFill>
                 <a:latin typeface="맑은 고딕"/>
               </a:defRPr>
@@ -6971,7 +6971,7 @@
               </a:spcAft>
               <a:defRPr sz="1500">
                 <a:solidFill>
-                  <a:srgbClr val="94A3B8"/>
+                  <a:srgbClr val="8C8C9A"/>
                 </a:solidFill>
                 <a:latin typeface="맑은 고딕"/>
               </a:defRPr>
@@ -6993,7 +6993,7 @@
               </a:spcAft>
               <a:defRPr sz="1500">
                 <a:solidFill>
-                  <a:srgbClr val="94A3B8"/>
+                  <a:srgbClr val="8C8C9A"/>
                 </a:solidFill>
                 <a:latin typeface="맑은 고딕"/>
               </a:defRPr>
@@ -7015,7 +7015,7 @@
               </a:spcAft>
               <a:defRPr sz="1600" b="0">
                 <a:solidFill>
-                  <a:srgbClr val="FFFFFF"/>
+                  <a:srgbClr val="1F1F1F"/>
                 </a:solidFill>
                 <a:latin typeface="맑은 고딕"/>
               </a:defRPr>
@@ -7051,7 +7051,7 @@
             <a:pPr algn="r">
               <a:defRPr sz="1000" b="0">
                 <a:solidFill>
-                  <a:srgbClr val="94A3B8"/>
+                  <a:srgbClr val="8C8C9A"/>
                 </a:solidFill>
                 <a:latin typeface="맑은 고딕"/>
               </a:defRPr>
@@ -7076,7 +7076,7 @@
     <p:bg>
       <p:bgPr>
         <a:solidFill>
-          <a:srgbClr val="1A1A2E"/>
+          <a:srgbClr val="FFFFFF"/>
         </a:solidFill>
         <a:effectLst/>
       </p:bgPr>
@@ -7103,7 +7103,7 @@
             <a:avLst/>
           </a:prstGeom>
           <a:solidFill>
-            <a:srgbClr val="7C3AED"/>
+            <a:srgbClr val="6C2ED6"/>
           </a:solidFill>
           <a:ln>
             <a:noFill/>
@@ -7147,7 +7147,7 @@
             <a:avLst/>
           </a:prstGeom>
           <a:solidFill>
-            <a:srgbClr val="7C3AED"/>
+            <a:srgbClr val="6C2ED6"/>
           </a:solidFill>
           <a:ln>
             <a:noFill/>
@@ -7214,7 +7214,7 @@
             <a:pPr algn="l">
               <a:defRPr sz="4000" b="1">
                 <a:solidFill>
-                  <a:srgbClr val="FFFFFF"/>
+                  <a:srgbClr val="1F1F1F"/>
                 </a:solidFill>
                 <a:latin typeface="맑은 고딕"/>
               </a:defRPr>
@@ -7250,7 +7250,7 @@
             <a:pPr algn="l">
               <a:defRPr sz="1800" b="0">
                 <a:solidFill>
-                  <a:srgbClr val="94A3B8"/>
+                  <a:srgbClr val="5A5A6E"/>
                 </a:solidFill>
                 <a:latin typeface="맑은 고딕"/>
               </a:defRPr>
@@ -7276,7 +7276,7 @@
             <a:avLst/>
           </a:prstGeom>
           <a:solidFill>
-            <a:srgbClr val="7C3AED"/>
+            <a:srgbClr val="6C2ED6"/>
           </a:solidFill>
           <a:ln>
             <a:noFill/>
@@ -7320,7 +7320,7 @@
             <a:avLst/>
           </a:prstGeom>
           <a:solidFill>
-            <a:srgbClr val="7C3AED"/>
+            <a:srgbClr val="6C2ED6"/>
           </a:solidFill>
           <a:ln>
             <a:noFill/>
@@ -7363,7 +7363,7 @@
     <p:bg>
       <p:bgPr>
         <a:solidFill>
-          <a:srgbClr val="1A1A2E"/>
+          <a:srgbClr val="FFFFFF"/>
         </a:solidFill>
         <a:effectLst/>
       </p:bgPr>
@@ -7390,7 +7390,7 @@
             <a:avLst/>
           </a:prstGeom>
           <a:solidFill>
-            <a:srgbClr val="7C3AED"/>
+            <a:srgbClr val="6C2ED6"/>
           </a:solidFill>
           <a:ln>
             <a:noFill/>
@@ -7444,7 +7444,7 @@
             <a:pPr algn="l">
               <a:defRPr sz="2600" b="1">
                 <a:solidFill>
-                  <a:srgbClr val="FFFFFF"/>
+                  <a:srgbClr val="1F1F1F"/>
                 </a:solidFill>
                 <a:latin typeface="맑은 고딕"/>
               </a:defRPr>
@@ -7470,7 +7470,7 @@
             <a:avLst/>
           </a:prstGeom>
           <a:solidFill>
-            <a:srgbClr val="7C3AED"/>
+            <a:srgbClr val="6C2ED6"/>
           </a:solidFill>
           <a:ln>
             <a:noFill/>
@@ -7514,11 +7514,11 @@
             <a:avLst/>
           </a:prstGeom>
           <a:solidFill>
-            <a:srgbClr val="24243E"/>
+            <a:srgbClr val="F8F9FB"/>
           </a:solidFill>
           <a:ln w="12700">
             <a:solidFill>
-              <a:srgbClr val="333355"/>
+              <a:srgbClr val="E0E0E8"/>
             </a:solidFill>
           </a:ln>
           <a:effectLst/>
@@ -7579,7 +7579,7 @@
               </a:spcAft>
               <a:defRPr sz="1600" b="0">
                 <a:solidFill>
-                  <a:srgbClr val="FFFFFF"/>
+                  <a:srgbClr val="1F1F1F"/>
                 </a:solidFill>
                 <a:latin typeface="맑은 고딕"/>
               </a:defRPr>
@@ -7601,7 +7601,7 @@
               </a:spcAft>
               <a:defRPr sz="1600" b="0">
                 <a:solidFill>
-                  <a:srgbClr val="FFFFFF"/>
+                  <a:srgbClr val="1F1F1F"/>
                 </a:solidFill>
                 <a:latin typeface="맑은 고딕"/>
               </a:defRPr>
@@ -7623,7 +7623,7 @@
               </a:spcAft>
               <a:defRPr sz="1500">
                 <a:solidFill>
-                  <a:srgbClr val="94A3B8"/>
+                  <a:srgbClr val="8C8C9A"/>
                 </a:solidFill>
                 <a:latin typeface="맑은 고딕"/>
               </a:defRPr>
@@ -7645,7 +7645,7 @@
               </a:spcAft>
               <a:defRPr sz="1500">
                 <a:solidFill>
-                  <a:srgbClr val="94A3B8"/>
+                  <a:srgbClr val="8C8C9A"/>
                 </a:solidFill>
                 <a:latin typeface="맑은 고딕"/>
               </a:defRPr>
@@ -7667,7 +7667,7 @@
               </a:spcAft>
               <a:defRPr sz="1500">
                 <a:solidFill>
-                  <a:srgbClr val="94A3B8"/>
+                  <a:srgbClr val="8C8C9A"/>
                 </a:solidFill>
                 <a:latin typeface="맑은 고딕"/>
               </a:defRPr>
@@ -7689,7 +7689,7 @@
               </a:spcAft>
               <a:defRPr sz="1500">
                 <a:solidFill>
-                  <a:srgbClr val="94A3B8"/>
+                  <a:srgbClr val="8C8C9A"/>
                 </a:solidFill>
                 <a:latin typeface="맑은 고딕"/>
               </a:defRPr>
@@ -7711,7 +7711,7 @@
               </a:spcAft>
               <a:defRPr sz="1600" b="0">
                 <a:solidFill>
-                  <a:srgbClr val="FFFFFF"/>
+                  <a:srgbClr val="1F1F1F"/>
                 </a:solidFill>
                 <a:latin typeface="맑은 고딕"/>
               </a:defRPr>
@@ -7747,7 +7747,7 @@
             <a:pPr algn="r">
               <a:defRPr sz="1000" b="0">
                 <a:solidFill>
-                  <a:srgbClr val="94A3B8"/>
+                  <a:srgbClr val="8C8C9A"/>
                 </a:solidFill>
                 <a:latin typeface="맑은 고딕"/>
               </a:defRPr>
@@ -7772,7 +7772,7 @@
     <p:bg>
       <p:bgPr>
         <a:solidFill>
-          <a:srgbClr val="1A1A2E"/>
+          <a:srgbClr val="FFFFFF"/>
         </a:solidFill>
         <a:effectLst/>
       </p:bgPr>
@@ -7799,7 +7799,7 @@
             <a:avLst/>
           </a:prstGeom>
           <a:solidFill>
-            <a:srgbClr val="7C3AED"/>
+            <a:srgbClr val="6C2ED6"/>
           </a:solidFill>
           <a:ln>
             <a:noFill/>
@@ -7853,7 +7853,7 @@
             <a:pPr algn="l">
               <a:defRPr sz="2600" b="1">
                 <a:solidFill>
-                  <a:srgbClr val="FFFFFF"/>
+                  <a:srgbClr val="1F1F1F"/>
                 </a:solidFill>
                 <a:latin typeface="맑은 고딕"/>
               </a:defRPr>
@@ -7879,7 +7879,7 @@
             <a:avLst/>
           </a:prstGeom>
           <a:solidFill>
-            <a:srgbClr val="7C3AED"/>
+            <a:srgbClr val="6C2ED6"/>
           </a:solidFill>
           <a:ln>
             <a:noFill/>
@@ -7923,11 +7923,11 @@
             <a:avLst/>
           </a:prstGeom>
           <a:solidFill>
-            <a:srgbClr val="24243E"/>
+            <a:srgbClr val="F8F9FB"/>
           </a:solidFill>
           <a:ln w="12700">
             <a:solidFill>
-              <a:srgbClr val="333355"/>
+              <a:srgbClr val="E0E0E8"/>
             </a:solidFill>
           </a:ln>
           <a:effectLst/>
@@ -7988,7 +7988,7 @@
               </a:spcAft>
               <a:defRPr sz="1600" b="0">
                 <a:solidFill>
-                  <a:srgbClr val="FFFFFF"/>
+                  <a:srgbClr val="1F1F1F"/>
                 </a:solidFill>
                 <a:latin typeface="맑은 고딕"/>
               </a:defRPr>
@@ -8010,7 +8010,7 @@
               </a:spcAft>
               <a:defRPr sz="1600" b="0">
                 <a:solidFill>
-                  <a:srgbClr val="FFFFFF"/>
+                  <a:srgbClr val="1F1F1F"/>
                 </a:solidFill>
                 <a:latin typeface="맑은 고딕"/>
               </a:defRPr>
@@ -8032,7 +8032,7 @@
               </a:spcAft>
               <a:defRPr sz="1500">
                 <a:solidFill>
-                  <a:srgbClr val="94A3B8"/>
+                  <a:srgbClr val="8C8C9A"/>
                 </a:solidFill>
                 <a:latin typeface="맑은 고딕"/>
               </a:defRPr>
@@ -8054,7 +8054,7 @@
               </a:spcAft>
               <a:defRPr sz="1500">
                 <a:solidFill>
-                  <a:srgbClr val="94A3B8"/>
+                  <a:srgbClr val="8C8C9A"/>
                 </a:solidFill>
                 <a:latin typeface="맑은 고딕"/>
               </a:defRPr>
@@ -8076,7 +8076,7 @@
               </a:spcAft>
               <a:defRPr sz="1500">
                 <a:solidFill>
-                  <a:srgbClr val="94A3B8"/>
+                  <a:srgbClr val="8C8C9A"/>
                 </a:solidFill>
                 <a:latin typeface="맑은 고딕"/>
               </a:defRPr>
@@ -8098,7 +8098,7 @@
               </a:spcAft>
               <a:defRPr sz="1500">
                 <a:solidFill>
-                  <a:srgbClr val="94A3B8"/>
+                  <a:srgbClr val="8C8C9A"/>
                 </a:solidFill>
                 <a:latin typeface="맑은 고딕"/>
               </a:defRPr>
@@ -8120,7 +8120,7 @@
               </a:spcAft>
               <a:defRPr sz="1600" b="0">
                 <a:solidFill>
-                  <a:srgbClr val="FFFFFF"/>
+                  <a:srgbClr val="1F1F1F"/>
                 </a:solidFill>
                 <a:latin typeface="맑은 고딕"/>
               </a:defRPr>
@@ -8156,7 +8156,7 @@
             <a:pPr algn="r">
               <a:defRPr sz="1000" b="0">
                 <a:solidFill>
-                  <a:srgbClr val="94A3B8"/>
+                  <a:srgbClr val="8C8C9A"/>
                 </a:solidFill>
                 <a:latin typeface="맑은 고딕"/>
               </a:defRPr>
@@ -8181,7 +8181,7 @@
     <p:bg>
       <p:bgPr>
         <a:solidFill>
-          <a:srgbClr val="1A1A2E"/>
+          <a:srgbClr val="FFFFFF"/>
         </a:solidFill>
         <a:effectLst/>
       </p:bgPr>
@@ -8208,7 +8208,7 @@
             <a:avLst/>
           </a:prstGeom>
           <a:solidFill>
-            <a:srgbClr val="0096D6"/>
+            <a:srgbClr val="0070C0"/>
           </a:solidFill>
           <a:ln>
             <a:noFill/>
@@ -8262,7 +8262,7 @@
             <a:pPr algn="l">
               <a:defRPr sz="3000" b="1">
                 <a:solidFill>
-                  <a:srgbClr val="FFFFFF"/>
+                  <a:srgbClr val="1F1F1F"/>
                 </a:solidFill>
                 <a:latin typeface="맑은 고딕"/>
               </a:defRPr>
@@ -8288,7 +8288,7 @@
             <a:avLst/>
           </a:prstGeom>
           <a:solidFill>
-            <a:srgbClr val="00D4AA"/>
+            <a:srgbClr val="00A585"/>
           </a:solidFill>
           <a:ln>
             <a:noFill/>
@@ -8332,7 +8332,7 @@
             <a:avLst/>
           </a:prstGeom>
           <a:solidFill>
-            <a:srgbClr val="0096D6"/>
+            <a:srgbClr val="0070C0"/>
           </a:solidFill>
           <a:ln>
             <a:noFill/>
@@ -8386,7 +8386,7 @@
             <a:pPr algn="l">
               <a:defRPr sz="1600" b="0">
                 <a:solidFill>
-                  <a:srgbClr val="FFFFFF"/>
+                  <a:srgbClr val="1F1F1F"/>
                 </a:solidFill>
                 <a:latin typeface="맑은 고딕"/>
               </a:defRPr>
@@ -8412,7 +8412,7 @@
             <a:avLst/>
           </a:prstGeom>
           <a:solidFill>
-            <a:srgbClr val="00D4AA"/>
+            <a:srgbClr val="00A585"/>
           </a:solidFill>
           <a:ln>
             <a:noFill/>
@@ -8466,7 +8466,7 @@
             <a:pPr algn="l">
               <a:defRPr sz="1600" b="0">
                 <a:solidFill>
-                  <a:srgbClr val="FFFFFF"/>
+                  <a:srgbClr val="1F1F1F"/>
                 </a:solidFill>
                 <a:latin typeface="맑은 고딕"/>
               </a:defRPr>
@@ -8492,7 +8492,7 @@
             <a:avLst/>
           </a:prstGeom>
           <a:solidFill>
-            <a:srgbClr val="7C3AED"/>
+            <a:srgbClr val="6C2ED6"/>
           </a:solidFill>
           <a:ln>
             <a:noFill/>
@@ -8546,7 +8546,7 @@
             <a:pPr algn="l">
               <a:defRPr sz="1600" b="0">
                 <a:solidFill>
-                  <a:srgbClr val="FFFFFF"/>
+                  <a:srgbClr val="1F1F1F"/>
                 </a:solidFill>
                 <a:latin typeface="맑은 고딕"/>
               </a:defRPr>
@@ -8626,7 +8626,7 @@
             <a:pPr algn="l">
               <a:defRPr sz="1600" b="0">
                 <a:solidFill>
-                  <a:srgbClr val="FFFFFF"/>
+                  <a:srgbClr val="1F1F1F"/>
                 </a:solidFill>
                 <a:latin typeface="맑은 고딕"/>
               </a:defRPr>
@@ -8652,7 +8652,7 @@
             <a:avLst/>
           </a:prstGeom>
           <a:solidFill>
-            <a:srgbClr val="F59E0B"/>
+            <a:srgbClr val="E08A00"/>
           </a:solidFill>
           <a:ln>
             <a:noFill/>
@@ -8706,7 +8706,7 @@
             <a:pPr algn="l">
               <a:defRPr sz="1600" b="0">
                 <a:solidFill>
-                  <a:srgbClr val="FFFFFF"/>
+                  <a:srgbClr val="1F1F1F"/>
                 </a:solidFill>
                 <a:latin typeface="맑은 고딕"/>
               </a:defRPr>
@@ -8786,7 +8786,7 @@
             <a:pPr algn="l">
               <a:defRPr sz="1600" b="0">
                 <a:solidFill>
-                  <a:srgbClr val="FFFFFF"/>
+                  <a:srgbClr val="1F1F1F"/>
                 </a:solidFill>
                 <a:latin typeface="맑은 고딕"/>
               </a:defRPr>
@@ -8812,7 +8812,7 @@
             <a:avLst/>
           </a:prstGeom>
           <a:solidFill>
-            <a:srgbClr val="22C55E"/>
+            <a:srgbClr val="16A34A"/>
           </a:solidFill>
           <a:ln>
             <a:noFill/>
@@ -8866,7 +8866,7 @@
             <a:pPr algn="l">
               <a:defRPr sz="1600" b="0">
                 <a:solidFill>
-                  <a:srgbClr val="FFFFFF"/>
+                  <a:srgbClr val="1F1F1F"/>
                 </a:solidFill>
                 <a:latin typeface="맑은 고딕"/>
               </a:defRPr>
@@ -8946,7 +8946,7 @@
             <a:pPr algn="l">
               <a:defRPr sz="1600" b="0">
                 <a:solidFill>
-                  <a:srgbClr val="FFFFFF"/>
+                  <a:srgbClr val="1F1F1F"/>
                 </a:solidFill>
                 <a:latin typeface="맑은 고딕"/>
               </a:defRPr>
@@ -8972,7 +8972,7 @@
             <a:avLst/>
           </a:prstGeom>
           <a:solidFill>
-            <a:srgbClr val="EF4444"/>
+            <a:srgbClr val="DC2E2E"/>
           </a:solidFill>
           <a:ln>
             <a:noFill/>
@@ -9026,7 +9026,7 @@
             <a:pPr algn="l">
               <a:defRPr sz="1600" b="0">
                 <a:solidFill>
-                  <a:srgbClr val="FFFFFF"/>
+                  <a:srgbClr val="1F1F1F"/>
                 </a:solidFill>
                 <a:latin typeface="맑은 고딕"/>
               </a:defRPr>
@@ -9106,7 +9106,7 @@
             <a:pPr algn="l">
               <a:defRPr sz="1600" b="0">
                 <a:solidFill>
-                  <a:srgbClr val="FFFFFF"/>
+                  <a:srgbClr val="1F1F1F"/>
                 </a:solidFill>
                 <a:latin typeface="맑은 고딕"/>
               </a:defRPr>
@@ -9186,7 +9186,7 @@
             <a:pPr algn="l">
               <a:defRPr sz="1600" b="0">
                 <a:solidFill>
-                  <a:srgbClr val="FFFFFF"/>
+                  <a:srgbClr val="1F1F1F"/>
                 </a:solidFill>
                 <a:latin typeface="맑은 고딕"/>
               </a:defRPr>
@@ -9212,7 +9212,7 @@
             <a:avLst/>
           </a:prstGeom>
           <a:solidFill>
-            <a:srgbClr val="94A3B8"/>
+            <a:srgbClr val="6B7280"/>
           </a:solidFill>
           <a:ln>
             <a:noFill/>
@@ -9266,7 +9266,7 @@
             <a:pPr algn="l">
               <a:defRPr sz="1600" b="0">
                 <a:solidFill>
-                  <a:srgbClr val="FFFFFF"/>
+                  <a:srgbClr val="1F1F1F"/>
                 </a:solidFill>
                 <a:latin typeface="맑은 고딕"/>
               </a:defRPr>
@@ -9291,7 +9291,7 @@
     <p:bg>
       <p:bgPr>
         <a:solidFill>
-          <a:srgbClr val="1A1A2E"/>
+          <a:srgbClr val="FFFFFF"/>
         </a:solidFill>
         <a:effectLst/>
       </p:bgPr>
@@ -9318,7 +9318,7 @@
             <a:avLst/>
           </a:prstGeom>
           <a:solidFill>
-            <a:srgbClr val="7C3AED"/>
+            <a:srgbClr val="6C2ED6"/>
           </a:solidFill>
           <a:ln>
             <a:noFill/>
@@ -9372,7 +9372,7 @@
             <a:pPr algn="l">
               <a:defRPr sz="2600" b="1">
                 <a:solidFill>
-                  <a:srgbClr val="FFFFFF"/>
+                  <a:srgbClr val="1F1F1F"/>
                 </a:solidFill>
                 <a:latin typeface="맑은 고딕"/>
               </a:defRPr>
@@ -9398,7 +9398,7 @@
             <a:avLst/>
           </a:prstGeom>
           <a:solidFill>
-            <a:srgbClr val="7C3AED"/>
+            <a:srgbClr val="6C2ED6"/>
           </a:solidFill>
           <a:ln>
             <a:noFill/>
@@ -9442,11 +9442,11 @@
             <a:avLst/>
           </a:prstGeom>
           <a:solidFill>
-            <a:srgbClr val="24243E"/>
+            <a:srgbClr val="F8F9FB"/>
           </a:solidFill>
           <a:ln w="12700">
             <a:solidFill>
-              <a:srgbClr val="333355"/>
+              <a:srgbClr val="E0E0E8"/>
             </a:solidFill>
           </a:ln>
           <a:effectLst/>
@@ -9498,7 +9498,7 @@
             <a:pPr algn="l">
               <a:defRPr sz="1600" b="1">
                 <a:solidFill>
-                  <a:srgbClr val="7C3AED"/>
+                  <a:srgbClr val="6C2ED6"/>
                 </a:solidFill>
                 <a:latin typeface="맑은 고딕"/>
               </a:defRPr>
@@ -9543,7 +9543,7 @@
               </a:spcAft>
               <a:defRPr sz="1400" b="0">
                 <a:solidFill>
-                  <a:srgbClr val="FFFFFF"/>
+                  <a:srgbClr val="1F1F1F"/>
                 </a:solidFill>
                 <a:latin typeface="맑은 고딕"/>
               </a:defRPr>
@@ -9565,7 +9565,7 @@
               </a:spcAft>
               <a:defRPr sz="1400" b="0">
                 <a:solidFill>
-                  <a:srgbClr val="FFFFFF"/>
+                  <a:srgbClr val="1F1F1F"/>
                 </a:solidFill>
                 <a:latin typeface="맑은 고딕"/>
               </a:defRPr>
@@ -9587,7 +9587,7 @@
               </a:spcAft>
               <a:defRPr sz="1300">
                 <a:solidFill>
-                  <a:srgbClr val="94A3B8"/>
+                  <a:srgbClr val="8C8C9A"/>
                 </a:solidFill>
                 <a:latin typeface="맑은 고딕"/>
               </a:defRPr>
@@ -9609,7 +9609,7 @@
               </a:spcAft>
               <a:defRPr sz="1300">
                 <a:solidFill>
-                  <a:srgbClr val="94A3B8"/>
+                  <a:srgbClr val="8C8C9A"/>
                 </a:solidFill>
                 <a:latin typeface="맑은 고딕"/>
               </a:defRPr>
@@ -9631,7 +9631,7 @@
               </a:spcAft>
               <a:defRPr sz="1400" b="0">
                 <a:solidFill>
-                  <a:srgbClr val="FFFFFF"/>
+                  <a:srgbClr val="1F1F1F"/>
                 </a:solidFill>
                 <a:latin typeface="맑은 고딕"/>
               </a:defRPr>
@@ -9653,7 +9653,7 @@
               </a:spcAft>
               <a:defRPr sz="1400" b="0">
                 <a:solidFill>
-                  <a:srgbClr val="FFFFFF"/>
+                  <a:srgbClr val="1F1F1F"/>
                 </a:solidFill>
                 <a:latin typeface="맑은 고딕"/>
               </a:defRPr>
@@ -9679,11 +9679,11 @@
             <a:avLst/>
           </a:prstGeom>
           <a:solidFill>
-            <a:srgbClr val="24243E"/>
+            <a:srgbClr val="F8F9FB"/>
           </a:solidFill>
           <a:ln w="12700">
             <a:solidFill>
-              <a:srgbClr val="333355"/>
+              <a:srgbClr val="E0E0E8"/>
             </a:solidFill>
           </a:ln>
           <a:effectLst/>
@@ -9735,7 +9735,7 @@
             <a:pPr algn="l">
               <a:defRPr sz="1600" b="1">
                 <a:solidFill>
-                  <a:srgbClr val="7C3AED"/>
+                  <a:srgbClr val="6C2ED6"/>
                 </a:solidFill>
                 <a:latin typeface="맑은 고딕"/>
               </a:defRPr>
@@ -9780,7 +9780,7 @@
               </a:spcAft>
               <a:defRPr sz="1400" b="0">
                 <a:solidFill>
-                  <a:srgbClr val="FFFFFF"/>
+                  <a:srgbClr val="1F1F1F"/>
                 </a:solidFill>
                 <a:latin typeface="맑은 고딕"/>
               </a:defRPr>
@@ -9802,7 +9802,7 @@
               </a:spcAft>
               <a:defRPr sz="1400" b="0">
                 <a:solidFill>
-                  <a:srgbClr val="FFFFFF"/>
+                  <a:srgbClr val="1F1F1F"/>
                 </a:solidFill>
                 <a:latin typeface="맑은 고딕"/>
               </a:defRPr>
@@ -9824,7 +9824,7 @@
               </a:spcAft>
               <a:defRPr sz="1400" b="0">
                 <a:solidFill>
-                  <a:srgbClr val="FFFFFF"/>
+                  <a:srgbClr val="1F1F1F"/>
                 </a:solidFill>
                 <a:latin typeface="맑은 고딕"/>
               </a:defRPr>
@@ -9846,7 +9846,7 @@
               </a:spcAft>
               <a:defRPr sz="1400" b="0">
                 <a:solidFill>
-                  <a:srgbClr val="FFFFFF"/>
+                  <a:srgbClr val="1F1F1F"/>
                 </a:solidFill>
                 <a:latin typeface="맑은 고딕"/>
               </a:defRPr>
@@ -9868,7 +9868,7 @@
               </a:spcAft>
               <a:defRPr sz="1400" b="0">
                 <a:solidFill>
-                  <a:srgbClr val="FFFFFF"/>
+                  <a:srgbClr val="1F1F1F"/>
                 </a:solidFill>
                 <a:latin typeface="맑은 고딕"/>
               </a:defRPr>
@@ -9904,7 +9904,7 @@
             <a:pPr algn="r">
               <a:defRPr sz="1000" b="0">
                 <a:solidFill>
-                  <a:srgbClr val="94A3B8"/>
+                  <a:srgbClr val="8C8C9A"/>
                 </a:solidFill>
                 <a:latin typeface="맑은 고딕"/>
               </a:defRPr>
@@ -9929,7 +9929,7 @@
     <p:bg>
       <p:bgPr>
         <a:solidFill>
-          <a:srgbClr val="1A1A2E"/>
+          <a:srgbClr val="FFFFFF"/>
         </a:solidFill>
         <a:effectLst/>
       </p:bgPr>
@@ -9956,7 +9956,7 @@
             <a:avLst/>
           </a:prstGeom>
           <a:solidFill>
-            <a:srgbClr val="7C3AED"/>
+            <a:srgbClr val="6C2ED6"/>
           </a:solidFill>
           <a:ln>
             <a:noFill/>
@@ -10010,7 +10010,7 @@
             <a:pPr algn="l">
               <a:defRPr sz="2600" b="1">
                 <a:solidFill>
-                  <a:srgbClr val="FFFFFF"/>
+                  <a:srgbClr val="1F1F1F"/>
                 </a:solidFill>
                 <a:latin typeface="맑은 고딕"/>
               </a:defRPr>
@@ -10036,7 +10036,7 @@
             <a:avLst/>
           </a:prstGeom>
           <a:solidFill>
-            <a:srgbClr val="7C3AED"/>
+            <a:srgbClr val="6C2ED6"/>
           </a:solidFill>
           <a:ln>
             <a:noFill/>
@@ -10080,11 +10080,11 @@
             <a:avLst/>
           </a:prstGeom>
           <a:solidFill>
-            <a:srgbClr val="24243E"/>
+            <a:srgbClr val="F8F9FB"/>
           </a:solidFill>
           <a:ln w="12700">
             <a:solidFill>
-              <a:srgbClr val="333355"/>
+              <a:srgbClr val="E0E0E8"/>
             </a:solidFill>
           </a:ln>
           <a:effectLst/>
@@ -10136,7 +10136,7 @@
             <a:pPr algn="l">
               <a:defRPr sz="1600" b="1">
                 <a:solidFill>
-                  <a:srgbClr val="7C3AED"/>
+                  <a:srgbClr val="6C2ED6"/>
                 </a:solidFill>
                 <a:latin typeface="맑은 고딕"/>
               </a:defRPr>
@@ -10181,7 +10181,7 @@
               </a:spcAft>
               <a:defRPr sz="1400" b="0">
                 <a:solidFill>
-                  <a:srgbClr val="FFFFFF"/>
+                  <a:srgbClr val="1F1F1F"/>
                 </a:solidFill>
                 <a:latin typeface="맑은 고딕"/>
               </a:defRPr>
@@ -10203,7 +10203,7 @@
               </a:spcAft>
               <a:defRPr sz="1400" b="0">
                 <a:solidFill>
-                  <a:srgbClr val="FFFFFF"/>
+                  <a:srgbClr val="1F1F1F"/>
                 </a:solidFill>
                 <a:latin typeface="맑은 고딕"/>
               </a:defRPr>
@@ -10225,7 +10225,7 @@
               </a:spcAft>
               <a:defRPr sz="1300">
                 <a:solidFill>
-                  <a:srgbClr val="94A3B8"/>
+                  <a:srgbClr val="8C8C9A"/>
                 </a:solidFill>
                 <a:latin typeface="맑은 고딕"/>
               </a:defRPr>
@@ -10247,7 +10247,7 @@
               </a:spcAft>
               <a:defRPr sz="1300">
                 <a:solidFill>
-                  <a:srgbClr val="94A3B8"/>
+                  <a:srgbClr val="8C8C9A"/>
                 </a:solidFill>
                 <a:latin typeface="맑은 고딕"/>
               </a:defRPr>
@@ -10269,7 +10269,7 @@
               </a:spcAft>
               <a:defRPr sz="1400" b="0">
                 <a:solidFill>
-                  <a:srgbClr val="FFFFFF"/>
+                  <a:srgbClr val="1F1F1F"/>
                 </a:solidFill>
                 <a:latin typeface="맑은 고딕"/>
               </a:defRPr>
@@ -10291,7 +10291,7 @@
               </a:spcAft>
               <a:defRPr sz="1400" b="0">
                 <a:solidFill>
-                  <a:srgbClr val="FFFFFF"/>
+                  <a:srgbClr val="1F1F1F"/>
                 </a:solidFill>
                 <a:latin typeface="맑은 고딕"/>
               </a:defRPr>
@@ -10317,11 +10317,11 @@
             <a:avLst/>
           </a:prstGeom>
           <a:solidFill>
-            <a:srgbClr val="24243E"/>
+            <a:srgbClr val="F8F9FB"/>
           </a:solidFill>
           <a:ln w="12700">
             <a:solidFill>
-              <a:srgbClr val="333355"/>
+              <a:srgbClr val="E0E0E8"/>
             </a:solidFill>
           </a:ln>
           <a:effectLst/>
@@ -10373,7 +10373,7 @@
             <a:pPr algn="l">
               <a:defRPr sz="1600" b="1">
                 <a:solidFill>
-                  <a:srgbClr val="7C3AED"/>
+                  <a:srgbClr val="6C2ED6"/>
                 </a:solidFill>
                 <a:latin typeface="맑은 고딕"/>
               </a:defRPr>
@@ -10418,7 +10418,7 @@
               </a:spcAft>
               <a:defRPr sz="1400" b="0">
                 <a:solidFill>
-                  <a:srgbClr val="FFFFFF"/>
+                  <a:srgbClr val="1F1F1F"/>
                 </a:solidFill>
                 <a:latin typeface="맑은 고딕"/>
               </a:defRPr>
@@ -10440,7 +10440,7 @@
               </a:spcAft>
               <a:defRPr sz="1400" b="0">
                 <a:solidFill>
-                  <a:srgbClr val="FFFFFF"/>
+                  <a:srgbClr val="1F1F1F"/>
                 </a:solidFill>
                 <a:latin typeface="맑은 고딕"/>
               </a:defRPr>
@@ -10462,7 +10462,7 @@
               </a:spcAft>
               <a:defRPr sz="1400" b="0">
                 <a:solidFill>
-                  <a:srgbClr val="FFFFFF"/>
+                  <a:srgbClr val="1F1F1F"/>
                 </a:solidFill>
                 <a:latin typeface="맑은 고딕"/>
               </a:defRPr>
@@ -10484,7 +10484,7 @@
               </a:spcAft>
               <a:defRPr sz="1400" b="0">
                 <a:solidFill>
-                  <a:srgbClr val="FFFFFF"/>
+                  <a:srgbClr val="1F1F1F"/>
                 </a:solidFill>
                 <a:latin typeface="맑은 고딕"/>
               </a:defRPr>
@@ -10506,7 +10506,7 @@
               </a:spcAft>
               <a:defRPr sz="1300">
                 <a:solidFill>
-                  <a:srgbClr val="94A3B8"/>
+                  <a:srgbClr val="8C8C9A"/>
                 </a:solidFill>
                 <a:latin typeface="맑은 고딕"/>
               </a:defRPr>
@@ -10528,7 +10528,7 @@
               </a:spcAft>
               <a:defRPr sz="1300">
                 <a:solidFill>
-                  <a:srgbClr val="94A3B8"/>
+                  <a:srgbClr val="8C8C9A"/>
                 </a:solidFill>
                 <a:latin typeface="맑은 고딕"/>
               </a:defRPr>
@@ -10564,7 +10564,7 @@
             <a:pPr algn="r">
               <a:defRPr sz="1000" b="0">
                 <a:solidFill>
-                  <a:srgbClr val="94A3B8"/>
+                  <a:srgbClr val="8C8C9A"/>
                 </a:solidFill>
                 <a:latin typeface="맑은 고딕"/>
               </a:defRPr>
@@ -10589,7 +10589,7 @@
     <p:bg>
       <p:bgPr>
         <a:solidFill>
-          <a:srgbClr val="1A1A2E"/>
+          <a:srgbClr val="FFFFFF"/>
         </a:solidFill>
         <a:effectLst/>
       </p:bgPr>
@@ -10616,7 +10616,7 @@
             <a:avLst/>
           </a:prstGeom>
           <a:solidFill>
-            <a:srgbClr val="7C3AED"/>
+            <a:srgbClr val="6C2ED6"/>
           </a:solidFill>
           <a:ln>
             <a:noFill/>
@@ -10670,7 +10670,7 @@
             <a:pPr algn="l">
               <a:defRPr sz="2600" b="1">
                 <a:solidFill>
-                  <a:srgbClr val="FFFFFF"/>
+                  <a:srgbClr val="1F1F1F"/>
                 </a:solidFill>
                 <a:latin typeface="맑은 고딕"/>
               </a:defRPr>
@@ -10696,7 +10696,7 @@
             <a:avLst/>
           </a:prstGeom>
           <a:solidFill>
-            <a:srgbClr val="7C3AED"/>
+            <a:srgbClr val="6C2ED6"/>
           </a:solidFill>
           <a:ln>
             <a:noFill/>
@@ -10740,11 +10740,11 @@
             <a:avLst/>
           </a:prstGeom>
           <a:solidFill>
-            <a:srgbClr val="24243E"/>
+            <a:srgbClr val="F8F9FB"/>
           </a:solidFill>
           <a:ln w="12700">
             <a:solidFill>
-              <a:srgbClr val="333355"/>
+              <a:srgbClr val="E0E0E8"/>
             </a:solidFill>
           </a:ln>
           <a:effectLst/>
@@ -10805,7 +10805,7 @@
               </a:spcAft>
               <a:defRPr sz="1600" b="0">
                 <a:solidFill>
-                  <a:srgbClr val="FFFFFF"/>
+                  <a:srgbClr val="1F1F1F"/>
                 </a:solidFill>
                 <a:latin typeface="맑은 고딕"/>
               </a:defRPr>
@@ -10827,7 +10827,7 @@
               </a:spcAft>
               <a:defRPr sz="1600" b="0">
                 <a:solidFill>
-                  <a:srgbClr val="FFFFFF"/>
+                  <a:srgbClr val="1F1F1F"/>
                 </a:solidFill>
                 <a:latin typeface="맑은 고딕"/>
               </a:defRPr>
@@ -10849,7 +10849,7 @@
               </a:spcAft>
               <a:defRPr sz="1500">
                 <a:solidFill>
-                  <a:srgbClr val="94A3B8"/>
+                  <a:srgbClr val="8C8C9A"/>
                 </a:solidFill>
                 <a:latin typeface="맑은 고딕"/>
               </a:defRPr>
@@ -10871,7 +10871,7 @@
               </a:spcAft>
               <a:defRPr sz="1500">
                 <a:solidFill>
-                  <a:srgbClr val="94A3B8"/>
+                  <a:srgbClr val="8C8C9A"/>
                 </a:solidFill>
                 <a:latin typeface="맑은 고딕"/>
               </a:defRPr>
@@ -10893,7 +10893,7 @@
               </a:spcAft>
               <a:defRPr sz="1500">
                 <a:solidFill>
-                  <a:srgbClr val="94A3B8"/>
+                  <a:srgbClr val="8C8C9A"/>
                 </a:solidFill>
                 <a:latin typeface="맑은 고딕"/>
               </a:defRPr>
@@ -10915,7 +10915,7 @@
               </a:spcAft>
               <a:defRPr sz="1600" b="0">
                 <a:solidFill>
-                  <a:srgbClr val="FFFFFF"/>
+                  <a:srgbClr val="1F1F1F"/>
                 </a:solidFill>
                 <a:latin typeface="맑은 고딕"/>
               </a:defRPr>
@@ -10937,7 +10937,7 @@
               </a:spcAft>
               <a:defRPr sz="1500">
                 <a:solidFill>
-                  <a:srgbClr val="94A3B8"/>
+                  <a:srgbClr val="8C8C9A"/>
                 </a:solidFill>
                 <a:latin typeface="맑은 고딕"/>
               </a:defRPr>
@@ -10973,7 +10973,7 @@
             <a:pPr algn="r">
               <a:defRPr sz="1000" b="0">
                 <a:solidFill>
-                  <a:srgbClr val="94A3B8"/>
+                  <a:srgbClr val="8C8C9A"/>
                 </a:solidFill>
                 <a:latin typeface="맑은 고딕"/>
               </a:defRPr>
@@ -10998,7 +10998,7 @@
     <p:bg>
       <p:bgPr>
         <a:solidFill>
-          <a:srgbClr val="1A1A2E"/>
+          <a:srgbClr val="FFFFFF"/>
         </a:solidFill>
         <a:effectLst/>
       </p:bgPr>
@@ -11136,7 +11136,7 @@
             <a:pPr algn="l">
               <a:defRPr sz="4000" b="1">
                 <a:solidFill>
-                  <a:srgbClr val="FFFFFF"/>
+                  <a:srgbClr val="1F1F1F"/>
                 </a:solidFill>
                 <a:latin typeface="맑은 고딕"/>
               </a:defRPr>
@@ -11172,7 +11172,7 @@
             <a:pPr algn="l">
               <a:defRPr sz="1800" b="0">
                 <a:solidFill>
-                  <a:srgbClr val="94A3B8"/>
+                  <a:srgbClr val="5A5A6E"/>
                 </a:solidFill>
                 <a:latin typeface="맑은 고딕"/>
               </a:defRPr>
@@ -11285,7 +11285,7 @@
     <p:bg>
       <p:bgPr>
         <a:solidFill>
-          <a:srgbClr val="1A1A2E"/>
+          <a:srgbClr val="FFFFFF"/>
         </a:solidFill>
         <a:effectLst/>
       </p:bgPr>
@@ -11366,7 +11366,7 @@
             <a:pPr algn="l">
               <a:defRPr sz="2600" b="1">
                 <a:solidFill>
-                  <a:srgbClr val="FFFFFF"/>
+                  <a:srgbClr val="1F1F1F"/>
                 </a:solidFill>
                 <a:latin typeface="맑은 고딕"/>
               </a:defRPr>
@@ -11436,11 +11436,11 @@
             <a:avLst/>
           </a:prstGeom>
           <a:solidFill>
-            <a:srgbClr val="24243E"/>
+            <a:srgbClr val="F8F9FB"/>
           </a:solidFill>
           <a:ln w="12700">
             <a:solidFill>
-              <a:srgbClr val="333355"/>
+              <a:srgbClr val="E0E0E8"/>
             </a:solidFill>
           </a:ln>
           <a:effectLst/>
@@ -11501,7 +11501,7 @@
               </a:spcAft>
               <a:defRPr sz="1600" b="0">
                 <a:solidFill>
-                  <a:srgbClr val="FFFFFF"/>
+                  <a:srgbClr val="1F1F1F"/>
                 </a:solidFill>
                 <a:latin typeface="맑은 고딕"/>
               </a:defRPr>
@@ -11523,7 +11523,7 @@
               </a:spcAft>
               <a:defRPr sz="1600" b="0">
                 <a:solidFill>
-                  <a:srgbClr val="FFFFFF"/>
+                  <a:srgbClr val="1F1F1F"/>
                 </a:solidFill>
                 <a:latin typeface="맑은 고딕"/>
               </a:defRPr>
@@ -11545,7 +11545,7 @@
               </a:spcAft>
               <a:defRPr sz="1600" b="0">
                 <a:solidFill>
-                  <a:srgbClr val="FFFFFF"/>
+                  <a:srgbClr val="1F1F1F"/>
                 </a:solidFill>
                 <a:latin typeface="맑은 고딕"/>
               </a:defRPr>
@@ -11567,7 +11567,7 @@
               </a:spcAft>
               <a:defRPr sz="1600" b="0">
                 <a:solidFill>
-                  <a:srgbClr val="FFFFFF"/>
+                  <a:srgbClr val="1F1F1F"/>
                 </a:solidFill>
                 <a:latin typeface="맑은 고딕"/>
               </a:defRPr>
@@ -11589,7 +11589,7 @@
               </a:spcAft>
               <a:defRPr sz="1600" b="0">
                 <a:solidFill>
-                  <a:srgbClr val="FFFFFF"/>
+                  <a:srgbClr val="1F1F1F"/>
                 </a:solidFill>
                 <a:latin typeface="맑은 고딕"/>
               </a:defRPr>
@@ -11611,7 +11611,7 @@
               </a:spcAft>
               <a:defRPr sz="1600" b="0">
                 <a:solidFill>
-                  <a:srgbClr val="FFFFFF"/>
+                  <a:srgbClr val="1F1F1F"/>
                 </a:solidFill>
                 <a:latin typeface="맑은 고딕"/>
               </a:defRPr>
@@ -11647,7 +11647,7 @@
             <a:pPr algn="r">
               <a:defRPr sz="1000" b="0">
                 <a:solidFill>
-                  <a:srgbClr val="94A3B8"/>
+                  <a:srgbClr val="8C8C9A"/>
                 </a:solidFill>
                 <a:latin typeface="맑은 고딕"/>
               </a:defRPr>
@@ -11672,7 +11672,7 @@
     <p:bg>
       <p:bgPr>
         <a:solidFill>
-          <a:srgbClr val="1A1A2E"/>
+          <a:srgbClr val="FFFFFF"/>
         </a:solidFill>
         <a:effectLst/>
       </p:bgPr>
@@ -11753,7 +11753,7 @@
             <a:pPr algn="l">
               <a:defRPr sz="2600" b="1">
                 <a:solidFill>
-                  <a:srgbClr val="FFFFFF"/>
+                  <a:srgbClr val="1F1F1F"/>
                 </a:solidFill>
                 <a:latin typeface="맑은 고딕"/>
               </a:defRPr>
@@ -11823,11 +11823,11 @@
             <a:avLst/>
           </a:prstGeom>
           <a:solidFill>
-            <a:srgbClr val="24243E"/>
+            <a:srgbClr val="F8F9FB"/>
           </a:solidFill>
           <a:ln w="12700">
             <a:solidFill>
-              <a:srgbClr val="333355"/>
+              <a:srgbClr val="E0E0E8"/>
             </a:solidFill>
           </a:ln>
           <a:effectLst/>
@@ -11888,7 +11888,7 @@
               </a:spcAft>
               <a:defRPr sz="1600" b="0">
                 <a:solidFill>
-                  <a:srgbClr val="FFFFFF"/>
+                  <a:srgbClr val="1F1F1F"/>
                 </a:solidFill>
                 <a:latin typeface="맑은 고딕"/>
               </a:defRPr>
@@ -11910,7 +11910,7 @@
               </a:spcAft>
               <a:defRPr sz="1600" b="0">
                 <a:solidFill>
-                  <a:srgbClr val="FFFFFF"/>
+                  <a:srgbClr val="1F1F1F"/>
                 </a:solidFill>
                 <a:latin typeface="맑은 고딕"/>
               </a:defRPr>
@@ -11932,7 +11932,7 @@
               </a:spcAft>
               <a:defRPr sz="1500">
                 <a:solidFill>
-                  <a:srgbClr val="94A3B8"/>
+                  <a:srgbClr val="8C8C9A"/>
                 </a:solidFill>
                 <a:latin typeface="맑은 고딕"/>
               </a:defRPr>
@@ -11954,7 +11954,7 @@
               </a:spcAft>
               <a:defRPr sz="1600" b="0">
                 <a:solidFill>
-                  <a:srgbClr val="FFFFFF"/>
+                  <a:srgbClr val="1F1F1F"/>
                 </a:solidFill>
                 <a:latin typeface="맑은 고딕"/>
               </a:defRPr>
@@ -11976,7 +11976,7 @@
               </a:spcAft>
               <a:defRPr sz="1500">
                 <a:solidFill>
-                  <a:srgbClr val="94A3B8"/>
+                  <a:srgbClr val="8C8C9A"/>
                 </a:solidFill>
                 <a:latin typeface="맑은 고딕"/>
               </a:defRPr>
@@ -11998,7 +11998,7 @@
               </a:spcAft>
               <a:defRPr sz="1600" b="0">
                 <a:solidFill>
-                  <a:srgbClr val="FFFFFF"/>
+                  <a:srgbClr val="1F1F1F"/>
                 </a:solidFill>
                 <a:latin typeface="맑은 고딕"/>
               </a:defRPr>
@@ -12020,7 +12020,7 @@
               </a:spcAft>
               <a:defRPr sz="1600" b="0">
                 <a:solidFill>
-                  <a:srgbClr val="FFFFFF"/>
+                  <a:srgbClr val="1F1F1F"/>
                 </a:solidFill>
                 <a:latin typeface="맑은 고딕"/>
               </a:defRPr>
@@ -12056,7 +12056,7 @@
             <a:pPr algn="r">
               <a:defRPr sz="1000" b="0">
                 <a:solidFill>
-                  <a:srgbClr val="94A3B8"/>
+                  <a:srgbClr val="8C8C9A"/>
                 </a:solidFill>
                 <a:latin typeface="맑은 고딕"/>
               </a:defRPr>
@@ -12081,7 +12081,7 @@
     <p:bg>
       <p:bgPr>
         <a:solidFill>
-          <a:srgbClr val="1A1A2E"/>
+          <a:srgbClr val="FFFFFF"/>
         </a:solidFill>
         <a:effectLst/>
       </p:bgPr>
@@ -12162,7 +12162,7 @@
             <a:pPr algn="l">
               <a:defRPr sz="2600" b="1">
                 <a:solidFill>
-                  <a:srgbClr val="FFFFFF"/>
+                  <a:srgbClr val="1F1F1F"/>
                 </a:solidFill>
                 <a:latin typeface="맑은 고딕"/>
               </a:defRPr>
@@ -12232,11 +12232,11 @@
             <a:avLst/>
           </a:prstGeom>
           <a:solidFill>
-            <a:srgbClr val="24243E"/>
+            <a:srgbClr val="F8F9FB"/>
           </a:solidFill>
           <a:ln w="12700">
             <a:solidFill>
-              <a:srgbClr val="333355"/>
+              <a:srgbClr val="E0E0E8"/>
             </a:solidFill>
           </a:ln>
           <a:effectLst/>
@@ -12297,7 +12297,7 @@
               </a:spcAft>
               <a:defRPr sz="1600" b="0">
                 <a:solidFill>
-                  <a:srgbClr val="FFFFFF"/>
+                  <a:srgbClr val="1F1F1F"/>
                 </a:solidFill>
                 <a:latin typeface="맑은 고딕"/>
               </a:defRPr>
@@ -12319,7 +12319,7 @@
               </a:spcAft>
               <a:defRPr sz="1500">
                 <a:solidFill>
-                  <a:srgbClr val="94A3B8"/>
+                  <a:srgbClr val="8C8C9A"/>
                 </a:solidFill>
                 <a:latin typeface="맑은 고딕"/>
               </a:defRPr>
@@ -12341,7 +12341,7 @@
               </a:spcAft>
               <a:defRPr sz="1500">
                 <a:solidFill>
-                  <a:srgbClr val="94A3B8"/>
+                  <a:srgbClr val="8C8C9A"/>
                 </a:solidFill>
                 <a:latin typeface="맑은 고딕"/>
               </a:defRPr>
@@ -12363,7 +12363,7 @@
               </a:spcAft>
               <a:defRPr sz="1500">
                 <a:solidFill>
-                  <a:srgbClr val="94A3B8"/>
+                  <a:srgbClr val="8C8C9A"/>
                 </a:solidFill>
                 <a:latin typeface="맑은 고딕"/>
               </a:defRPr>
@@ -12385,7 +12385,7 @@
               </a:spcAft>
               <a:defRPr sz="1500">
                 <a:solidFill>
-                  <a:srgbClr val="94A3B8"/>
+                  <a:srgbClr val="8C8C9A"/>
                 </a:solidFill>
                 <a:latin typeface="맑은 고딕"/>
               </a:defRPr>
@@ -12407,7 +12407,7 @@
               </a:spcAft>
               <a:defRPr sz="1500">
                 <a:solidFill>
-                  <a:srgbClr val="94A3B8"/>
+                  <a:srgbClr val="8C8C9A"/>
                 </a:solidFill>
                 <a:latin typeface="맑은 고딕"/>
               </a:defRPr>
@@ -12429,7 +12429,7 @@
               </a:spcAft>
               <a:defRPr sz="1600" b="0">
                 <a:solidFill>
-                  <a:srgbClr val="FFFFFF"/>
+                  <a:srgbClr val="1F1F1F"/>
                 </a:solidFill>
                 <a:latin typeface="맑은 고딕"/>
               </a:defRPr>
@@ -12465,7 +12465,7 @@
             <a:pPr algn="r">
               <a:defRPr sz="1000" b="0">
                 <a:solidFill>
-                  <a:srgbClr val="94A3B8"/>
+                  <a:srgbClr val="8C8C9A"/>
                 </a:solidFill>
                 <a:latin typeface="맑은 고딕"/>
               </a:defRPr>
@@ -12490,7 +12490,7 @@
     <p:bg>
       <p:bgPr>
         <a:solidFill>
-          <a:srgbClr val="1A1A2E"/>
+          <a:srgbClr val="FFFFFF"/>
         </a:solidFill>
         <a:effectLst/>
       </p:bgPr>
@@ -12571,7 +12571,7 @@
             <a:pPr algn="l">
               <a:defRPr sz="2600" b="1">
                 <a:solidFill>
-                  <a:srgbClr val="FFFFFF"/>
+                  <a:srgbClr val="1F1F1F"/>
                 </a:solidFill>
                 <a:latin typeface="맑은 고딕"/>
               </a:defRPr>
@@ -12641,11 +12641,11 @@
             <a:avLst/>
           </a:prstGeom>
           <a:solidFill>
-            <a:srgbClr val="24243E"/>
+            <a:srgbClr val="F8F9FB"/>
           </a:solidFill>
           <a:ln w="12700">
             <a:solidFill>
-              <a:srgbClr val="333355"/>
+              <a:srgbClr val="E0E0E8"/>
             </a:solidFill>
           </a:ln>
           <a:effectLst/>
@@ -12742,7 +12742,7 @@
               </a:spcAft>
               <a:defRPr sz="1400" b="0">
                 <a:solidFill>
-                  <a:srgbClr val="FFFFFF"/>
+                  <a:srgbClr val="1F1F1F"/>
                 </a:solidFill>
                 <a:latin typeface="맑은 고딕"/>
               </a:defRPr>
@@ -12764,7 +12764,7 @@
               </a:spcAft>
               <a:defRPr sz="1400" b="0">
                 <a:solidFill>
-                  <a:srgbClr val="FFFFFF"/>
+                  <a:srgbClr val="1F1F1F"/>
                 </a:solidFill>
                 <a:latin typeface="맑은 고딕"/>
               </a:defRPr>
@@ -12786,7 +12786,7 @@
               </a:spcAft>
               <a:defRPr sz="1400" b="0">
                 <a:solidFill>
-                  <a:srgbClr val="FFFFFF"/>
+                  <a:srgbClr val="1F1F1F"/>
                 </a:solidFill>
                 <a:latin typeface="맑은 고딕"/>
               </a:defRPr>
@@ -12808,7 +12808,7 @@
               </a:spcAft>
               <a:defRPr sz="1400" b="0">
                 <a:solidFill>
-                  <a:srgbClr val="FFFFFF"/>
+                  <a:srgbClr val="1F1F1F"/>
                 </a:solidFill>
                 <a:latin typeface="맑은 고딕"/>
               </a:defRPr>
@@ -12830,7 +12830,7 @@
               </a:spcAft>
               <a:defRPr sz="1400" b="0">
                 <a:solidFill>
-                  <a:srgbClr val="FFFFFF"/>
+                  <a:srgbClr val="1F1F1F"/>
                 </a:solidFill>
                 <a:latin typeface="맑은 고딕"/>
               </a:defRPr>
@@ -12852,7 +12852,7 @@
               </a:spcAft>
               <a:defRPr sz="1400" b="0">
                 <a:solidFill>
-                  <a:srgbClr val="FFFFFF"/>
+                  <a:srgbClr val="1F1F1F"/>
                 </a:solidFill>
                 <a:latin typeface="맑은 고딕"/>
               </a:defRPr>
@@ -12878,11 +12878,11 @@
             <a:avLst/>
           </a:prstGeom>
           <a:solidFill>
-            <a:srgbClr val="24243E"/>
+            <a:srgbClr val="F8F9FB"/>
           </a:solidFill>
           <a:ln w="12700">
             <a:solidFill>
-              <a:srgbClr val="333355"/>
+              <a:srgbClr val="E0E0E8"/>
             </a:solidFill>
           </a:ln>
           <a:effectLst/>
@@ -12979,7 +12979,7 @@
               </a:spcAft>
               <a:defRPr sz="1400" b="0">
                 <a:solidFill>
-                  <a:srgbClr val="FFFFFF"/>
+                  <a:srgbClr val="1F1F1F"/>
                 </a:solidFill>
                 <a:latin typeface="맑은 고딕"/>
               </a:defRPr>
@@ -13001,7 +13001,7 @@
               </a:spcAft>
               <a:defRPr sz="1400" b="0">
                 <a:solidFill>
-                  <a:srgbClr val="FFFFFF"/>
+                  <a:srgbClr val="1F1F1F"/>
                 </a:solidFill>
                 <a:latin typeface="맑은 고딕"/>
               </a:defRPr>
@@ -13023,7 +13023,7 @@
               </a:spcAft>
               <a:defRPr sz="1400" b="0">
                 <a:solidFill>
-                  <a:srgbClr val="FFFFFF"/>
+                  <a:srgbClr val="1F1F1F"/>
                 </a:solidFill>
                 <a:latin typeface="맑은 고딕"/>
               </a:defRPr>
@@ -13045,7 +13045,7 @@
               </a:spcAft>
               <a:defRPr sz="1300">
                 <a:solidFill>
-                  <a:srgbClr val="94A3B8"/>
+                  <a:srgbClr val="8C8C9A"/>
                 </a:solidFill>
                 <a:latin typeface="맑은 고딕"/>
               </a:defRPr>
@@ -13067,7 +13067,7 @@
               </a:spcAft>
               <a:defRPr sz="1300">
                 <a:solidFill>
-                  <a:srgbClr val="94A3B8"/>
+                  <a:srgbClr val="8C8C9A"/>
                 </a:solidFill>
                 <a:latin typeface="맑은 고딕"/>
               </a:defRPr>
@@ -13089,7 +13089,7 @@
               </a:spcAft>
               <a:defRPr sz="1400" b="0">
                 <a:solidFill>
-                  <a:srgbClr val="FFFFFF"/>
+                  <a:srgbClr val="1F1F1F"/>
                 </a:solidFill>
                 <a:latin typeface="맑은 고딕"/>
               </a:defRPr>
@@ -13125,7 +13125,7 @@
             <a:pPr algn="r">
               <a:defRPr sz="1000" b="0">
                 <a:solidFill>
-                  <a:srgbClr val="94A3B8"/>
+                  <a:srgbClr val="8C8C9A"/>
                 </a:solidFill>
                 <a:latin typeface="맑은 고딕"/>
               </a:defRPr>
@@ -13150,7 +13150,7 @@
     <p:bg>
       <p:bgPr>
         <a:solidFill>
-          <a:srgbClr val="1A1A2E"/>
+          <a:srgbClr val="FFFFFF"/>
         </a:solidFill>
         <a:effectLst/>
       </p:bgPr>
@@ -13177,7 +13177,7 @@
             <a:avLst/>
           </a:prstGeom>
           <a:solidFill>
-            <a:srgbClr val="F59E0B"/>
+            <a:srgbClr val="E08A00"/>
           </a:solidFill>
           <a:ln>
             <a:noFill/>
@@ -13221,7 +13221,7 @@
             <a:avLst/>
           </a:prstGeom>
           <a:solidFill>
-            <a:srgbClr val="F59E0B"/>
+            <a:srgbClr val="E08A00"/>
           </a:solidFill>
           <a:ln>
             <a:noFill/>
@@ -13288,7 +13288,7 @@
             <a:pPr algn="l">
               <a:defRPr sz="4000" b="1">
                 <a:solidFill>
-                  <a:srgbClr val="FFFFFF"/>
+                  <a:srgbClr val="1F1F1F"/>
                 </a:solidFill>
                 <a:latin typeface="맑은 고딕"/>
               </a:defRPr>
@@ -13324,7 +13324,7 @@
             <a:pPr algn="l">
               <a:defRPr sz="1800" b="0">
                 <a:solidFill>
-                  <a:srgbClr val="94A3B8"/>
+                  <a:srgbClr val="5A5A6E"/>
                 </a:solidFill>
                 <a:latin typeface="맑은 고딕"/>
               </a:defRPr>
@@ -13350,7 +13350,7 @@
             <a:avLst/>
           </a:prstGeom>
           <a:solidFill>
-            <a:srgbClr val="F59E0B"/>
+            <a:srgbClr val="E08A00"/>
           </a:solidFill>
           <a:ln>
             <a:noFill/>
@@ -13394,7 +13394,7 @@
             <a:avLst/>
           </a:prstGeom>
           <a:solidFill>
-            <a:srgbClr val="F59E0B"/>
+            <a:srgbClr val="E08A00"/>
           </a:solidFill>
           <a:ln>
             <a:noFill/>
@@ -13437,7 +13437,7 @@
     <p:bg>
       <p:bgPr>
         <a:solidFill>
-          <a:srgbClr val="1A1A2E"/>
+          <a:srgbClr val="FFFFFF"/>
         </a:solidFill>
         <a:effectLst/>
       </p:bgPr>
@@ -13464,7 +13464,7 @@
             <a:avLst/>
           </a:prstGeom>
           <a:solidFill>
-            <a:srgbClr val="F59E0B"/>
+            <a:srgbClr val="E08A00"/>
           </a:solidFill>
           <a:ln>
             <a:noFill/>
@@ -13518,7 +13518,7 @@
             <a:pPr algn="l">
               <a:defRPr sz="2600" b="1">
                 <a:solidFill>
-                  <a:srgbClr val="FFFFFF"/>
+                  <a:srgbClr val="1F1F1F"/>
                 </a:solidFill>
                 <a:latin typeface="맑은 고딕"/>
               </a:defRPr>
@@ -13544,7 +13544,7 @@
             <a:avLst/>
           </a:prstGeom>
           <a:solidFill>
-            <a:srgbClr val="F59E0B"/>
+            <a:srgbClr val="E08A00"/>
           </a:solidFill>
           <a:ln>
             <a:noFill/>
@@ -13588,11 +13588,11 @@
             <a:avLst/>
           </a:prstGeom>
           <a:solidFill>
-            <a:srgbClr val="24243E"/>
+            <a:srgbClr val="F8F9FB"/>
           </a:solidFill>
           <a:ln w="12700">
             <a:solidFill>
-              <a:srgbClr val="333355"/>
+              <a:srgbClr val="E0E0E8"/>
             </a:solidFill>
           </a:ln>
           <a:effectLst/>
@@ -13653,7 +13653,7 @@
               </a:spcAft>
               <a:defRPr sz="1600" b="0">
                 <a:solidFill>
-                  <a:srgbClr val="FFFFFF"/>
+                  <a:srgbClr val="1F1F1F"/>
                 </a:solidFill>
                 <a:latin typeface="맑은 고딕"/>
               </a:defRPr>
@@ -13675,7 +13675,7 @@
               </a:spcAft>
               <a:defRPr sz="1500">
                 <a:solidFill>
-                  <a:srgbClr val="94A3B8"/>
+                  <a:srgbClr val="8C8C9A"/>
                 </a:solidFill>
                 <a:latin typeface="맑은 고딕"/>
               </a:defRPr>
@@ -13697,7 +13697,7 @@
               </a:spcAft>
               <a:defRPr sz="1600" b="0">
                 <a:solidFill>
-                  <a:srgbClr val="FFFFFF"/>
+                  <a:srgbClr val="1F1F1F"/>
                 </a:solidFill>
                 <a:latin typeface="맑은 고딕"/>
               </a:defRPr>
@@ -13719,7 +13719,7 @@
               </a:spcAft>
               <a:defRPr sz="1500">
                 <a:solidFill>
-                  <a:srgbClr val="94A3B8"/>
+                  <a:srgbClr val="8C8C9A"/>
                 </a:solidFill>
                 <a:latin typeface="맑은 고딕"/>
               </a:defRPr>
@@ -13741,7 +13741,7 @@
               </a:spcAft>
               <a:defRPr sz="1600" b="0">
                 <a:solidFill>
-                  <a:srgbClr val="FFFFFF"/>
+                  <a:srgbClr val="1F1F1F"/>
                 </a:solidFill>
                 <a:latin typeface="맑은 고딕"/>
               </a:defRPr>
@@ -13763,7 +13763,7 @@
               </a:spcAft>
               <a:defRPr sz="1500">
                 <a:solidFill>
-                  <a:srgbClr val="94A3B8"/>
+                  <a:srgbClr val="8C8C9A"/>
                 </a:solidFill>
                 <a:latin typeface="맑은 고딕"/>
               </a:defRPr>
@@ -13799,7 +13799,7 @@
             <a:pPr algn="r">
               <a:defRPr sz="1000" b="0">
                 <a:solidFill>
-                  <a:srgbClr val="94A3B8"/>
+                  <a:srgbClr val="8C8C9A"/>
                 </a:solidFill>
                 <a:latin typeface="맑은 고딕"/>
               </a:defRPr>
@@ -13824,7 +13824,7 @@
     <p:bg>
       <p:bgPr>
         <a:solidFill>
-          <a:srgbClr val="1A1A2E"/>
+          <a:srgbClr val="FFFFFF"/>
         </a:solidFill>
         <a:effectLst/>
       </p:bgPr>
@@ -13851,7 +13851,7 @@
             <a:avLst/>
           </a:prstGeom>
           <a:solidFill>
-            <a:srgbClr val="0096D6"/>
+            <a:srgbClr val="0070C0"/>
           </a:solidFill>
           <a:ln>
             <a:noFill/>
@@ -13895,7 +13895,7 @@
             <a:avLst/>
           </a:prstGeom>
           <a:solidFill>
-            <a:srgbClr val="0096D6"/>
+            <a:srgbClr val="0070C0"/>
           </a:solidFill>
           <a:ln>
             <a:noFill/>
@@ -13962,7 +13962,7 @@
             <a:pPr algn="l">
               <a:defRPr sz="4000" b="1">
                 <a:solidFill>
-                  <a:srgbClr val="FFFFFF"/>
+                  <a:srgbClr val="1F1F1F"/>
                 </a:solidFill>
                 <a:latin typeface="맑은 고딕"/>
               </a:defRPr>
@@ -13998,7 +13998,7 @@
             <a:pPr algn="l">
               <a:defRPr sz="1800" b="0">
                 <a:solidFill>
-                  <a:srgbClr val="94A3B8"/>
+                  <a:srgbClr val="5A5A6E"/>
                 </a:solidFill>
                 <a:latin typeface="맑은 고딕"/>
               </a:defRPr>
@@ -14024,7 +14024,7 @@
             <a:avLst/>
           </a:prstGeom>
           <a:solidFill>
-            <a:srgbClr val="0096D6"/>
+            <a:srgbClr val="0070C0"/>
           </a:solidFill>
           <a:ln>
             <a:noFill/>
@@ -14068,7 +14068,7 @@
             <a:avLst/>
           </a:prstGeom>
           <a:solidFill>
-            <a:srgbClr val="0096D6"/>
+            <a:srgbClr val="0070C0"/>
           </a:solidFill>
           <a:ln>
             <a:noFill/>
@@ -14111,7 +14111,7 @@
     <p:bg>
       <p:bgPr>
         <a:solidFill>
-          <a:srgbClr val="1A1A2E"/>
+          <a:srgbClr val="FFFFFF"/>
         </a:solidFill>
         <a:effectLst/>
       </p:bgPr>
@@ -14138,7 +14138,7 @@
             <a:avLst/>
           </a:prstGeom>
           <a:solidFill>
-            <a:srgbClr val="F59E0B"/>
+            <a:srgbClr val="E08A00"/>
           </a:solidFill>
           <a:ln>
             <a:noFill/>
@@ -14192,7 +14192,7 @@
             <a:pPr algn="l">
               <a:defRPr sz="2600" b="1">
                 <a:solidFill>
-                  <a:srgbClr val="FFFFFF"/>
+                  <a:srgbClr val="1F1F1F"/>
                 </a:solidFill>
                 <a:latin typeface="맑은 고딕"/>
               </a:defRPr>
@@ -14218,7 +14218,7 @@
             <a:avLst/>
           </a:prstGeom>
           <a:solidFill>
-            <a:srgbClr val="F59E0B"/>
+            <a:srgbClr val="E08A00"/>
           </a:solidFill>
           <a:ln>
             <a:noFill/>
@@ -14262,11 +14262,11 @@
             <a:avLst/>
           </a:prstGeom>
           <a:solidFill>
-            <a:srgbClr val="24243E"/>
+            <a:srgbClr val="F8F9FB"/>
           </a:solidFill>
           <a:ln w="12700">
             <a:solidFill>
-              <a:srgbClr val="333355"/>
+              <a:srgbClr val="E0E0E8"/>
             </a:solidFill>
           </a:ln>
           <a:effectLst/>
@@ -14327,7 +14327,7 @@
               </a:spcAft>
               <a:defRPr sz="1600" b="0">
                 <a:solidFill>
-                  <a:srgbClr val="FFFFFF"/>
+                  <a:srgbClr val="1F1F1F"/>
                 </a:solidFill>
                 <a:latin typeface="맑은 고딕"/>
               </a:defRPr>
@@ -14349,7 +14349,7 @@
               </a:spcAft>
               <a:defRPr sz="1500">
                 <a:solidFill>
-                  <a:srgbClr val="94A3B8"/>
+                  <a:srgbClr val="8C8C9A"/>
                 </a:solidFill>
                 <a:latin typeface="맑은 고딕"/>
               </a:defRPr>
@@ -14371,7 +14371,7 @@
               </a:spcAft>
               <a:defRPr sz="1600" b="0">
                 <a:solidFill>
-                  <a:srgbClr val="FFFFFF"/>
+                  <a:srgbClr val="1F1F1F"/>
                 </a:solidFill>
                 <a:latin typeface="맑은 고딕"/>
               </a:defRPr>
@@ -14393,7 +14393,7 @@
               </a:spcAft>
               <a:defRPr sz="1500">
                 <a:solidFill>
-                  <a:srgbClr val="94A3B8"/>
+                  <a:srgbClr val="8C8C9A"/>
                 </a:solidFill>
                 <a:latin typeface="맑은 고딕"/>
               </a:defRPr>
@@ -14415,7 +14415,7 @@
               </a:spcAft>
               <a:defRPr sz="1500">
                 <a:solidFill>
-                  <a:srgbClr val="94A3B8"/>
+                  <a:srgbClr val="8C8C9A"/>
                 </a:solidFill>
                 <a:latin typeface="맑은 고딕"/>
               </a:defRPr>
@@ -14437,7 +14437,7 @@
               </a:spcAft>
               <a:defRPr sz="1600" b="0">
                 <a:solidFill>
-                  <a:srgbClr val="FFFFFF"/>
+                  <a:srgbClr val="1F1F1F"/>
                 </a:solidFill>
                 <a:latin typeface="맑은 고딕"/>
               </a:defRPr>
@@ -14459,7 +14459,7 @@
               </a:spcAft>
               <a:defRPr sz="1500">
                 <a:solidFill>
-                  <a:srgbClr val="94A3B8"/>
+                  <a:srgbClr val="8C8C9A"/>
                 </a:solidFill>
                 <a:latin typeface="맑은 고딕"/>
               </a:defRPr>
@@ -14481,7 +14481,7 @@
               </a:spcAft>
               <a:defRPr sz="1500">
                 <a:solidFill>
-                  <a:srgbClr val="94A3B8"/>
+                  <a:srgbClr val="8C8C9A"/>
                 </a:solidFill>
                 <a:latin typeface="맑은 고딕"/>
               </a:defRPr>
@@ -14517,7 +14517,7 @@
             <a:pPr algn="r">
               <a:defRPr sz="1000" b="0">
                 <a:solidFill>
-                  <a:srgbClr val="94A3B8"/>
+                  <a:srgbClr val="8C8C9A"/>
                 </a:solidFill>
                 <a:latin typeface="맑은 고딕"/>
               </a:defRPr>
@@ -14542,7 +14542,7 @@
     <p:bg>
       <p:bgPr>
         <a:solidFill>
-          <a:srgbClr val="1A1A2E"/>
+          <a:srgbClr val="FFFFFF"/>
         </a:solidFill>
         <a:effectLst/>
       </p:bgPr>
@@ -14569,7 +14569,7 @@
             <a:avLst/>
           </a:prstGeom>
           <a:solidFill>
-            <a:srgbClr val="F59E0B"/>
+            <a:srgbClr val="E08A00"/>
           </a:solidFill>
           <a:ln>
             <a:noFill/>
@@ -14623,7 +14623,7 @@
             <a:pPr algn="l">
               <a:defRPr sz="2600" b="1">
                 <a:solidFill>
-                  <a:srgbClr val="FFFFFF"/>
+                  <a:srgbClr val="1F1F1F"/>
                 </a:solidFill>
                 <a:latin typeface="맑은 고딕"/>
               </a:defRPr>
@@ -14649,7 +14649,7 @@
             <a:avLst/>
           </a:prstGeom>
           <a:solidFill>
-            <a:srgbClr val="F59E0B"/>
+            <a:srgbClr val="E08A00"/>
           </a:solidFill>
           <a:ln>
             <a:noFill/>
@@ -14693,11 +14693,11 @@
             <a:avLst/>
           </a:prstGeom>
           <a:solidFill>
-            <a:srgbClr val="24243E"/>
+            <a:srgbClr val="F8F9FB"/>
           </a:solidFill>
           <a:ln w="12700">
             <a:solidFill>
-              <a:srgbClr val="333355"/>
+              <a:srgbClr val="E0E0E8"/>
             </a:solidFill>
           </a:ln>
           <a:effectLst/>
@@ -14749,7 +14749,7 @@
             <a:pPr algn="l">
               <a:defRPr sz="1600" b="1">
                 <a:solidFill>
-                  <a:srgbClr val="F59E0B"/>
+                  <a:srgbClr val="E08A00"/>
                 </a:solidFill>
                 <a:latin typeface="맑은 고딕"/>
               </a:defRPr>
@@ -14794,7 +14794,7 @@
               </a:spcAft>
               <a:defRPr sz="1400" b="0">
                 <a:solidFill>
-                  <a:srgbClr val="FFFFFF"/>
+                  <a:srgbClr val="1F1F1F"/>
                 </a:solidFill>
                 <a:latin typeface="맑은 고딕"/>
               </a:defRPr>
@@ -14816,7 +14816,7 @@
               </a:spcAft>
               <a:defRPr sz="1300">
                 <a:solidFill>
-                  <a:srgbClr val="94A3B8"/>
+                  <a:srgbClr val="8C8C9A"/>
                 </a:solidFill>
                 <a:latin typeface="맑은 고딕"/>
               </a:defRPr>
@@ -14838,7 +14838,7 @@
               </a:spcAft>
               <a:defRPr sz="1300">
                 <a:solidFill>
-                  <a:srgbClr val="94A3B8"/>
+                  <a:srgbClr val="8C8C9A"/>
                 </a:solidFill>
                 <a:latin typeface="맑은 고딕"/>
               </a:defRPr>
@@ -14860,7 +14860,7 @@
               </a:spcAft>
               <a:defRPr sz="1300">
                 <a:solidFill>
-                  <a:srgbClr val="94A3B8"/>
+                  <a:srgbClr val="8C8C9A"/>
                 </a:solidFill>
                 <a:latin typeface="맑은 고딕"/>
               </a:defRPr>
@@ -14882,7 +14882,7 @@
               </a:spcAft>
               <a:defRPr sz="1400" b="0">
                 <a:solidFill>
-                  <a:srgbClr val="FFFFFF"/>
+                  <a:srgbClr val="1F1F1F"/>
                 </a:solidFill>
                 <a:latin typeface="맑은 고딕"/>
               </a:defRPr>
@@ -14908,11 +14908,11 @@
             <a:avLst/>
           </a:prstGeom>
           <a:solidFill>
-            <a:srgbClr val="24243E"/>
+            <a:srgbClr val="F8F9FB"/>
           </a:solidFill>
           <a:ln w="12700">
             <a:solidFill>
-              <a:srgbClr val="333355"/>
+              <a:srgbClr val="E0E0E8"/>
             </a:solidFill>
           </a:ln>
           <a:effectLst/>
@@ -14964,7 +14964,7 @@
             <a:pPr algn="l">
               <a:defRPr sz="1600" b="1">
                 <a:solidFill>
-                  <a:srgbClr val="F59E0B"/>
+                  <a:srgbClr val="E08A00"/>
                 </a:solidFill>
                 <a:latin typeface="맑은 고딕"/>
               </a:defRPr>
@@ -15009,7 +15009,7 @@
               </a:spcAft>
               <a:defRPr sz="1400" b="0">
                 <a:solidFill>
-                  <a:srgbClr val="FFFFFF"/>
+                  <a:srgbClr val="1F1F1F"/>
                 </a:solidFill>
                 <a:latin typeface="맑은 고딕"/>
               </a:defRPr>
@@ -15031,7 +15031,7 @@
               </a:spcAft>
               <a:defRPr sz="1400" b="0">
                 <a:solidFill>
-                  <a:srgbClr val="FFFFFF"/>
+                  <a:srgbClr val="1F1F1F"/>
                 </a:solidFill>
                 <a:latin typeface="맑은 고딕"/>
               </a:defRPr>
@@ -15053,7 +15053,7 @@
               </a:spcAft>
               <a:defRPr sz="1300">
                 <a:solidFill>
-                  <a:srgbClr val="94A3B8"/>
+                  <a:srgbClr val="8C8C9A"/>
                 </a:solidFill>
                 <a:latin typeface="맑은 고딕"/>
               </a:defRPr>
@@ -15075,7 +15075,7 @@
               </a:spcAft>
               <a:defRPr sz="1400" b="0">
                 <a:solidFill>
-                  <a:srgbClr val="FFFFFF"/>
+                  <a:srgbClr val="1F1F1F"/>
                 </a:solidFill>
                 <a:latin typeface="맑은 고딕"/>
               </a:defRPr>
@@ -15097,7 +15097,7 @@
               </a:spcAft>
               <a:defRPr sz="1400" b="0">
                 <a:solidFill>
-                  <a:srgbClr val="FFFFFF"/>
+                  <a:srgbClr val="1F1F1F"/>
                 </a:solidFill>
                 <a:latin typeface="맑은 고딕"/>
               </a:defRPr>
@@ -15133,7 +15133,7 @@
             <a:pPr algn="r">
               <a:defRPr sz="1000" b="0">
                 <a:solidFill>
-                  <a:srgbClr val="94A3B8"/>
+                  <a:srgbClr val="8C8C9A"/>
                 </a:solidFill>
                 <a:latin typeface="맑은 고딕"/>
               </a:defRPr>
@@ -15158,7 +15158,7 @@
     <p:bg>
       <p:bgPr>
         <a:solidFill>
-          <a:srgbClr val="1A1A2E"/>
+          <a:srgbClr val="FFFFFF"/>
         </a:solidFill>
         <a:effectLst/>
       </p:bgPr>
@@ -15185,7 +15185,7 @@
             <a:avLst/>
           </a:prstGeom>
           <a:solidFill>
-            <a:srgbClr val="F59E0B"/>
+            <a:srgbClr val="E08A00"/>
           </a:solidFill>
           <a:ln>
             <a:noFill/>
@@ -15239,7 +15239,7 @@
             <a:pPr algn="l">
               <a:defRPr sz="2600" b="1">
                 <a:solidFill>
-                  <a:srgbClr val="FFFFFF"/>
+                  <a:srgbClr val="1F1F1F"/>
                 </a:solidFill>
                 <a:latin typeface="맑은 고딕"/>
               </a:defRPr>
@@ -15265,7 +15265,7 @@
             <a:avLst/>
           </a:prstGeom>
           <a:solidFill>
-            <a:srgbClr val="F59E0B"/>
+            <a:srgbClr val="E08A00"/>
           </a:solidFill>
           <a:ln>
             <a:noFill/>
@@ -15309,11 +15309,11 @@
             <a:avLst/>
           </a:prstGeom>
           <a:solidFill>
-            <a:srgbClr val="24243E"/>
+            <a:srgbClr val="F8F9FB"/>
           </a:solidFill>
           <a:ln w="12700">
             <a:solidFill>
-              <a:srgbClr val="333355"/>
+              <a:srgbClr val="E0E0E8"/>
             </a:solidFill>
           </a:ln>
           <a:effectLst/>
@@ -15374,7 +15374,7 @@
               </a:spcAft>
               <a:defRPr sz="1600" b="0">
                 <a:solidFill>
-                  <a:srgbClr val="FFFFFF"/>
+                  <a:srgbClr val="1F1F1F"/>
                 </a:solidFill>
                 <a:latin typeface="맑은 고딕"/>
               </a:defRPr>
@@ -15396,7 +15396,7 @@
               </a:spcAft>
               <a:defRPr sz="1600" b="0">
                 <a:solidFill>
-                  <a:srgbClr val="FFFFFF"/>
+                  <a:srgbClr val="1F1F1F"/>
                 </a:solidFill>
                 <a:latin typeface="맑은 고딕"/>
               </a:defRPr>
@@ -15418,7 +15418,7 @@
               </a:spcAft>
               <a:defRPr sz="1600" b="0">
                 <a:solidFill>
-                  <a:srgbClr val="FFFFFF"/>
+                  <a:srgbClr val="1F1F1F"/>
                 </a:solidFill>
                 <a:latin typeface="맑은 고딕"/>
               </a:defRPr>
@@ -15440,7 +15440,7 @@
               </a:spcAft>
               <a:defRPr sz="1600" b="0">
                 <a:solidFill>
-                  <a:srgbClr val="FFFFFF"/>
+                  <a:srgbClr val="1F1F1F"/>
                 </a:solidFill>
                 <a:latin typeface="맑은 고딕"/>
               </a:defRPr>
@@ -15462,7 +15462,7 @@
               </a:spcAft>
               <a:defRPr sz="1500">
                 <a:solidFill>
-                  <a:srgbClr val="94A3B8"/>
+                  <a:srgbClr val="8C8C9A"/>
                 </a:solidFill>
                 <a:latin typeface="맑은 고딕"/>
               </a:defRPr>
@@ -15484,7 +15484,7 @@
               </a:spcAft>
               <a:defRPr sz="1600" b="0">
                 <a:solidFill>
-                  <a:srgbClr val="FFFFFF"/>
+                  <a:srgbClr val="1F1F1F"/>
                 </a:solidFill>
                 <a:latin typeface="맑은 고딕"/>
               </a:defRPr>
@@ -15506,7 +15506,7 @@
               </a:spcAft>
               <a:defRPr sz="1600" b="0">
                 <a:solidFill>
-                  <a:srgbClr val="FFFFFF"/>
+                  <a:srgbClr val="1F1F1F"/>
                 </a:solidFill>
                 <a:latin typeface="맑은 고딕"/>
               </a:defRPr>
@@ -15542,7 +15542,7 @@
             <a:pPr algn="r">
               <a:defRPr sz="1000" b="0">
                 <a:solidFill>
-                  <a:srgbClr val="94A3B8"/>
+                  <a:srgbClr val="8C8C9A"/>
                 </a:solidFill>
                 <a:latin typeface="맑은 고딕"/>
               </a:defRPr>
@@ -15567,7 +15567,7 @@
     <p:bg>
       <p:bgPr>
         <a:solidFill>
-          <a:srgbClr val="1A1A2E"/>
+          <a:srgbClr val="FFFFFF"/>
         </a:solidFill>
         <a:effectLst/>
       </p:bgPr>
@@ -15594,7 +15594,7 @@
             <a:avLst/>
           </a:prstGeom>
           <a:solidFill>
-            <a:srgbClr val="F59E0B"/>
+            <a:srgbClr val="E08A00"/>
           </a:solidFill>
           <a:ln>
             <a:noFill/>
@@ -15648,7 +15648,7 @@
             <a:pPr algn="l">
               <a:defRPr sz="2600" b="1">
                 <a:solidFill>
-                  <a:srgbClr val="FFFFFF"/>
+                  <a:srgbClr val="1F1F1F"/>
                 </a:solidFill>
                 <a:latin typeface="맑은 고딕"/>
               </a:defRPr>
@@ -15674,7 +15674,7 @@
             <a:avLst/>
           </a:prstGeom>
           <a:solidFill>
-            <a:srgbClr val="F59E0B"/>
+            <a:srgbClr val="E08A00"/>
           </a:solidFill>
           <a:ln>
             <a:noFill/>
@@ -15718,11 +15718,11 @@
             <a:avLst/>
           </a:prstGeom>
           <a:solidFill>
-            <a:srgbClr val="24243E"/>
+            <a:srgbClr val="F8F9FB"/>
           </a:solidFill>
           <a:ln w="12700">
             <a:solidFill>
-              <a:srgbClr val="333355"/>
+              <a:srgbClr val="E0E0E8"/>
             </a:solidFill>
           </a:ln>
           <a:effectLst/>
@@ -15783,7 +15783,7 @@
               </a:spcAft>
               <a:defRPr sz="1600" b="0">
                 <a:solidFill>
-                  <a:srgbClr val="FFFFFF"/>
+                  <a:srgbClr val="1F1F1F"/>
                 </a:solidFill>
                 <a:latin typeface="맑은 고딕"/>
               </a:defRPr>
@@ -15805,7 +15805,7 @@
               </a:spcAft>
               <a:defRPr sz="1600" b="0">
                 <a:solidFill>
-                  <a:srgbClr val="FFFFFF"/>
+                  <a:srgbClr val="1F1F1F"/>
                 </a:solidFill>
                 <a:latin typeface="맑은 고딕"/>
               </a:defRPr>
@@ -15827,7 +15827,7 @@
               </a:spcAft>
               <a:defRPr sz="1600" b="0">
                 <a:solidFill>
-                  <a:srgbClr val="FFFFFF"/>
+                  <a:srgbClr val="1F1F1F"/>
                 </a:solidFill>
                 <a:latin typeface="맑은 고딕"/>
               </a:defRPr>
@@ -15849,7 +15849,7 @@
               </a:spcAft>
               <a:defRPr sz="1600" b="0">
                 <a:solidFill>
-                  <a:srgbClr val="FFFFFF"/>
+                  <a:srgbClr val="1F1F1F"/>
                 </a:solidFill>
                 <a:latin typeface="맑은 고딕"/>
               </a:defRPr>
@@ -15871,7 +15871,7 @@
               </a:spcAft>
               <a:defRPr sz="1600" b="0">
                 <a:solidFill>
-                  <a:srgbClr val="FFFFFF"/>
+                  <a:srgbClr val="1F1F1F"/>
                 </a:solidFill>
                 <a:latin typeface="맑은 고딕"/>
               </a:defRPr>
@@ -15893,7 +15893,7 @@
               </a:spcAft>
               <a:defRPr sz="1600" b="0">
                 <a:solidFill>
-                  <a:srgbClr val="FFFFFF"/>
+                  <a:srgbClr val="1F1F1F"/>
                 </a:solidFill>
                 <a:latin typeface="맑은 고딕"/>
               </a:defRPr>
@@ -15929,7 +15929,7 @@
             <a:pPr algn="r">
               <a:defRPr sz="1000" b="0">
                 <a:solidFill>
-                  <a:srgbClr val="94A3B8"/>
+                  <a:srgbClr val="8C8C9A"/>
                 </a:solidFill>
                 <a:latin typeface="맑은 고딕"/>
               </a:defRPr>
@@ -15954,7 +15954,7 @@
     <p:bg>
       <p:bgPr>
         <a:solidFill>
-          <a:srgbClr val="1A1A2E"/>
+          <a:srgbClr val="FFFFFF"/>
         </a:solidFill>
         <a:effectLst/>
       </p:bgPr>
@@ -15981,7 +15981,7 @@
             <a:avLst/>
           </a:prstGeom>
           <a:solidFill>
-            <a:srgbClr val="F59E0B"/>
+            <a:srgbClr val="E08A00"/>
           </a:solidFill>
           <a:ln>
             <a:noFill/>
@@ -16035,7 +16035,7 @@
             <a:pPr algn="l">
               <a:defRPr sz="2600" b="1">
                 <a:solidFill>
-                  <a:srgbClr val="FFFFFF"/>
+                  <a:srgbClr val="1F1F1F"/>
                 </a:solidFill>
                 <a:latin typeface="맑은 고딕"/>
               </a:defRPr>
@@ -16061,7 +16061,7 @@
             <a:avLst/>
           </a:prstGeom>
           <a:solidFill>
-            <a:srgbClr val="F59E0B"/>
+            <a:srgbClr val="E08A00"/>
           </a:solidFill>
           <a:ln>
             <a:noFill/>
@@ -16105,11 +16105,11 @@
             <a:avLst/>
           </a:prstGeom>
           <a:solidFill>
-            <a:srgbClr val="24243E"/>
+            <a:srgbClr val="F8F9FB"/>
           </a:solidFill>
           <a:ln w="12700">
             <a:solidFill>
-              <a:srgbClr val="333355"/>
+              <a:srgbClr val="E0E0E8"/>
             </a:solidFill>
           </a:ln>
           <a:effectLst/>
@@ -16170,7 +16170,7 @@
               </a:spcAft>
               <a:defRPr sz="1600" b="0">
                 <a:solidFill>
-                  <a:srgbClr val="FFFFFF"/>
+                  <a:srgbClr val="1F1F1F"/>
                 </a:solidFill>
                 <a:latin typeface="맑은 고딕"/>
               </a:defRPr>
@@ -16192,7 +16192,7 @@
               </a:spcAft>
               <a:defRPr sz="1600" b="0">
                 <a:solidFill>
-                  <a:srgbClr val="FFFFFF"/>
+                  <a:srgbClr val="1F1F1F"/>
                 </a:solidFill>
                 <a:latin typeface="맑은 고딕"/>
               </a:defRPr>
@@ -16214,7 +16214,7 @@
               </a:spcAft>
               <a:defRPr sz="1600" b="0">
                 <a:solidFill>
-                  <a:srgbClr val="FFFFFF"/>
+                  <a:srgbClr val="1F1F1F"/>
                 </a:solidFill>
                 <a:latin typeface="맑은 고딕"/>
               </a:defRPr>
@@ -16236,7 +16236,7 @@
               </a:spcAft>
               <a:defRPr sz="1600" b="0">
                 <a:solidFill>
-                  <a:srgbClr val="FFFFFF"/>
+                  <a:srgbClr val="1F1F1F"/>
                 </a:solidFill>
                 <a:latin typeface="맑은 고딕"/>
               </a:defRPr>
@@ -16258,7 +16258,7 @@
               </a:spcAft>
               <a:defRPr sz="1600" b="0">
                 <a:solidFill>
-                  <a:srgbClr val="FFFFFF"/>
+                  <a:srgbClr val="1F1F1F"/>
                 </a:solidFill>
                 <a:latin typeface="맑은 고딕"/>
               </a:defRPr>
@@ -16280,7 +16280,7 @@
               </a:spcAft>
               <a:defRPr sz="1600" b="0">
                 <a:solidFill>
-                  <a:srgbClr val="FFFFFF"/>
+                  <a:srgbClr val="1F1F1F"/>
                 </a:solidFill>
                 <a:latin typeface="맑은 고딕"/>
               </a:defRPr>
@@ -16316,7 +16316,7 @@
             <a:pPr algn="r">
               <a:defRPr sz="1000" b="0">
                 <a:solidFill>
-                  <a:srgbClr val="94A3B8"/>
+                  <a:srgbClr val="8C8C9A"/>
                 </a:solidFill>
                 <a:latin typeface="맑은 고딕"/>
               </a:defRPr>
@@ -16341,7 +16341,7 @@
     <p:bg>
       <p:bgPr>
         <a:solidFill>
-          <a:srgbClr val="1A1A2E"/>
+          <a:srgbClr val="FFFFFF"/>
         </a:solidFill>
         <a:effectLst/>
       </p:bgPr>
@@ -16368,7 +16368,7 @@
             <a:avLst/>
           </a:prstGeom>
           <a:solidFill>
-            <a:srgbClr val="F59E0B"/>
+            <a:srgbClr val="E08A00"/>
           </a:solidFill>
           <a:ln>
             <a:noFill/>
@@ -16422,7 +16422,7 @@
             <a:pPr algn="l">
               <a:defRPr sz="2600" b="1">
                 <a:solidFill>
-                  <a:srgbClr val="FFFFFF"/>
+                  <a:srgbClr val="1F1F1F"/>
                 </a:solidFill>
                 <a:latin typeface="맑은 고딕"/>
               </a:defRPr>
@@ -16448,7 +16448,7 @@
             <a:avLst/>
           </a:prstGeom>
           <a:solidFill>
-            <a:srgbClr val="F59E0B"/>
+            <a:srgbClr val="E08A00"/>
           </a:solidFill>
           <a:ln>
             <a:noFill/>
@@ -16492,11 +16492,11 @@
             <a:avLst/>
           </a:prstGeom>
           <a:solidFill>
-            <a:srgbClr val="24243E"/>
+            <a:srgbClr val="F8F9FB"/>
           </a:solidFill>
           <a:ln w="12700">
             <a:solidFill>
-              <a:srgbClr val="333355"/>
+              <a:srgbClr val="E0E0E8"/>
             </a:solidFill>
           </a:ln>
           <a:effectLst/>
@@ -16557,7 +16557,7 @@
               </a:spcAft>
               <a:defRPr sz="1600" b="0">
                 <a:solidFill>
-                  <a:srgbClr val="FFFFFF"/>
+                  <a:srgbClr val="1F1F1F"/>
                 </a:solidFill>
                 <a:latin typeface="맑은 고딕"/>
               </a:defRPr>
@@ -16579,7 +16579,7 @@
               </a:spcAft>
               <a:defRPr sz="1600" b="0">
                 <a:solidFill>
-                  <a:srgbClr val="FFFFFF"/>
+                  <a:srgbClr val="1F1F1F"/>
                 </a:solidFill>
                 <a:latin typeface="맑은 고딕"/>
               </a:defRPr>
@@ -16601,7 +16601,7 @@
               </a:spcAft>
               <a:defRPr sz="1500">
                 <a:solidFill>
-                  <a:srgbClr val="94A3B8"/>
+                  <a:srgbClr val="8C8C9A"/>
                 </a:solidFill>
                 <a:latin typeface="맑은 고딕"/>
               </a:defRPr>
@@ -16623,7 +16623,7 @@
               </a:spcAft>
               <a:defRPr sz="1500">
                 <a:solidFill>
-                  <a:srgbClr val="94A3B8"/>
+                  <a:srgbClr val="8C8C9A"/>
                 </a:solidFill>
                 <a:latin typeface="맑은 고딕"/>
               </a:defRPr>
@@ -16645,7 +16645,7 @@
               </a:spcAft>
               <a:defRPr sz="1500">
                 <a:solidFill>
-                  <a:srgbClr val="94A3B8"/>
+                  <a:srgbClr val="8C8C9A"/>
                 </a:solidFill>
                 <a:latin typeface="맑은 고딕"/>
               </a:defRPr>
@@ -16667,7 +16667,7 @@
               </a:spcAft>
               <a:defRPr sz="1500">
                 <a:solidFill>
-                  <a:srgbClr val="94A3B8"/>
+                  <a:srgbClr val="8C8C9A"/>
                 </a:solidFill>
                 <a:latin typeface="맑은 고딕"/>
               </a:defRPr>
@@ -16689,7 +16689,7 @@
               </a:spcAft>
               <a:defRPr sz="1600" b="0">
                 <a:solidFill>
-                  <a:srgbClr val="FFFFFF"/>
+                  <a:srgbClr val="1F1F1F"/>
                 </a:solidFill>
                 <a:latin typeface="맑은 고딕"/>
               </a:defRPr>
@@ -16725,7 +16725,7 @@
             <a:pPr algn="r">
               <a:defRPr sz="1000" b="0">
                 <a:solidFill>
-                  <a:srgbClr val="94A3B8"/>
+                  <a:srgbClr val="8C8C9A"/>
                 </a:solidFill>
                 <a:latin typeface="맑은 고딕"/>
               </a:defRPr>
@@ -16750,7 +16750,7 @@
     <p:bg>
       <p:bgPr>
         <a:solidFill>
-          <a:srgbClr val="1A1A2E"/>
+          <a:srgbClr val="FFFFFF"/>
         </a:solidFill>
         <a:effectLst/>
       </p:bgPr>
@@ -16888,7 +16888,7 @@
             <a:pPr algn="l">
               <a:defRPr sz="4000" b="1">
                 <a:solidFill>
-                  <a:srgbClr val="FFFFFF"/>
+                  <a:srgbClr val="1F1F1F"/>
                 </a:solidFill>
                 <a:latin typeface="맑은 고딕"/>
               </a:defRPr>
@@ -16924,7 +16924,7 @@
             <a:pPr algn="l">
               <a:defRPr sz="1800" b="0">
                 <a:solidFill>
-                  <a:srgbClr val="94A3B8"/>
+                  <a:srgbClr val="5A5A6E"/>
                 </a:solidFill>
                 <a:latin typeface="맑은 고딕"/>
               </a:defRPr>
@@ -17037,7 +17037,7 @@
     <p:bg>
       <p:bgPr>
         <a:solidFill>
-          <a:srgbClr val="1A1A2E"/>
+          <a:srgbClr val="FFFFFF"/>
         </a:solidFill>
         <a:effectLst/>
       </p:bgPr>
@@ -17118,7 +17118,7 @@
             <a:pPr algn="l">
               <a:defRPr sz="2600" b="1">
                 <a:solidFill>
-                  <a:srgbClr val="FFFFFF"/>
+                  <a:srgbClr val="1F1F1F"/>
                 </a:solidFill>
                 <a:latin typeface="맑은 고딕"/>
               </a:defRPr>
@@ -17188,11 +17188,11 @@
             <a:avLst/>
           </a:prstGeom>
           <a:solidFill>
-            <a:srgbClr val="24243E"/>
+            <a:srgbClr val="F8F9FB"/>
           </a:solidFill>
           <a:ln w="12700">
             <a:solidFill>
-              <a:srgbClr val="333355"/>
+              <a:srgbClr val="E0E0E8"/>
             </a:solidFill>
           </a:ln>
           <a:effectLst/>
@@ -17253,7 +17253,7 @@
               </a:spcAft>
               <a:defRPr sz="1600" b="0">
                 <a:solidFill>
-                  <a:srgbClr val="FFFFFF"/>
+                  <a:srgbClr val="1F1F1F"/>
                 </a:solidFill>
                 <a:latin typeface="맑은 고딕"/>
               </a:defRPr>
@@ -17275,7 +17275,7 @@
               </a:spcAft>
               <a:defRPr sz="1600" b="0">
                 <a:solidFill>
-                  <a:srgbClr val="FFFFFF"/>
+                  <a:srgbClr val="1F1F1F"/>
                 </a:solidFill>
                 <a:latin typeface="맑은 고딕"/>
               </a:defRPr>
@@ -17297,7 +17297,7 @@
               </a:spcAft>
               <a:defRPr sz="1500">
                 <a:solidFill>
-                  <a:srgbClr val="94A3B8"/>
+                  <a:srgbClr val="8C8C9A"/>
                 </a:solidFill>
                 <a:latin typeface="맑은 고딕"/>
               </a:defRPr>
@@ -17319,7 +17319,7 @@
               </a:spcAft>
               <a:defRPr sz="1600" b="0">
                 <a:solidFill>
-                  <a:srgbClr val="FFFFFF"/>
+                  <a:srgbClr val="1F1F1F"/>
                 </a:solidFill>
                 <a:latin typeface="맑은 고딕"/>
               </a:defRPr>
@@ -17341,7 +17341,7 @@
               </a:spcAft>
               <a:defRPr sz="1600" b="0">
                 <a:solidFill>
-                  <a:srgbClr val="FFFFFF"/>
+                  <a:srgbClr val="1F1F1F"/>
                 </a:solidFill>
                 <a:latin typeface="맑은 고딕"/>
               </a:defRPr>
@@ -17363,7 +17363,7 @@
               </a:spcAft>
               <a:defRPr sz="1600" b="0">
                 <a:solidFill>
-                  <a:srgbClr val="FFFFFF"/>
+                  <a:srgbClr val="1F1F1F"/>
                 </a:solidFill>
                 <a:latin typeface="맑은 고딕"/>
               </a:defRPr>
@@ -17399,7 +17399,7 @@
             <a:pPr algn="r">
               <a:defRPr sz="1000" b="0">
                 <a:solidFill>
-                  <a:srgbClr val="94A3B8"/>
+                  <a:srgbClr val="8C8C9A"/>
                 </a:solidFill>
                 <a:latin typeface="맑은 고딕"/>
               </a:defRPr>
@@ -17424,7 +17424,7 @@
     <p:bg>
       <p:bgPr>
         <a:solidFill>
-          <a:srgbClr val="1A1A2E"/>
+          <a:srgbClr val="FFFFFF"/>
         </a:solidFill>
         <a:effectLst/>
       </p:bgPr>
@@ -17505,7 +17505,7 @@
             <a:pPr algn="l">
               <a:defRPr sz="2600" b="1">
                 <a:solidFill>
-                  <a:srgbClr val="FFFFFF"/>
+                  <a:srgbClr val="1F1F1F"/>
                 </a:solidFill>
                 <a:latin typeface="맑은 고딕"/>
               </a:defRPr>
@@ -17575,11 +17575,11 @@
             <a:avLst/>
           </a:prstGeom>
           <a:solidFill>
-            <a:srgbClr val="24243E"/>
+            <a:srgbClr val="F8F9FB"/>
           </a:solidFill>
           <a:ln w="12700">
             <a:solidFill>
-              <a:srgbClr val="333355"/>
+              <a:srgbClr val="E0E0E8"/>
             </a:solidFill>
           </a:ln>
           <a:effectLst/>
@@ -17676,7 +17676,7 @@
               </a:spcAft>
               <a:defRPr sz="1400" b="0">
                 <a:solidFill>
-                  <a:srgbClr val="FFFFFF"/>
+                  <a:srgbClr val="1F1F1F"/>
                 </a:solidFill>
                 <a:latin typeface="맑은 고딕"/>
               </a:defRPr>
@@ -17698,7 +17698,7 @@
               </a:spcAft>
               <a:defRPr sz="1400" b="0">
                 <a:solidFill>
-                  <a:srgbClr val="FFFFFF"/>
+                  <a:srgbClr val="1F1F1F"/>
                 </a:solidFill>
                 <a:latin typeface="맑은 고딕"/>
               </a:defRPr>
@@ -17720,7 +17720,7 @@
               </a:spcAft>
               <a:defRPr sz="1400" b="0">
                 <a:solidFill>
-                  <a:srgbClr val="FFFFFF"/>
+                  <a:srgbClr val="1F1F1F"/>
                 </a:solidFill>
                 <a:latin typeface="맑은 고딕"/>
               </a:defRPr>
@@ -17742,7 +17742,7 @@
               </a:spcAft>
               <a:defRPr sz="1400" b="0">
                 <a:solidFill>
-                  <a:srgbClr val="FFFFFF"/>
+                  <a:srgbClr val="1F1F1F"/>
                 </a:solidFill>
                 <a:latin typeface="맑은 고딕"/>
               </a:defRPr>
@@ -17764,7 +17764,7 @@
               </a:spcAft>
               <a:defRPr sz="1400" b="0">
                 <a:solidFill>
-                  <a:srgbClr val="FFFFFF"/>
+                  <a:srgbClr val="1F1F1F"/>
                 </a:solidFill>
                 <a:latin typeface="맑은 고딕"/>
               </a:defRPr>
@@ -17790,11 +17790,11 @@
             <a:avLst/>
           </a:prstGeom>
           <a:solidFill>
-            <a:srgbClr val="24243E"/>
+            <a:srgbClr val="F8F9FB"/>
           </a:solidFill>
           <a:ln w="12700">
             <a:solidFill>
-              <a:srgbClr val="333355"/>
+              <a:srgbClr val="E0E0E8"/>
             </a:solidFill>
           </a:ln>
           <a:effectLst/>
@@ -17891,7 +17891,7 @@
               </a:spcAft>
               <a:defRPr sz="1400" b="0">
                 <a:solidFill>
-                  <a:srgbClr val="FFFFFF"/>
+                  <a:srgbClr val="1F1F1F"/>
                 </a:solidFill>
                 <a:latin typeface="맑은 고딕"/>
               </a:defRPr>
@@ -17913,7 +17913,7 @@
               </a:spcAft>
               <a:defRPr sz="1400" b="0">
                 <a:solidFill>
-                  <a:srgbClr val="FFFFFF"/>
+                  <a:srgbClr val="1F1F1F"/>
                 </a:solidFill>
                 <a:latin typeface="맑은 고딕"/>
               </a:defRPr>
@@ -17935,7 +17935,7 @@
               </a:spcAft>
               <a:defRPr sz="1300">
                 <a:solidFill>
-                  <a:srgbClr val="94A3B8"/>
+                  <a:srgbClr val="8C8C9A"/>
                 </a:solidFill>
                 <a:latin typeface="맑은 고딕"/>
               </a:defRPr>
@@ -17957,7 +17957,7 @@
               </a:spcAft>
               <a:defRPr sz="1400" b="0">
                 <a:solidFill>
-                  <a:srgbClr val="FFFFFF"/>
+                  <a:srgbClr val="1F1F1F"/>
                 </a:solidFill>
                 <a:latin typeface="맑은 고딕"/>
               </a:defRPr>
@@ -17979,7 +17979,7 @@
               </a:spcAft>
               <a:defRPr sz="1300">
                 <a:solidFill>
-                  <a:srgbClr val="94A3B8"/>
+                  <a:srgbClr val="8C8C9A"/>
                 </a:solidFill>
                 <a:latin typeface="맑은 고딕"/>
               </a:defRPr>
@@ -18001,7 +18001,7 @@
               </a:spcAft>
               <a:defRPr sz="1300">
                 <a:solidFill>
-                  <a:srgbClr val="94A3B8"/>
+                  <a:srgbClr val="8C8C9A"/>
                 </a:solidFill>
                 <a:latin typeface="맑은 고딕"/>
               </a:defRPr>
@@ -18037,7 +18037,7 @@
             <a:pPr algn="r">
               <a:defRPr sz="1000" b="0">
                 <a:solidFill>
-                  <a:srgbClr val="94A3B8"/>
+                  <a:srgbClr val="8C8C9A"/>
                 </a:solidFill>
                 <a:latin typeface="맑은 고딕"/>
               </a:defRPr>
@@ -18062,7 +18062,7 @@
     <p:bg>
       <p:bgPr>
         <a:solidFill>
-          <a:srgbClr val="1A1A2E"/>
+          <a:srgbClr val="FFFFFF"/>
         </a:solidFill>
         <a:effectLst/>
       </p:bgPr>
@@ -18089,7 +18089,7 @@
             <a:avLst/>
           </a:prstGeom>
           <a:solidFill>
-            <a:srgbClr val="22C55E"/>
+            <a:srgbClr val="16A34A"/>
           </a:solidFill>
           <a:ln>
             <a:noFill/>
@@ -18133,7 +18133,7 @@
             <a:avLst/>
           </a:prstGeom>
           <a:solidFill>
-            <a:srgbClr val="22C55E"/>
+            <a:srgbClr val="16A34A"/>
           </a:solidFill>
           <a:ln>
             <a:noFill/>
@@ -18200,7 +18200,7 @@
             <a:pPr algn="l">
               <a:defRPr sz="4000" b="1">
                 <a:solidFill>
-                  <a:srgbClr val="FFFFFF"/>
+                  <a:srgbClr val="1F1F1F"/>
                 </a:solidFill>
                 <a:latin typeface="맑은 고딕"/>
               </a:defRPr>
@@ -18236,7 +18236,7 @@
             <a:pPr algn="l">
               <a:defRPr sz="1800" b="0">
                 <a:solidFill>
-                  <a:srgbClr val="94A3B8"/>
+                  <a:srgbClr val="5A5A6E"/>
                 </a:solidFill>
                 <a:latin typeface="맑은 고딕"/>
               </a:defRPr>
@@ -18262,7 +18262,7 @@
             <a:avLst/>
           </a:prstGeom>
           <a:solidFill>
-            <a:srgbClr val="22C55E"/>
+            <a:srgbClr val="16A34A"/>
           </a:solidFill>
           <a:ln>
             <a:noFill/>
@@ -18306,7 +18306,7 @@
             <a:avLst/>
           </a:prstGeom>
           <a:solidFill>
-            <a:srgbClr val="22C55E"/>
+            <a:srgbClr val="16A34A"/>
           </a:solidFill>
           <a:ln>
             <a:noFill/>
@@ -18349,7 +18349,7 @@
     <p:bg>
       <p:bgPr>
         <a:solidFill>
-          <a:srgbClr val="1A1A2E"/>
+          <a:srgbClr val="FFFFFF"/>
         </a:solidFill>
         <a:effectLst/>
       </p:bgPr>
@@ -18376,7 +18376,7 @@
             <a:avLst/>
           </a:prstGeom>
           <a:solidFill>
-            <a:srgbClr val="0096D6"/>
+            <a:srgbClr val="0070C0"/>
           </a:solidFill>
           <a:ln>
             <a:noFill/>
@@ -18430,7 +18430,7 @@
             <a:pPr algn="l">
               <a:defRPr sz="2600" b="1">
                 <a:solidFill>
-                  <a:srgbClr val="FFFFFF"/>
+                  <a:srgbClr val="1F1F1F"/>
                 </a:solidFill>
                 <a:latin typeface="맑은 고딕"/>
               </a:defRPr>
@@ -18456,7 +18456,7 @@
             <a:avLst/>
           </a:prstGeom>
           <a:solidFill>
-            <a:srgbClr val="0096D6"/>
+            <a:srgbClr val="0070C0"/>
           </a:solidFill>
           <a:ln>
             <a:noFill/>
@@ -18500,11 +18500,11 @@
             <a:avLst/>
           </a:prstGeom>
           <a:solidFill>
-            <a:srgbClr val="24243E"/>
+            <a:srgbClr val="F8F9FB"/>
           </a:solidFill>
           <a:ln w="12700">
             <a:solidFill>
-              <a:srgbClr val="333355"/>
+              <a:srgbClr val="E0E0E8"/>
             </a:solidFill>
           </a:ln>
           <a:effectLst/>
@@ -18565,7 +18565,7 @@
               </a:spcAft>
               <a:defRPr sz="1600" b="0">
                 <a:solidFill>
-                  <a:srgbClr val="FFFFFF"/>
+                  <a:srgbClr val="1F1F1F"/>
                 </a:solidFill>
                 <a:latin typeface="맑은 고딕"/>
               </a:defRPr>
@@ -18587,7 +18587,7 @@
               </a:spcAft>
               <a:defRPr sz="1600" b="0">
                 <a:solidFill>
-                  <a:srgbClr val="FFFFFF"/>
+                  <a:srgbClr val="1F1F1F"/>
                 </a:solidFill>
                 <a:latin typeface="맑은 고딕"/>
               </a:defRPr>
@@ -18609,7 +18609,7 @@
               </a:spcAft>
               <a:defRPr sz="1600" b="0">
                 <a:solidFill>
-                  <a:srgbClr val="FFFFFF"/>
+                  <a:srgbClr val="1F1F1F"/>
                 </a:solidFill>
                 <a:latin typeface="맑은 고딕"/>
               </a:defRPr>
@@ -18631,7 +18631,7 @@
               </a:spcAft>
               <a:defRPr sz="1600" b="0">
                 <a:solidFill>
-                  <a:srgbClr val="FFFFFF"/>
+                  <a:srgbClr val="1F1F1F"/>
                 </a:solidFill>
                 <a:latin typeface="맑은 고딕"/>
               </a:defRPr>
@@ -18653,7 +18653,7 @@
               </a:spcAft>
               <a:defRPr sz="1600" b="0">
                 <a:solidFill>
-                  <a:srgbClr val="FFFFFF"/>
+                  <a:srgbClr val="1F1F1F"/>
                 </a:solidFill>
                 <a:latin typeface="맑은 고딕"/>
               </a:defRPr>
@@ -18689,7 +18689,7 @@
             <a:pPr algn="r">
               <a:defRPr sz="1000" b="0">
                 <a:solidFill>
-                  <a:srgbClr val="94A3B8"/>
+                  <a:srgbClr val="8C8C9A"/>
                 </a:solidFill>
                 <a:latin typeface="맑은 고딕"/>
               </a:defRPr>
@@ -18714,7 +18714,7 @@
     <p:bg>
       <p:bgPr>
         <a:solidFill>
-          <a:srgbClr val="1A1A2E"/>
+          <a:srgbClr val="FFFFFF"/>
         </a:solidFill>
         <a:effectLst/>
       </p:bgPr>
@@ -18741,7 +18741,7 @@
             <a:avLst/>
           </a:prstGeom>
           <a:solidFill>
-            <a:srgbClr val="22C55E"/>
+            <a:srgbClr val="16A34A"/>
           </a:solidFill>
           <a:ln>
             <a:noFill/>
@@ -18795,7 +18795,7 @@
             <a:pPr algn="l">
               <a:defRPr sz="2600" b="1">
                 <a:solidFill>
-                  <a:srgbClr val="FFFFFF"/>
+                  <a:srgbClr val="1F1F1F"/>
                 </a:solidFill>
                 <a:latin typeface="맑은 고딕"/>
               </a:defRPr>
@@ -18821,7 +18821,7 @@
             <a:avLst/>
           </a:prstGeom>
           <a:solidFill>
-            <a:srgbClr val="22C55E"/>
+            <a:srgbClr val="16A34A"/>
           </a:solidFill>
           <a:ln>
             <a:noFill/>
@@ -18865,11 +18865,11 @@
             <a:avLst/>
           </a:prstGeom>
           <a:solidFill>
-            <a:srgbClr val="24243E"/>
+            <a:srgbClr val="F8F9FB"/>
           </a:solidFill>
           <a:ln w="12700">
             <a:solidFill>
-              <a:srgbClr val="333355"/>
+              <a:srgbClr val="E0E0E8"/>
             </a:solidFill>
           </a:ln>
           <a:effectLst/>
@@ -18930,7 +18930,7 @@
               </a:spcAft>
               <a:defRPr sz="1600" b="0">
                 <a:solidFill>
-                  <a:srgbClr val="FFFFFF"/>
+                  <a:srgbClr val="1F1F1F"/>
                 </a:solidFill>
                 <a:latin typeface="맑은 고딕"/>
               </a:defRPr>
@@ -18952,7 +18952,7 @@
               </a:spcAft>
               <a:defRPr sz="1600" b="0">
                 <a:solidFill>
-                  <a:srgbClr val="FFFFFF"/>
+                  <a:srgbClr val="1F1F1F"/>
                 </a:solidFill>
                 <a:latin typeface="맑은 고딕"/>
               </a:defRPr>
@@ -18974,7 +18974,7 @@
               </a:spcAft>
               <a:defRPr sz="1600" b="0">
                 <a:solidFill>
-                  <a:srgbClr val="FFFFFF"/>
+                  <a:srgbClr val="1F1F1F"/>
                 </a:solidFill>
                 <a:latin typeface="맑은 고딕"/>
               </a:defRPr>
@@ -18996,7 +18996,7 @@
               </a:spcAft>
               <a:defRPr sz="1500">
                 <a:solidFill>
-                  <a:srgbClr val="94A3B8"/>
+                  <a:srgbClr val="8C8C9A"/>
                 </a:solidFill>
                 <a:latin typeface="맑은 고딕"/>
               </a:defRPr>
@@ -19018,7 +19018,7 @@
               </a:spcAft>
               <a:defRPr sz="1500">
                 <a:solidFill>
-                  <a:srgbClr val="94A3B8"/>
+                  <a:srgbClr val="8C8C9A"/>
                 </a:solidFill>
                 <a:latin typeface="맑은 고딕"/>
               </a:defRPr>
@@ -19040,7 +19040,7 @@
               </a:spcAft>
               <a:defRPr sz="1600" b="0">
                 <a:solidFill>
-                  <a:srgbClr val="FFFFFF"/>
+                  <a:srgbClr val="1F1F1F"/>
                 </a:solidFill>
                 <a:latin typeface="맑은 고딕"/>
               </a:defRPr>
@@ -19062,7 +19062,7 @@
               </a:spcAft>
               <a:defRPr sz="1600" b="0">
                 <a:solidFill>
-                  <a:srgbClr val="FFFFFF"/>
+                  <a:srgbClr val="1F1F1F"/>
                 </a:solidFill>
                 <a:latin typeface="맑은 고딕"/>
               </a:defRPr>
@@ -19098,7 +19098,7 @@
             <a:pPr algn="r">
               <a:defRPr sz="1000" b="0">
                 <a:solidFill>
-                  <a:srgbClr val="94A3B8"/>
+                  <a:srgbClr val="8C8C9A"/>
                 </a:solidFill>
                 <a:latin typeface="맑은 고딕"/>
               </a:defRPr>
@@ -19123,7 +19123,7 @@
     <p:bg>
       <p:bgPr>
         <a:solidFill>
-          <a:srgbClr val="1A1A2E"/>
+          <a:srgbClr val="FFFFFF"/>
         </a:solidFill>
         <a:effectLst/>
       </p:bgPr>
@@ -19150,7 +19150,7 @@
             <a:avLst/>
           </a:prstGeom>
           <a:solidFill>
-            <a:srgbClr val="22C55E"/>
+            <a:srgbClr val="16A34A"/>
           </a:solidFill>
           <a:ln>
             <a:noFill/>
@@ -19204,7 +19204,7 @@
             <a:pPr algn="l">
               <a:defRPr sz="2600" b="1">
                 <a:solidFill>
-                  <a:srgbClr val="FFFFFF"/>
+                  <a:srgbClr val="1F1F1F"/>
                 </a:solidFill>
                 <a:latin typeface="맑은 고딕"/>
               </a:defRPr>
@@ -19230,7 +19230,7 @@
             <a:avLst/>
           </a:prstGeom>
           <a:solidFill>
-            <a:srgbClr val="22C55E"/>
+            <a:srgbClr val="16A34A"/>
           </a:solidFill>
           <a:ln>
             <a:noFill/>
@@ -19274,11 +19274,11 @@
             <a:avLst/>
           </a:prstGeom>
           <a:solidFill>
-            <a:srgbClr val="24243E"/>
+            <a:srgbClr val="F8F9FB"/>
           </a:solidFill>
           <a:ln w="12700">
             <a:solidFill>
-              <a:srgbClr val="333355"/>
+              <a:srgbClr val="E0E0E8"/>
             </a:solidFill>
           </a:ln>
           <a:effectLst/>
@@ -19339,7 +19339,7 @@
               </a:spcAft>
               <a:defRPr sz="1600" b="0">
                 <a:solidFill>
-                  <a:srgbClr val="FFFFFF"/>
+                  <a:srgbClr val="1F1F1F"/>
                 </a:solidFill>
                 <a:latin typeface="맑은 고딕"/>
               </a:defRPr>
@@ -19361,7 +19361,7 @@
               </a:spcAft>
               <a:defRPr sz="1600" b="0">
                 <a:solidFill>
-                  <a:srgbClr val="FFFFFF"/>
+                  <a:srgbClr val="1F1F1F"/>
                 </a:solidFill>
                 <a:latin typeface="맑은 고딕"/>
               </a:defRPr>
@@ -19383,7 +19383,7 @@
               </a:spcAft>
               <a:defRPr sz="1600" b="0">
                 <a:solidFill>
-                  <a:srgbClr val="FFFFFF"/>
+                  <a:srgbClr val="1F1F1F"/>
                 </a:solidFill>
                 <a:latin typeface="맑은 고딕"/>
               </a:defRPr>
@@ -19405,7 +19405,7 @@
               </a:spcAft>
               <a:defRPr sz="1600" b="0">
                 <a:solidFill>
-                  <a:srgbClr val="FFFFFF"/>
+                  <a:srgbClr val="1F1F1F"/>
                 </a:solidFill>
                 <a:latin typeface="맑은 고딕"/>
               </a:defRPr>
@@ -19427,7 +19427,7 @@
               </a:spcAft>
               <a:defRPr sz="1600" b="0">
                 <a:solidFill>
-                  <a:srgbClr val="FFFFFF"/>
+                  <a:srgbClr val="1F1F1F"/>
                 </a:solidFill>
                 <a:latin typeface="맑은 고딕"/>
               </a:defRPr>
@@ -19463,7 +19463,7 @@
             <a:pPr algn="r">
               <a:defRPr sz="1000" b="0">
                 <a:solidFill>
-                  <a:srgbClr val="94A3B8"/>
+                  <a:srgbClr val="8C8C9A"/>
                 </a:solidFill>
                 <a:latin typeface="맑은 고딕"/>
               </a:defRPr>
@@ -19488,7 +19488,7 @@
     <p:bg>
       <p:bgPr>
         <a:solidFill>
-          <a:srgbClr val="1A1A2E"/>
+          <a:srgbClr val="FFFFFF"/>
         </a:solidFill>
         <a:effectLst/>
       </p:bgPr>
@@ -19515,7 +19515,7 @@
             <a:avLst/>
           </a:prstGeom>
           <a:solidFill>
-            <a:srgbClr val="22C55E"/>
+            <a:srgbClr val="16A34A"/>
           </a:solidFill>
           <a:ln>
             <a:noFill/>
@@ -19569,7 +19569,7 @@
             <a:pPr algn="l">
               <a:defRPr sz="2600" b="1">
                 <a:solidFill>
-                  <a:srgbClr val="FFFFFF"/>
+                  <a:srgbClr val="1F1F1F"/>
                 </a:solidFill>
                 <a:latin typeface="맑은 고딕"/>
               </a:defRPr>
@@ -19595,7 +19595,7 @@
             <a:avLst/>
           </a:prstGeom>
           <a:solidFill>
-            <a:srgbClr val="22C55E"/>
+            <a:srgbClr val="16A34A"/>
           </a:solidFill>
           <a:ln>
             <a:noFill/>
@@ -19639,11 +19639,11 @@
             <a:avLst/>
           </a:prstGeom>
           <a:solidFill>
-            <a:srgbClr val="24243E"/>
+            <a:srgbClr val="F8F9FB"/>
           </a:solidFill>
           <a:ln w="12700">
             <a:solidFill>
-              <a:srgbClr val="333355"/>
+              <a:srgbClr val="E0E0E8"/>
             </a:solidFill>
           </a:ln>
           <a:effectLst/>
@@ -19704,7 +19704,7 @@
               </a:spcAft>
               <a:defRPr sz="1600" b="0">
                 <a:solidFill>
-                  <a:srgbClr val="FFFFFF"/>
+                  <a:srgbClr val="1F1F1F"/>
                 </a:solidFill>
                 <a:latin typeface="맑은 고딕"/>
               </a:defRPr>
@@ -19726,7 +19726,7 @@
               </a:spcAft>
               <a:defRPr sz="1600" b="0">
                 <a:solidFill>
-                  <a:srgbClr val="FFFFFF"/>
+                  <a:srgbClr val="1F1F1F"/>
                 </a:solidFill>
                 <a:latin typeface="맑은 고딕"/>
               </a:defRPr>
@@ -19748,7 +19748,7 @@
               </a:spcAft>
               <a:defRPr sz="1600" b="0">
                 <a:solidFill>
-                  <a:srgbClr val="FFFFFF"/>
+                  <a:srgbClr val="1F1F1F"/>
                 </a:solidFill>
                 <a:latin typeface="맑은 고딕"/>
               </a:defRPr>
@@ -19770,7 +19770,7 @@
               </a:spcAft>
               <a:defRPr sz="1600" b="0">
                 <a:solidFill>
-                  <a:srgbClr val="FFFFFF"/>
+                  <a:srgbClr val="1F1F1F"/>
                 </a:solidFill>
                 <a:latin typeface="맑은 고딕"/>
               </a:defRPr>
@@ -19792,7 +19792,7 @@
               </a:spcAft>
               <a:defRPr sz="1600" b="0">
                 <a:solidFill>
-                  <a:srgbClr val="FFFFFF"/>
+                  <a:srgbClr val="1F1F1F"/>
                 </a:solidFill>
                 <a:latin typeface="맑은 고딕"/>
               </a:defRPr>
@@ -19814,7 +19814,7 @@
               </a:spcAft>
               <a:defRPr sz="1600" b="0">
                 <a:solidFill>
-                  <a:srgbClr val="FFFFFF"/>
+                  <a:srgbClr val="1F1F1F"/>
                 </a:solidFill>
                 <a:latin typeface="맑은 고딕"/>
               </a:defRPr>
@@ -19850,7 +19850,7 @@
             <a:pPr algn="r">
               <a:defRPr sz="1000" b="0">
                 <a:solidFill>
-                  <a:srgbClr val="94A3B8"/>
+                  <a:srgbClr val="8C8C9A"/>
                 </a:solidFill>
                 <a:latin typeface="맑은 고딕"/>
               </a:defRPr>
@@ -19875,7 +19875,7 @@
     <p:bg>
       <p:bgPr>
         <a:solidFill>
-          <a:srgbClr val="1A1A2E"/>
+          <a:srgbClr val="FFFFFF"/>
         </a:solidFill>
         <a:effectLst/>
       </p:bgPr>
@@ -20013,7 +20013,7 @@
             <a:pPr algn="l">
               <a:defRPr sz="4000" b="1">
                 <a:solidFill>
-                  <a:srgbClr val="FFFFFF"/>
+                  <a:srgbClr val="1F1F1F"/>
                 </a:solidFill>
                 <a:latin typeface="맑은 고딕"/>
               </a:defRPr>
@@ -20049,7 +20049,7 @@
             <a:pPr algn="l">
               <a:defRPr sz="1800" b="0">
                 <a:solidFill>
-                  <a:srgbClr val="94A3B8"/>
+                  <a:srgbClr val="5A5A6E"/>
                 </a:solidFill>
                 <a:latin typeface="맑은 고딕"/>
               </a:defRPr>
@@ -20162,7 +20162,7 @@
     <p:bg>
       <p:bgPr>
         <a:solidFill>
-          <a:srgbClr val="1A1A2E"/>
+          <a:srgbClr val="FFFFFF"/>
         </a:solidFill>
         <a:effectLst/>
       </p:bgPr>
@@ -20243,7 +20243,7 @@
             <a:pPr algn="l">
               <a:defRPr sz="2600" b="1">
                 <a:solidFill>
-                  <a:srgbClr val="FFFFFF"/>
+                  <a:srgbClr val="1F1F1F"/>
                 </a:solidFill>
                 <a:latin typeface="맑은 고딕"/>
               </a:defRPr>
@@ -20313,11 +20313,11 @@
             <a:avLst/>
           </a:prstGeom>
           <a:solidFill>
-            <a:srgbClr val="24243E"/>
+            <a:srgbClr val="F8F9FB"/>
           </a:solidFill>
           <a:ln w="12700">
             <a:solidFill>
-              <a:srgbClr val="333355"/>
+              <a:srgbClr val="E0E0E8"/>
             </a:solidFill>
           </a:ln>
           <a:effectLst/>
@@ -20378,7 +20378,7 @@
               </a:spcAft>
               <a:defRPr sz="1600" b="0">
                 <a:solidFill>
-                  <a:srgbClr val="FFFFFF"/>
+                  <a:srgbClr val="1F1F1F"/>
                 </a:solidFill>
                 <a:latin typeface="맑은 고딕"/>
               </a:defRPr>
@@ -20400,7 +20400,7 @@
               </a:spcAft>
               <a:defRPr sz="1600" b="0">
                 <a:solidFill>
-                  <a:srgbClr val="FFFFFF"/>
+                  <a:srgbClr val="1F1F1F"/>
                 </a:solidFill>
                 <a:latin typeface="맑은 고딕"/>
               </a:defRPr>
@@ -20422,7 +20422,7 @@
               </a:spcAft>
               <a:defRPr sz="1600" b="0">
                 <a:solidFill>
-                  <a:srgbClr val="FFFFFF"/>
+                  <a:srgbClr val="1F1F1F"/>
                 </a:solidFill>
                 <a:latin typeface="맑은 고딕"/>
               </a:defRPr>
@@ -20444,7 +20444,7 @@
               </a:spcAft>
               <a:defRPr sz="1600" b="0">
                 <a:solidFill>
-                  <a:srgbClr val="FFFFFF"/>
+                  <a:srgbClr val="1F1F1F"/>
                 </a:solidFill>
                 <a:latin typeface="맑은 고딕"/>
               </a:defRPr>
@@ -20466,7 +20466,7 @@
               </a:spcAft>
               <a:defRPr sz="1600" b="0">
                 <a:solidFill>
-                  <a:srgbClr val="FFFFFF"/>
+                  <a:srgbClr val="1F1F1F"/>
                 </a:solidFill>
                 <a:latin typeface="맑은 고딕"/>
               </a:defRPr>
@@ -20502,7 +20502,7 @@
             <a:pPr algn="r">
               <a:defRPr sz="1000" b="0">
                 <a:solidFill>
-                  <a:srgbClr val="94A3B8"/>
+                  <a:srgbClr val="8C8C9A"/>
                 </a:solidFill>
                 <a:latin typeface="맑은 고딕"/>
               </a:defRPr>
@@ -20527,7 +20527,7 @@
     <p:bg>
       <p:bgPr>
         <a:solidFill>
-          <a:srgbClr val="1A1A2E"/>
+          <a:srgbClr val="FFFFFF"/>
         </a:solidFill>
         <a:effectLst/>
       </p:bgPr>
@@ -20608,7 +20608,7 @@
             <a:pPr algn="l">
               <a:defRPr sz="2600" b="1">
                 <a:solidFill>
-                  <a:srgbClr val="FFFFFF"/>
+                  <a:srgbClr val="1F1F1F"/>
                 </a:solidFill>
                 <a:latin typeface="맑은 고딕"/>
               </a:defRPr>
@@ -20678,11 +20678,11 @@
             <a:avLst/>
           </a:prstGeom>
           <a:solidFill>
-            <a:srgbClr val="24243E"/>
+            <a:srgbClr val="F8F9FB"/>
           </a:solidFill>
           <a:ln w="12700">
             <a:solidFill>
-              <a:srgbClr val="333355"/>
+              <a:srgbClr val="E0E0E8"/>
             </a:solidFill>
           </a:ln>
           <a:effectLst/>
@@ -20779,7 +20779,7 @@
               </a:spcAft>
               <a:defRPr sz="1400" b="0">
                 <a:solidFill>
-                  <a:srgbClr val="FFFFFF"/>
+                  <a:srgbClr val="1F1F1F"/>
                 </a:solidFill>
                 <a:latin typeface="맑은 고딕"/>
               </a:defRPr>
@@ -20801,7 +20801,7 @@
               </a:spcAft>
               <a:defRPr sz="1400" b="0">
                 <a:solidFill>
-                  <a:srgbClr val="FFFFFF"/>
+                  <a:srgbClr val="1F1F1F"/>
                 </a:solidFill>
                 <a:latin typeface="맑은 고딕"/>
               </a:defRPr>
@@ -20823,7 +20823,7 @@
               </a:spcAft>
               <a:defRPr sz="1400" b="0">
                 <a:solidFill>
-                  <a:srgbClr val="FFFFFF"/>
+                  <a:srgbClr val="1F1F1F"/>
                 </a:solidFill>
                 <a:latin typeface="맑은 고딕"/>
               </a:defRPr>
@@ -20845,7 +20845,7 @@
               </a:spcAft>
               <a:defRPr sz="1400" b="0">
                 <a:solidFill>
-                  <a:srgbClr val="FFFFFF"/>
+                  <a:srgbClr val="1F1F1F"/>
                 </a:solidFill>
                 <a:latin typeface="맑은 고딕"/>
               </a:defRPr>
@@ -20867,7 +20867,7 @@
               </a:spcAft>
               <a:defRPr sz="1400" b="0">
                 <a:solidFill>
-                  <a:srgbClr val="FFFFFF"/>
+                  <a:srgbClr val="1F1F1F"/>
                 </a:solidFill>
                 <a:latin typeface="맑은 고딕"/>
               </a:defRPr>
@@ -20893,11 +20893,11 @@
             <a:avLst/>
           </a:prstGeom>
           <a:solidFill>
-            <a:srgbClr val="24243E"/>
+            <a:srgbClr val="F8F9FB"/>
           </a:solidFill>
           <a:ln w="12700">
             <a:solidFill>
-              <a:srgbClr val="333355"/>
+              <a:srgbClr val="E0E0E8"/>
             </a:solidFill>
           </a:ln>
           <a:effectLst/>
@@ -20994,7 +20994,7 @@
               </a:spcAft>
               <a:defRPr sz="1400" b="0">
                 <a:solidFill>
-                  <a:srgbClr val="FFFFFF"/>
+                  <a:srgbClr val="1F1F1F"/>
                 </a:solidFill>
                 <a:latin typeface="맑은 고딕"/>
               </a:defRPr>
@@ -21016,7 +21016,7 @@
               </a:spcAft>
               <a:defRPr sz="1400" b="0">
                 <a:solidFill>
-                  <a:srgbClr val="FFFFFF"/>
+                  <a:srgbClr val="1F1F1F"/>
                 </a:solidFill>
                 <a:latin typeface="맑은 고딕"/>
               </a:defRPr>
@@ -21038,7 +21038,7 @@
               </a:spcAft>
               <a:defRPr sz="1300">
                 <a:solidFill>
-                  <a:srgbClr val="94A3B8"/>
+                  <a:srgbClr val="8C8C9A"/>
                 </a:solidFill>
                 <a:latin typeface="맑은 고딕"/>
               </a:defRPr>
@@ -21060,7 +21060,7 @@
               </a:spcAft>
               <a:defRPr sz="1300">
                 <a:solidFill>
-                  <a:srgbClr val="94A3B8"/>
+                  <a:srgbClr val="8C8C9A"/>
                 </a:solidFill>
                 <a:latin typeface="맑은 고딕"/>
               </a:defRPr>
@@ -21082,7 +21082,7 @@
               </a:spcAft>
               <a:defRPr sz="1400" b="0">
                 <a:solidFill>
-                  <a:srgbClr val="FFFFFF"/>
+                  <a:srgbClr val="1F1F1F"/>
                 </a:solidFill>
                 <a:latin typeface="맑은 고딕"/>
               </a:defRPr>
@@ -21118,7 +21118,7 @@
             <a:pPr algn="r">
               <a:defRPr sz="1000" b="0">
                 <a:solidFill>
-                  <a:srgbClr val="94A3B8"/>
+                  <a:srgbClr val="8C8C9A"/>
                 </a:solidFill>
                 <a:latin typeface="맑은 고딕"/>
               </a:defRPr>
@@ -21143,7 +21143,7 @@
     <p:bg>
       <p:bgPr>
         <a:solidFill>
-          <a:srgbClr val="1A1A2E"/>
+          <a:srgbClr val="FFFFFF"/>
         </a:solidFill>
         <a:effectLst/>
       </p:bgPr>
@@ -21224,7 +21224,7 @@
             <a:pPr algn="l">
               <a:defRPr sz="2600" b="1">
                 <a:solidFill>
-                  <a:srgbClr val="FFFFFF"/>
+                  <a:srgbClr val="1F1F1F"/>
                 </a:solidFill>
                 <a:latin typeface="맑은 고딕"/>
               </a:defRPr>
@@ -21294,11 +21294,11 @@
             <a:avLst/>
           </a:prstGeom>
           <a:solidFill>
-            <a:srgbClr val="24243E"/>
+            <a:srgbClr val="F8F9FB"/>
           </a:solidFill>
           <a:ln w="12700">
             <a:solidFill>
-              <a:srgbClr val="333355"/>
+              <a:srgbClr val="E0E0E8"/>
             </a:solidFill>
           </a:ln>
           <a:effectLst/>
@@ -21359,7 +21359,7 @@
               </a:spcAft>
               <a:defRPr sz="1600" b="0">
                 <a:solidFill>
-                  <a:srgbClr val="FFFFFF"/>
+                  <a:srgbClr val="1F1F1F"/>
                 </a:solidFill>
                 <a:latin typeface="맑은 고딕"/>
               </a:defRPr>
@@ -21381,7 +21381,7 @@
               </a:spcAft>
               <a:defRPr sz="1600" b="0">
                 <a:solidFill>
-                  <a:srgbClr val="FFFFFF"/>
+                  <a:srgbClr val="1F1F1F"/>
                 </a:solidFill>
                 <a:latin typeface="맑은 고딕"/>
               </a:defRPr>
@@ -21403,7 +21403,7 @@
               </a:spcAft>
               <a:defRPr sz="1600" b="0">
                 <a:solidFill>
-                  <a:srgbClr val="FFFFFF"/>
+                  <a:srgbClr val="1F1F1F"/>
                 </a:solidFill>
                 <a:latin typeface="맑은 고딕"/>
               </a:defRPr>
@@ -21425,7 +21425,7 @@
               </a:spcAft>
               <a:defRPr sz="1600" b="0">
                 <a:solidFill>
-                  <a:srgbClr val="FFFFFF"/>
+                  <a:srgbClr val="1F1F1F"/>
                 </a:solidFill>
                 <a:latin typeface="맑은 고딕"/>
               </a:defRPr>
@@ -21447,7 +21447,7 @@
               </a:spcAft>
               <a:defRPr sz="1600" b="0">
                 <a:solidFill>
-                  <a:srgbClr val="FFFFFF"/>
+                  <a:srgbClr val="1F1F1F"/>
                 </a:solidFill>
                 <a:latin typeface="맑은 고딕"/>
               </a:defRPr>
@@ -21469,7 +21469,7 @@
               </a:spcAft>
               <a:defRPr sz="1600" b="0">
                 <a:solidFill>
-                  <a:srgbClr val="FFFFFF"/>
+                  <a:srgbClr val="1F1F1F"/>
                 </a:solidFill>
                 <a:latin typeface="맑은 고딕"/>
               </a:defRPr>
@@ -21505,7 +21505,7 @@
             <a:pPr algn="r">
               <a:defRPr sz="1000" b="0">
                 <a:solidFill>
-                  <a:srgbClr val="94A3B8"/>
+                  <a:srgbClr val="8C8C9A"/>
                 </a:solidFill>
                 <a:latin typeface="맑은 고딕"/>
               </a:defRPr>
@@ -21530,7 +21530,7 @@
     <p:bg>
       <p:bgPr>
         <a:solidFill>
-          <a:srgbClr val="1A1A2E"/>
+          <a:srgbClr val="FFFFFF"/>
         </a:solidFill>
         <a:effectLst/>
       </p:bgPr>
@@ -21557,7 +21557,7 @@
             <a:avLst/>
           </a:prstGeom>
           <a:solidFill>
-            <a:srgbClr val="EF4444"/>
+            <a:srgbClr val="DC2E2E"/>
           </a:solidFill>
           <a:ln>
             <a:noFill/>
@@ -21601,7 +21601,7 @@
             <a:avLst/>
           </a:prstGeom>
           <a:solidFill>
-            <a:srgbClr val="EF4444"/>
+            <a:srgbClr val="DC2E2E"/>
           </a:solidFill>
           <a:ln>
             <a:noFill/>
@@ -21668,7 +21668,7 @@
             <a:pPr algn="l">
               <a:defRPr sz="4000" b="1">
                 <a:solidFill>
-                  <a:srgbClr val="FFFFFF"/>
+                  <a:srgbClr val="1F1F1F"/>
                 </a:solidFill>
                 <a:latin typeface="맑은 고딕"/>
               </a:defRPr>
@@ -21704,7 +21704,7 @@
             <a:pPr algn="l">
               <a:defRPr sz="1800" b="0">
                 <a:solidFill>
-                  <a:srgbClr val="94A3B8"/>
+                  <a:srgbClr val="5A5A6E"/>
                 </a:solidFill>
                 <a:latin typeface="맑은 고딕"/>
               </a:defRPr>
@@ -21730,7 +21730,7 @@
             <a:avLst/>
           </a:prstGeom>
           <a:solidFill>
-            <a:srgbClr val="EF4444"/>
+            <a:srgbClr val="DC2E2E"/>
           </a:solidFill>
           <a:ln>
             <a:noFill/>
@@ -21774,7 +21774,7 @@
             <a:avLst/>
           </a:prstGeom>
           <a:solidFill>
-            <a:srgbClr val="EF4444"/>
+            <a:srgbClr val="DC2E2E"/>
           </a:solidFill>
           <a:ln>
             <a:noFill/>
@@ -21817,7 +21817,7 @@
     <p:bg>
       <p:bgPr>
         <a:solidFill>
-          <a:srgbClr val="1A1A2E"/>
+          <a:srgbClr val="FFFFFF"/>
         </a:solidFill>
         <a:effectLst/>
       </p:bgPr>
@@ -21844,7 +21844,7 @@
             <a:avLst/>
           </a:prstGeom>
           <a:solidFill>
-            <a:srgbClr val="EF4444"/>
+            <a:srgbClr val="DC2E2E"/>
           </a:solidFill>
           <a:ln>
             <a:noFill/>
@@ -21898,7 +21898,7 @@
             <a:pPr algn="l">
               <a:defRPr sz="2600" b="1">
                 <a:solidFill>
-                  <a:srgbClr val="FFFFFF"/>
+                  <a:srgbClr val="1F1F1F"/>
                 </a:solidFill>
                 <a:latin typeface="맑은 고딕"/>
               </a:defRPr>
@@ -21924,7 +21924,7 @@
             <a:avLst/>
           </a:prstGeom>
           <a:solidFill>
-            <a:srgbClr val="EF4444"/>
+            <a:srgbClr val="DC2E2E"/>
           </a:solidFill>
           <a:ln>
             <a:noFill/>
@@ -21968,11 +21968,11 @@
             <a:avLst/>
           </a:prstGeom>
           <a:solidFill>
-            <a:srgbClr val="24243E"/>
+            <a:srgbClr val="F8F9FB"/>
           </a:solidFill>
           <a:ln w="12700">
             <a:solidFill>
-              <a:srgbClr val="333355"/>
+              <a:srgbClr val="E0E0E8"/>
             </a:solidFill>
           </a:ln>
           <a:effectLst/>
@@ -22033,7 +22033,7 @@
               </a:spcAft>
               <a:defRPr sz="1600" b="0">
                 <a:solidFill>
-                  <a:srgbClr val="FFFFFF"/>
+                  <a:srgbClr val="1F1F1F"/>
                 </a:solidFill>
                 <a:latin typeface="맑은 고딕"/>
               </a:defRPr>
@@ -22055,7 +22055,7 @@
               </a:spcAft>
               <a:defRPr sz="1600" b="0">
                 <a:solidFill>
-                  <a:srgbClr val="FFFFFF"/>
+                  <a:srgbClr val="1F1F1F"/>
                 </a:solidFill>
                 <a:latin typeface="맑은 고딕"/>
               </a:defRPr>
@@ -22077,7 +22077,7 @@
               </a:spcAft>
               <a:defRPr sz="1600" b="0">
                 <a:solidFill>
-                  <a:srgbClr val="FFFFFF"/>
+                  <a:srgbClr val="1F1F1F"/>
                 </a:solidFill>
                 <a:latin typeface="맑은 고딕"/>
               </a:defRPr>
@@ -22099,7 +22099,7 @@
               </a:spcAft>
               <a:defRPr sz="1600" b="0">
                 <a:solidFill>
-                  <a:srgbClr val="FFFFFF"/>
+                  <a:srgbClr val="1F1F1F"/>
                 </a:solidFill>
                 <a:latin typeface="맑은 고딕"/>
               </a:defRPr>
@@ -22121,7 +22121,7 @@
               </a:spcAft>
               <a:defRPr sz="1600" b="0">
                 <a:solidFill>
-                  <a:srgbClr val="FFFFFF"/>
+                  <a:srgbClr val="1F1F1F"/>
                 </a:solidFill>
                 <a:latin typeface="맑은 고딕"/>
               </a:defRPr>
@@ -22143,7 +22143,7 @@
               </a:spcAft>
               <a:defRPr sz="1600" b="0">
                 <a:solidFill>
-                  <a:srgbClr val="FFFFFF"/>
+                  <a:srgbClr val="1F1F1F"/>
                 </a:solidFill>
                 <a:latin typeface="맑은 고딕"/>
               </a:defRPr>
@@ -22179,7 +22179,7 @@
             <a:pPr algn="r">
               <a:defRPr sz="1000" b="0">
                 <a:solidFill>
-                  <a:srgbClr val="94A3B8"/>
+                  <a:srgbClr val="8C8C9A"/>
                 </a:solidFill>
                 <a:latin typeface="맑은 고딕"/>
               </a:defRPr>
@@ -22204,7 +22204,7 @@
     <p:bg>
       <p:bgPr>
         <a:solidFill>
-          <a:srgbClr val="1A1A2E"/>
+          <a:srgbClr val="FFFFFF"/>
         </a:solidFill>
         <a:effectLst/>
       </p:bgPr>
@@ -22231,7 +22231,7 @@
             <a:avLst/>
           </a:prstGeom>
           <a:solidFill>
-            <a:srgbClr val="EF4444"/>
+            <a:srgbClr val="DC2E2E"/>
           </a:solidFill>
           <a:ln>
             <a:noFill/>
@@ -22285,7 +22285,7 @@
             <a:pPr algn="l">
               <a:defRPr sz="2600" b="1">
                 <a:solidFill>
-                  <a:srgbClr val="FFFFFF"/>
+                  <a:srgbClr val="1F1F1F"/>
                 </a:solidFill>
                 <a:latin typeface="맑은 고딕"/>
               </a:defRPr>
@@ -22311,7 +22311,7 @@
             <a:avLst/>
           </a:prstGeom>
           <a:solidFill>
-            <a:srgbClr val="EF4444"/>
+            <a:srgbClr val="DC2E2E"/>
           </a:solidFill>
           <a:ln>
             <a:noFill/>
@@ -22355,11 +22355,11 @@
             <a:avLst/>
           </a:prstGeom>
           <a:solidFill>
-            <a:srgbClr val="24243E"/>
+            <a:srgbClr val="F8F9FB"/>
           </a:solidFill>
           <a:ln w="12700">
             <a:solidFill>
-              <a:srgbClr val="333355"/>
+              <a:srgbClr val="E0E0E8"/>
             </a:solidFill>
           </a:ln>
           <a:effectLst/>
@@ -22420,7 +22420,7 @@
               </a:spcAft>
               <a:defRPr sz="1600" b="0">
                 <a:solidFill>
-                  <a:srgbClr val="FFFFFF"/>
+                  <a:srgbClr val="1F1F1F"/>
                 </a:solidFill>
                 <a:latin typeface="맑은 고딕"/>
               </a:defRPr>
@@ -22442,7 +22442,7 @@
               </a:spcAft>
               <a:defRPr sz="1500">
                 <a:solidFill>
-                  <a:srgbClr val="94A3B8"/>
+                  <a:srgbClr val="8C8C9A"/>
                 </a:solidFill>
                 <a:latin typeface="맑은 고딕"/>
               </a:defRPr>
@@ -22464,7 +22464,7 @@
               </a:spcAft>
               <a:defRPr sz="1600" b="0">
                 <a:solidFill>
-                  <a:srgbClr val="FFFFFF"/>
+                  <a:srgbClr val="1F1F1F"/>
                 </a:solidFill>
                 <a:latin typeface="맑은 고딕"/>
               </a:defRPr>
@@ -22486,7 +22486,7 @@
               </a:spcAft>
               <a:defRPr sz="1500">
                 <a:solidFill>
-                  <a:srgbClr val="94A3B8"/>
+                  <a:srgbClr val="8C8C9A"/>
                 </a:solidFill>
                 <a:latin typeface="맑은 고딕"/>
               </a:defRPr>
@@ -22508,7 +22508,7 @@
               </a:spcAft>
               <a:defRPr sz="1600" b="0">
                 <a:solidFill>
-                  <a:srgbClr val="FFFFFF"/>
+                  <a:srgbClr val="1F1F1F"/>
                 </a:solidFill>
                 <a:latin typeface="맑은 고딕"/>
               </a:defRPr>
@@ -22530,7 +22530,7 @@
               </a:spcAft>
               <a:defRPr sz="1500">
                 <a:solidFill>
-                  <a:srgbClr val="94A3B8"/>
+                  <a:srgbClr val="8C8C9A"/>
                 </a:solidFill>
                 <a:latin typeface="맑은 고딕"/>
               </a:defRPr>
@@ -22552,7 +22552,7 @@
               </a:spcAft>
               <a:defRPr sz="1600" b="0">
                 <a:solidFill>
-                  <a:srgbClr val="FFFFFF"/>
+                  <a:srgbClr val="1F1F1F"/>
                 </a:solidFill>
                 <a:latin typeface="맑은 고딕"/>
               </a:defRPr>
@@ -22588,7 +22588,7 @@
             <a:pPr algn="r">
               <a:defRPr sz="1000" b="0">
                 <a:solidFill>
-                  <a:srgbClr val="94A3B8"/>
+                  <a:srgbClr val="8C8C9A"/>
                 </a:solidFill>
                 <a:latin typeface="맑은 고딕"/>
               </a:defRPr>
@@ -22613,7 +22613,7 @@
     <p:bg>
       <p:bgPr>
         <a:solidFill>
-          <a:srgbClr val="1A1A2E"/>
+          <a:srgbClr val="FFFFFF"/>
         </a:solidFill>
         <a:effectLst/>
       </p:bgPr>
@@ -22640,7 +22640,7 @@
             <a:avLst/>
           </a:prstGeom>
           <a:solidFill>
-            <a:srgbClr val="0096D6"/>
+            <a:srgbClr val="0070C0"/>
           </a:solidFill>
           <a:ln>
             <a:noFill/>
@@ -22694,7 +22694,7 @@
             <a:pPr algn="l">
               <a:defRPr sz="2600" b="1">
                 <a:solidFill>
-                  <a:srgbClr val="FFFFFF"/>
+                  <a:srgbClr val="1F1F1F"/>
                 </a:solidFill>
                 <a:latin typeface="맑은 고딕"/>
               </a:defRPr>
@@ -22720,7 +22720,7 @@
             <a:avLst/>
           </a:prstGeom>
           <a:solidFill>
-            <a:srgbClr val="0096D6"/>
+            <a:srgbClr val="0070C0"/>
           </a:solidFill>
           <a:ln>
             <a:noFill/>
@@ -22764,11 +22764,11 @@
             <a:avLst/>
           </a:prstGeom>
           <a:solidFill>
-            <a:srgbClr val="24243E"/>
+            <a:srgbClr val="F8F9FB"/>
           </a:solidFill>
           <a:ln w="12700">
             <a:solidFill>
-              <a:srgbClr val="333355"/>
+              <a:srgbClr val="E0E0E8"/>
             </a:solidFill>
           </a:ln>
           <a:effectLst/>
@@ -22829,7 +22829,7 @@
               </a:spcAft>
               <a:defRPr sz="1600" b="0">
                 <a:solidFill>
-                  <a:srgbClr val="FFFFFF"/>
+                  <a:srgbClr val="1F1F1F"/>
                 </a:solidFill>
                 <a:latin typeface="맑은 고딕"/>
               </a:defRPr>
@@ -22851,7 +22851,7 @@
               </a:spcAft>
               <a:defRPr sz="1600" b="0">
                 <a:solidFill>
-                  <a:srgbClr val="FFFFFF"/>
+                  <a:srgbClr val="1F1F1F"/>
                 </a:solidFill>
                 <a:latin typeface="맑은 고딕"/>
               </a:defRPr>
@@ -22873,7 +22873,7 @@
               </a:spcAft>
               <a:defRPr sz="1600" b="0">
                 <a:solidFill>
-                  <a:srgbClr val="FFFFFF"/>
+                  <a:srgbClr val="1F1F1F"/>
                 </a:solidFill>
                 <a:latin typeface="맑은 고딕"/>
               </a:defRPr>
@@ -22895,7 +22895,7 @@
               </a:spcAft>
               <a:defRPr sz="1600" b="0">
                 <a:solidFill>
-                  <a:srgbClr val="FFFFFF"/>
+                  <a:srgbClr val="1F1F1F"/>
                 </a:solidFill>
                 <a:latin typeface="맑은 고딕"/>
               </a:defRPr>
@@ -22917,7 +22917,7 @@
               </a:spcAft>
               <a:defRPr sz="1600" b="0">
                 <a:solidFill>
-                  <a:srgbClr val="FFFFFF"/>
+                  <a:srgbClr val="1F1F1F"/>
                 </a:solidFill>
                 <a:latin typeface="맑은 고딕"/>
               </a:defRPr>
@@ -22953,7 +22953,7 @@
             <a:pPr algn="r">
               <a:defRPr sz="1000" b="0">
                 <a:solidFill>
-                  <a:srgbClr val="94A3B8"/>
+                  <a:srgbClr val="8C8C9A"/>
                 </a:solidFill>
                 <a:latin typeface="맑은 고딕"/>
               </a:defRPr>
@@ -22978,7 +22978,7 @@
     <p:bg>
       <p:bgPr>
         <a:solidFill>
-          <a:srgbClr val="1A1A2E"/>
+          <a:srgbClr val="FFFFFF"/>
         </a:solidFill>
         <a:effectLst/>
       </p:bgPr>
@@ -23116,7 +23116,7 @@
             <a:pPr algn="l">
               <a:defRPr sz="4000" b="1">
                 <a:solidFill>
-                  <a:srgbClr val="FFFFFF"/>
+                  <a:srgbClr val="1F1F1F"/>
                 </a:solidFill>
                 <a:latin typeface="맑은 고딕"/>
               </a:defRPr>
@@ -23152,7 +23152,7 @@
             <a:pPr algn="l">
               <a:defRPr sz="1800" b="0">
                 <a:solidFill>
-                  <a:srgbClr val="94A3B8"/>
+                  <a:srgbClr val="5A5A6E"/>
                 </a:solidFill>
                 <a:latin typeface="맑은 고딕"/>
               </a:defRPr>
@@ -23265,7 +23265,7 @@
     <p:bg>
       <p:bgPr>
         <a:solidFill>
-          <a:srgbClr val="1A1A2E"/>
+          <a:srgbClr val="FFFFFF"/>
         </a:solidFill>
         <a:effectLst/>
       </p:bgPr>
@@ -23346,7 +23346,7 @@
             <a:pPr algn="l">
               <a:defRPr sz="2600" b="1">
                 <a:solidFill>
-                  <a:srgbClr val="FFFFFF"/>
+                  <a:srgbClr val="1F1F1F"/>
                 </a:solidFill>
                 <a:latin typeface="맑은 고딕"/>
               </a:defRPr>
@@ -23416,11 +23416,11 @@
             <a:avLst/>
           </a:prstGeom>
           <a:solidFill>
-            <a:srgbClr val="24243E"/>
+            <a:srgbClr val="F8F9FB"/>
           </a:solidFill>
           <a:ln w="12700">
             <a:solidFill>
-              <a:srgbClr val="333355"/>
+              <a:srgbClr val="E0E0E8"/>
             </a:solidFill>
           </a:ln>
           <a:effectLst/>
@@ -23517,7 +23517,7 @@
               </a:spcAft>
               <a:defRPr sz="1400" b="0">
                 <a:solidFill>
-                  <a:srgbClr val="FFFFFF"/>
+                  <a:srgbClr val="1F1F1F"/>
                 </a:solidFill>
                 <a:latin typeface="맑은 고딕"/>
               </a:defRPr>
@@ -23539,7 +23539,7 @@
               </a:spcAft>
               <a:defRPr sz="1400" b="0">
                 <a:solidFill>
-                  <a:srgbClr val="FFFFFF"/>
+                  <a:srgbClr val="1F1F1F"/>
                 </a:solidFill>
                 <a:latin typeface="맑은 고딕"/>
               </a:defRPr>
@@ -23561,7 +23561,7 @@
               </a:spcAft>
               <a:defRPr sz="1400" b="0">
                 <a:solidFill>
-                  <a:srgbClr val="FFFFFF"/>
+                  <a:srgbClr val="1F1F1F"/>
                 </a:solidFill>
                 <a:latin typeface="맑은 고딕"/>
               </a:defRPr>
@@ -23583,7 +23583,7 @@
               </a:spcAft>
               <a:defRPr sz="1400" b="0">
                 <a:solidFill>
-                  <a:srgbClr val="FFFFFF"/>
+                  <a:srgbClr val="1F1F1F"/>
                 </a:solidFill>
                 <a:latin typeface="맑은 고딕"/>
               </a:defRPr>
@@ -23605,7 +23605,7 @@
               </a:spcAft>
               <a:defRPr sz="1400" b="0">
                 <a:solidFill>
-                  <a:srgbClr val="FFFFFF"/>
+                  <a:srgbClr val="1F1F1F"/>
                 </a:solidFill>
                 <a:latin typeface="맑은 고딕"/>
               </a:defRPr>
@@ -23627,7 +23627,7 @@
               </a:spcAft>
               <a:defRPr sz="1400" b="0">
                 <a:solidFill>
-                  <a:srgbClr val="FFFFFF"/>
+                  <a:srgbClr val="1F1F1F"/>
                 </a:solidFill>
                 <a:latin typeface="맑은 고딕"/>
               </a:defRPr>
@@ -23653,11 +23653,11 @@
             <a:avLst/>
           </a:prstGeom>
           <a:solidFill>
-            <a:srgbClr val="24243E"/>
+            <a:srgbClr val="F8F9FB"/>
           </a:solidFill>
           <a:ln w="12700">
             <a:solidFill>
-              <a:srgbClr val="333355"/>
+              <a:srgbClr val="E0E0E8"/>
             </a:solidFill>
           </a:ln>
           <a:effectLst/>
@@ -23754,7 +23754,7 @@
               </a:spcAft>
               <a:defRPr sz="1400" b="0">
                 <a:solidFill>
-                  <a:srgbClr val="FFFFFF"/>
+                  <a:srgbClr val="1F1F1F"/>
                 </a:solidFill>
                 <a:latin typeface="맑은 고딕"/>
               </a:defRPr>
@@ -23776,7 +23776,7 @@
               </a:spcAft>
               <a:defRPr sz="1400" b="0">
                 <a:solidFill>
-                  <a:srgbClr val="FFFFFF"/>
+                  <a:srgbClr val="1F1F1F"/>
                 </a:solidFill>
                 <a:latin typeface="맑은 고딕"/>
               </a:defRPr>
@@ -23798,7 +23798,7 @@
               </a:spcAft>
               <a:defRPr sz="1400" b="0">
                 <a:solidFill>
-                  <a:srgbClr val="FFFFFF"/>
+                  <a:srgbClr val="1F1F1F"/>
                 </a:solidFill>
                 <a:latin typeface="맑은 고딕"/>
               </a:defRPr>
@@ -23820,7 +23820,7 @@
               </a:spcAft>
               <a:defRPr sz="1400" b="0">
                 <a:solidFill>
-                  <a:srgbClr val="FFFFFF"/>
+                  <a:srgbClr val="1F1F1F"/>
                 </a:solidFill>
                 <a:latin typeface="맑은 고딕"/>
               </a:defRPr>
@@ -23842,7 +23842,7 @@
               </a:spcAft>
               <a:defRPr sz="1300">
                 <a:solidFill>
-                  <a:srgbClr val="94A3B8"/>
+                  <a:srgbClr val="8C8C9A"/>
                 </a:solidFill>
                 <a:latin typeface="맑은 고딕"/>
               </a:defRPr>
@@ -23864,7 +23864,7 @@
               </a:spcAft>
               <a:defRPr sz="1300">
                 <a:solidFill>
-                  <a:srgbClr val="94A3B8"/>
+                  <a:srgbClr val="8C8C9A"/>
                 </a:solidFill>
                 <a:latin typeface="맑은 고딕"/>
               </a:defRPr>
@@ -23900,7 +23900,7 @@
             <a:pPr algn="r">
               <a:defRPr sz="1000" b="0">
                 <a:solidFill>
-                  <a:srgbClr val="94A3B8"/>
+                  <a:srgbClr val="8C8C9A"/>
                 </a:solidFill>
                 <a:latin typeface="맑은 고딕"/>
               </a:defRPr>
@@ -23925,7 +23925,7 @@
     <p:bg>
       <p:bgPr>
         <a:solidFill>
-          <a:srgbClr val="1A1A2E"/>
+          <a:srgbClr val="FFFFFF"/>
         </a:solidFill>
         <a:effectLst/>
       </p:bgPr>
@@ -24063,7 +24063,7 @@
             <a:pPr algn="l">
               <a:defRPr sz="4000" b="1">
                 <a:solidFill>
-                  <a:srgbClr val="FFFFFF"/>
+                  <a:srgbClr val="1F1F1F"/>
                 </a:solidFill>
                 <a:latin typeface="맑은 고딕"/>
               </a:defRPr>
@@ -24099,7 +24099,7 @@
             <a:pPr algn="l">
               <a:defRPr sz="1800" b="0">
                 <a:solidFill>
-                  <a:srgbClr val="94A3B8"/>
+                  <a:srgbClr val="5A5A6E"/>
                 </a:solidFill>
                 <a:latin typeface="맑은 고딕"/>
               </a:defRPr>
@@ -24212,7 +24212,7 @@
     <p:bg>
       <p:bgPr>
         <a:solidFill>
-          <a:srgbClr val="1A1A2E"/>
+          <a:srgbClr val="FFFFFF"/>
         </a:solidFill>
         <a:effectLst/>
       </p:bgPr>
@@ -24293,7 +24293,7 @@
             <a:pPr algn="l">
               <a:defRPr sz="2600" b="1">
                 <a:solidFill>
-                  <a:srgbClr val="FFFFFF"/>
+                  <a:srgbClr val="1F1F1F"/>
                 </a:solidFill>
                 <a:latin typeface="맑은 고딕"/>
               </a:defRPr>
@@ -24363,11 +24363,11 @@
             <a:avLst/>
           </a:prstGeom>
           <a:solidFill>
-            <a:srgbClr val="24243E"/>
+            <a:srgbClr val="F8F9FB"/>
           </a:solidFill>
           <a:ln w="12700">
             <a:solidFill>
-              <a:srgbClr val="333355"/>
+              <a:srgbClr val="E0E0E8"/>
             </a:solidFill>
           </a:ln>
           <a:effectLst/>
@@ -24464,7 +24464,7 @@
               </a:spcAft>
               <a:defRPr sz="1400" b="0">
                 <a:solidFill>
-                  <a:srgbClr val="FFFFFF"/>
+                  <a:srgbClr val="1F1F1F"/>
                 </a:solidFill>
                 <a:latin typeface="맑은 고딕"/>
               </a:defRPr>
@@ -24486,7 +24486,7 @@
               </a:spcAft>
               <a:defRPr sz="1400" b="0">
                 <a:solidFill>
-                  <a:srgbClr val="FFFFFF"/>
+                  <a:srgbClr val="1F1F1F"/>
                 </a:solidFill>
                 <a:latin typeface="맑은 고딕"/>
               </a:defRPr>
@@ -24508,7 +24508,7 @@
               </a:spcAft>
               <a:defRPr sz="1400" b="0">
                 <a:solidFill>
-                  <a:srgbClr val="FFFFFF"/>
+                  <a:srgbClr val="1F1F1F"/>
                 </a:solidFill>
                 <a:latin typeface="맑은 고딕"/>
               </a:defRPr>
@@ -24530,7 +24530,7 @@
               </a:spcAft>
               <a:defRPr sz="1400" b="0">
                 <a:solidFill>
-                  <a:srgbClr val="FFFFFF"/>
+                  <a:srgbClr val="1F1F1F"/>
                 </a:solidFill>
                 <a:latin typeface="맑은 고딕"/>
               </a:defRPr>
@@ -24552,7 +24552,7 @@
               </a:spcAft>
               <a:defRPr sz="1300">
                 <a:solidFill>
-                  <a:srgbClr val="94A3B8"/>
+                  <a:srgbClr val="8C8C9A"/>
                 </a:solidFill>
                 <a:latin typeface="맑은 고딕"/>
               </a:defRPr>
@@ -24574,7 +24574,7 @@
               </a:spcAft>
               <a:defRPr sz="1300">
                 <a:solidFill>
-                  <a:srgbClr val="94A3B8"/>
+                  <a:srgbClr val="8C8C9A"/>
                 </a:solidFill>
                 <a:latin typeface="맑은 고딕"/>
               </a:defRPr>
@@ -24600,11 +24600,11 @@
             <a:avLst/>
           </a:prstGeom>
           <a:solidFill>
-            <a:srgbClr val="24243E"/>
+            <a:srgbClr val="F8F9FB"/>
           </a:solidFill>
           <a:ln w="12700">
             <a:solidFill>
-              <a:srgbClr val="333355"/>
+              <a:srgbClr val="E0E0E8"/>
             </a:solidFill>
           </a:ln>
           <a:effectLst/>
@@ -24701,7 +24701,7 @@
               </a:spcAft>
               <a:defRPr sz="1400" b="0">
                 <a:solidFill>
-                  <a:srgbClr val="FFFFFF"/>
+                  <a:srgbClr val="1F1F1F"/>
                 </a:solidFill>
                 <a:latin typeface="맑은 고딕"/>
               </a:defRPr>
@@ -24723,7 +24723,7 @@
               </a:spcAft>
               <a:defRPr sz="1400" b="0">
                 <a:solidFill>
-                  <a:srgbClr val="FFFFFF"/>
+                  <a:srgbClr val="1F1F1F"/>
                 </a:solidFill>
                 <a:latin typeface="맑은 고딕"/>
               </a:defRPr>
@@ -24745,7 +24745,7 @@
               </a:spcAft>
               <a:defRPr sz="1400" b="0">
                 <a:solidFill>
-                  <a:srgbClr val="FFFFFF"/>
+                  <a:srgbClr val="1F1F1F"/>
                 </a:solidFill>
                 <a:latin typeface="맑은 고딕"/>
               </a:defRPr>
@@ -24767,7 +24767,7 @@
               </a:spcAft>
               <a:defRPr sz="1400" b="0">
                 <a:solidFill>
-                  <a:srgbClr val="FFFFFF"/>
+                  <a:srgbClr val="1F1F1F"/>
                 </a:solidFill>
                 <a:latin typeface="맑은 고딕"/>
               </a:defRPr>
@@ -24789,7 +24789,7 @@
               </a:spcAft>
               <a:defRPr sz="1400" b="0">
                 <a:solidFill>
-                  <a:srgbClr val="FFFFFF"/>
+                  <a:srgbClr val="1F1F1F"/>
                 </a:solidFill>
                 <a:latin typeface="맑은 고딕"/>
               </a:defRPr>
@@ -24825,7 +24825,7 @@
             <a:pPr algn="r">
               <a:defRPr sz="1000" b="0">
                 <a:solidFill>
-                  <a:srgbClr val="94A3B8"/>
+                  <a:srgbClr val="8C8C9A"/>
                 </a:solidFill>
                 <a:latin typeface="맑은 고딕"/>
               </a:defRPr>
@@ -24850,7 +24850,7 @@
     <p:bg>
       <p:bgPr>
         <a:solidFill>
-          <a:srgbClr val="1A1A2E"/>
+          <a:srgbClr val="FFFFFF"/>
         </a:solidFill>
         <a:effectLst/>
       </p:bgPr>
@@ -24877,7 +24877,7 @@
             <a:avLst/>
           </a:prstGeom>
           <a:solidFill>
-            <a:srgbClr val="94A3B8"/>
+            <a:srgbClr val="6B7280"/>
           </a:solidFill>
           <a:ln>
             <a:noFill/>
@@ -24921,7 +24921,7 @@
             <a:avLst/>
           </a:prstGeom>
           <a:solidFill>
-            <a:srgbClr val="94A3B8"/>
+            <a:srgbClr val="6B7280"/>
           </a:solidFill>
           <a:ln>
             <a:noFill/>
@@ -24988,7 +24988,7 @@
             <a:pPr algn="l">
               <a:defRPr sz="4000" b="1">
                 <a:solidFill>
-                  <a:srgbClr val="FFFFFF"/>
+                  <a:srgbClr val="1F1F1F"/>
                 </a:solidFill>
                 <a:latin typeface="맑은 고딕"/>
               </a:defRPr>
@@ -25024,7 +25024,7 @@
             <a:pPr algn="l">
               <a:defRPr sz="1800" b="0">
                 <a:solidFill>
-                  <a:srgbClr val="94A3B8"/>
+                  <a:srgbClr val="5A5A6E"/>
                 </a:solidFill>
                 <a:latin typeface="맑은 고딕"/>
               </a:defRPr>
@@ -25050,7 +25050,7 @@
             <a:avLst/>
           </a:prstGeom>
           <a:solidFill>
-            <a:srgbClr val="94A3B8"/>
+            <a:srgbClr val="6B7280"/>
           </a:solidFill>
           <a:ln>
             <a:noFill/>
@@ -25094,7 +25094,7 @@
             <a:avLst/>
           </a:prstGeom>
           <a:solidFill>
-            <a:srgbClr val="94A3B8"/>
+            <a:srgbClr val="6B7280"/>
           </a:solidFill>
           <a:ln>
             <a:noFill/>
@@ -25137,7 +25137,7 @@
     <p:bg>
       <p:bgPr>
         <a:solidFill>
-          <a:srgbClr val="1A1A2E"/>
+          <a:srgbClr val="FFFFFF"/>
         </a:solidFill>
         <a:effectLst/>
       </p:bgPr>
@@ -25164,7 +25164,7 @@
             <a:avLst/>
           </a:prstGeom>
           <a:solidFill>
-            <a:srgbClr val="94A3B8"/>
+            <a:srgbClr val="6B7280"/>
           </a:solidFill>
           <a:ln>
             <a:noFill/>
@@ -25218,7 +25218,7 @@
             <a:pPr algn="l">
               <a:defRPr sz="2600" b="1">
                 <a:solidFill>
-                  <a:srgbClr val="FFFFFF"/>
+                  <a:srgbClr val="1F1F1F"/>
                 </a:solidFill>
                 <a:latin typeface="맑은 고딕"/>
               </a:defRPr>
@@ -25244,7 +25244,7 @@
             <a:avLst/>
           </a:prstGeom>
           <a:solidFill>
-            <a:srgbClr val="94A3B8"/>
+            <a:srgbClr val="6B7280"/>
           </a:solidFill>
           <a:ln>
             <a:noFill/>
@@ -25288,11 +25288,11 @@
             <a:avLst/>
           </a:prstGeom>
           <a:solidFill>
-            <a:srgbClr val="24243E"/>
+            <a:srgbClr val="F8F9FB"/>
           </a:solidFill>
           <a:ln w="12700">
             <a:solidFill>
-              <a:srgbClr val="333355"/>
+              <a:srgbClr val="E0E0E8"/>
             </a:solidFill>
           </a:ln>
           <a:effectLst/>
@@ -25344,7 +25344,7 @@
             <a:pPr algn="l">
               <a:defRPr sz="1600" b="1">
                 <a:solidFill>
-                  <a:srgbClr val="94A3B8"/>
+                  <a:srgbClr val="6B7280"/>
                 </a:solidFill>
                 <a:latin typeface="맑은 고딕"/>
               </a:defRPr>
@@ -25389,7 +25389,7 @@
               </a:spcAft>
               <a:defRPr sz="1400" b="0">
                 <a:solidFill>
-                  <a:srgbClr val="FFFFFF"/>
+                  <a:srgbClr val="1F1F1F"/>
                 </a:solidFill>
                 <a:latin typeface="맑은 고딕"/>
               </a:defRPr>
@@ -25411,7 +25411,7 @@
               </a:spcAft>
               <a:defRPr sz="1400" b="0">
                 <a:solidFill>
-                  <a:srgbClr val="FFFFFF"/>
+                  <a:srgbClr val="1F1F1F"/>
                 </a:solidFill>
                 <a:latin typeface="맑은 고딕"/>
               </a:defRPr>
@@ -25433,7 +25433,7 @@
               </a:spcAft>
               <a:defRPr sz="1400" b="0">
                 <a:solidFill>
-                  <a:srgbClr val="FFFFFF"/>
+                  <a:srgbClr val="1F1F1F"/>
                 </a:solidFill>
                 <a:latin typeface="맑은 고딕"/>
               </a:defRPr>
@@ -25455,7 +25455,7 @@
               </a:spcAft>
               <a:defRPr sz="1400" b="0">
                 <a:solidFill>
-                  <a:srgbClr val="FFFFFF"/>
+                  <a:srgbClr val="1F1F1F"/>
                 </a:solidFill>
                 <a:latin typeface="맑은 고딕"/>
               </a:defRPr>
@@ -25477,7 +25477,7 @@
               </a:spcAft>
               <a:defRPr sz="1300">
                 <a:solidFill>
-                  <a:srgbClr val="94A3B8"/>
+                  <a:srgbClr val="8C8C9A"/>
                 </a:solidFill>
                 <a:latin typeface="맑은 고딕"/>
               </a:defRPr>
@@ -25503,11 +25503,11 @@
             <a:avLst/>
           </a:prstGeom>
           <a:solidFill>
-            <a:srgbClr val="24243E"/>
+            <a:srgbClr val="F8F9FB"/>
           </a:solidFill>
           <a:ln w="12700">
             <a:solidFill>
-              <a:srgbClr val="333355"/>
+              <a:srgbClr val="E0E0E8"/>
             </a:solidFill>
           </a:ln>
           <a:effectLst/>
@@ -25559,7 +25559,7 @@
             <a:pPr algn="l">
               <a:defRPr sz="1600" b="1">
                 <a:solidFill>
-                  <a:srgbClr val="94A3B8"/>
+                  <a:srgbClr val="6B7280"/>
                 </a:solidFill>
                 <a:latin typeface="맑은 고딕"/>
               </a:defRPr>
@@ -25604,7 +25604,7 @@
               </a:spcAft>
               <a:defRPr sz="1400" b="0">
                 <a:solidFill>
-                  <a:srgbClr val="FFFFFF"/>
+                  <a:srgbClr val="1F1F1F"/>
                 </a:solidFill>
                 <a:latin typeface="맑은 고딕"/>
               </a:defRPr>
@@ -25626,7 +25626,7 @@
               </a:spcAft>
               <a:defRPr sz="1400" b="0">
                 <a:solidFill>
-                  <a:srgbClr val="FFFFFF"/>
+                  <a:srgbClr val="1F1F1F"/>
                 </a:solidFill>
                 <a:latin typeface="맑은 고딕"/>
               </a:defRPr>
@@ -25648,7 +25648,7 @@
               </a:spcAft>
               <a:defRPr sz="1400" b="0">
                 <a:solidFill>
-                  <a:srgbClr val="FFFFFF"/>
+                  <a:srgbClr val="1F1F1F"/>
                 </a:solidFill>
                 <a:latin typeface="맑은 고딕"/>
               </a:defRPr>
@@ -25670,7 +25670,7 @@
               </a:spcAft>
               <a:defRPr sz="1400" b="0">
                 <a:solidFill>
-                  <a:srgbClr val="FFFFFF"/>
+                  <a:srgbClr val="1F1F1F"/>
                 </a:solidFill>
                 <a:latin typeface="맑은 고딕"/>
               </a:defRPr>
@@ -25692,7 +25692,7 @@
               </a:spcAft>
               <a:defRPr sz="1400" b="0">
                 <a:solidFill>
-                  <a:srgbClr val="FFFFFF"/>
+                  <a:srgbClr val="1F1F1F"/>
                 </a:solidFill>
                 <a:latin typeface="맑은 고딕"/>
               </a:defRPr>
@@ -25728,7 +25728,7 @@
             <a:pPr algn="r">
               <a:defRPr sz="1000" b="0">
                 <a:solidFill>
-                  <a:srgbClr val="94A3B8"/>
+                  <a:srgbClr val="8C8C9A"/>
                 </a:solidFill>
                 <a:latin typeface="맑은 고딕"/>
               </a:defRPr>
@@ -25753,7 +25753,7 @@
     <p:bg>
       <p:bgPr>
         <a:solidFill>
-          <a:srgbClr val="1A1A2E"/>
+          <a:srgbClr val="FFFFFF"/>
         </a:solidFill>
         <a:effectLst/>
       </p:bgPr>
@@ -25780,7 +25780,7 @@
             <a:avLst/>
           </a:prstGeom>
           <a:solidFill>
-            <a:srgbClr val="0096D6"/>
+            <a:srgbClr val="0070C0"/>
           </a:solidFill>
           <a:ln>
             <a:noFill/>
@@ -25824,7 +25824,7 @@
             <a:avLst/>
           </a:prstGeom>
           <a:solidFill>
-            <a:srgbClr val="00D4AA"/>
+            <a:srgbClr val="00A585"/>
           </a:solidFill>
           <a:ln>
             <a:noFill/>
@@ -25878,7 +25878,7 @@
             <a:pPr algn="l">
               <a:defRPr sz="4800" b="1">
                 <a:solidFill>
-                  <a:srgbClr val="0096D6"/>
+                  <a:srgbClr val="0070C0"/>
                 </a:solidFill>
                 <a:latin typeface="맑은 고딕"/>
               </a:defRPr>
@@ -25914,7 +25914,7 @@
             <a:pPr algn="l">
               <a:defRPr sz="2000" b="0">
                 <a:solidFill>
-                  <a:srgbClr val="94A3B8"/>
+                  <a:srgbClr val="8C8C9A"/>
                 </a:solidFill>
                 <a:latin typeface="맑은 고딕"/>
               </a:defRPr>
@@ -25940,7 +25940,7 @@
             <a:avLst/>
           </a:prstGeom>
           <a:solidFill>
-            <a:srgbClr val="00D4AA"/>
+            <a:srgbClr val="00A585"/>
           </a:solidFill>
           <a:ln>
             <a:noFill/>
@@ -25994,7 +25994,7 @@
             <a:pPr algn="l">
               <a:defRPr sz="1600" b="0">
                 <a:solidFill>
-                  <a:srgbClr val="E5E7EB"/>
+                  <a:srgbClr val="5A5A6E"/>
                 </a:solidFill>
                 <a:latin typeface="맑은 고딕"/>
               </a:defRPr>
@@ -26020,7 +26020,7 @@
             <a:avLst/>
           </a:prstGeom>
           <a:solidFill>
-            <a:srgbClr val="0096D6"/>
+            <a:srgbClr val="0070C0"/>
           </a:solidFill>
           <a:ln>
             <a:noFill/>
@@ -26064,7 +26064,7 @@
             <a:avLst/>
           </a:prstGeom>
           <a:solidFill>
-            <a:srgbClr val="00D4AA"/>
+            <a:srgbClr val="00A585"/>
           </a:solidFill>
           <a:ln>
             <a:noFill/>
@@ -26107,7 +26107,7 @@
     <p:bg>
       <p:bgPr>
         <a:solidFill>
-          <a:srgbClr val="1A1A2E"/>
+          <a:srgbClr val="FFFFFF"/>
         </a:solidFill>
         <a:effectLst/>
       </p:bgPr>
@@ -26134,7 +26134,7 @@
             <a:avLst/>
           </a:prstGeom>
           <a:solidFill>
-            <a:srgbClr val="0096D6"/>
+            <a:srgbClr val="0070C0"/>
           </a:solidFill>
           <a:ln>
             <a:noFill/>
@@ -26188,7 +26188,7 @@
             <a:pPr algn="l">
               <a:defRPr sz="2600" b="1">
                 <a:solidFill>
-                  <a:srgbClr val="FFFFFF"/>
+                  <a:srgbClr val="1F1F1F"/>
                 </a:solidFill>
                 <a:latin typeface="맑은 고딕"/>
               </a:defRPr>
@@ -26214,7 +26214,7 @@
             <a:avLst/>
           </a:prstGeom>
           <a:solidFill>
-            <a:srgbClr val="0096D6"/>
+            <a:srgbClr val="0070C0"/>
           </a:solidFill>
           <a:ln>
             <a:noFill/>
@@ -26258,11 +26258,11 @@
             <a:avLst/>
           </a:prstGeom>
           <a:solidFill>
-            <a:srgbClr val="24243E"/>
+            <a:srgbClr val="F8F9FB"/>
           </a:solidFill>
           <a:ln w="12700">
             <a:solidFill>
-              <a:srgbClr val="333355"/>
+              <a:srgbClr val="E0E0E8"/>
             </a:solidFill>
           </a:ln>
           <a:effectLst/>
@@ -26314,7 +26314,7 @@
             <a:pPr algn="l">
               <a:defRPr sz="1600" b="1">
                 <a:solidFill>
-                  <a:srgbClr val="0096D6"/>
+                  <a:srgbClr val="0070C0"/>
                 </a:solidFill>
                 <a:latin typeface="맑은 고딕"/>
               </a:defRPr>
@@ -26359,7 +26359,7 @@
               </a:spcAft>
               <a:defRPr sz="1400" b="0">
                 <a:solidFill>
-                  <a:srgbClr val="FFFFFF"/>
+                  <a:srgbClr val="1F1F1F"/>
                 </a:solidFill>
                 <a:latin typeface="맑은 고딕"/>
               </a:defRPr>
@@ -26381,7 +26381,7 @@
               </a:spcAft>
               <a:defRPr sz="1300">
                 <a:solidFill>
-                  <a:srgbClr val="94A3B8"/>
+                  <a:srgbClr val="8C8C9A"/>
                 </a:solidFill>
                 <a:latin typeface="맑은 고딕"/>
               </a:defRPr>
@@ -26403,7 +26403,7 @@
               </a:spcAft>
               <a:defRPr sz="1400" b="0">
                 <a:solidFill>
-                  <a:srgbClr val="FFFFFF"/>
+                  <a:srgbClr val="1F1F1F"/>
                 </a:solidFill>
                 <a:latin typeface="맑은 고딕"/>
               </a:defRPr>
@@ -26425,7 +26425,7 @@
               </a:spcAft>
               <a:defRPr sz="1300">
                 <a:solidFill>
-                  <a:srgbClr val="94A3B8"/>
+                  <a:srgbClr val="8C8C9A"/>
                 </a:solidFill>
                 <a:latin typeface="맑은 고딕"/>
               </a:defRPr>
@@ -26451,11 +26451,11 @@
             <a:avLst/>
           </a:prstGeom>
           <a:solidFill>
-            <a:srgbClr val="24243E"/>
+            <a:srgbClr val="F8F9FB"/>
           </a:solidFill>
           <a:ln w="12700">
             <a:solidFill>
-              <a:srgbClr val="333355"/>
+              <a:srgbClr val="E0E0E8"/>
             </a:solidFill>
           </a:ln>
           <a:effectLst/>
@@ -26507,7 +26507,7 @@
             <a:pPr algn="l">
               <a:defRPr sz="1600" b="1">
                 <a:solidFill>
-                  <a:srgbClr val="0096D6"/>
+                  <a:srgbClr val="0070C0"/>
                 </a:solidFill>
                 <a:latin typeface="맑은 고딕"/>
               </a:defRPr>
@@ -26552,7 +26552,7 @@
               </a:spcAft>
               <a:defRPr sz="1400" b="0">
                 <a:solidFill>
-                  <a:srgbClr val="FFFFFF"/>
+                  <a:srgbClr val="1F1F1F"/>
                 </a:solidFill>
                 <a:latin typeface="맑은 고딕"/>
               </a:defRPr>
@@ -26574,7 +26574,7 @@
               </a:spcAft>
               <a:defRPr sz="1300">
                 <a:solidFill>
-                  <a:srgbClr val="94A3B8"/>
+                  <a:srgbClr val="8C8C9A"/>
                 </a:solidFill>
                 <a:latin typeface="맑은 고딕"/>
               </a:defRPr>
@@ -26596,7 +26596,7 @@
               </a:spcAft>
               <a:defRPr sz="1400" b="0">
                 <a:solidFill>
-                  <a:srgbClr val="FFFFFF"/>
+                  <a:srgbClr val="1F1F1F"/>
                 </a:solidFill>
                 <a:latin typeface="맑은 고딕"/>
               </a:defRPr>
@@ -26618,7 +26618,7 @@
               </a:spcAft>
               <a:defRPr sz="1300">
                 <a:solidFill>
-                  <a:srgbClr val="94A3B8"/>
+                  <a:srgbClr val="8C8C9A"/>
                 </a:solidFill>
                 <a:latin typeface="맑은 고딕"/>
               </a:defRPr>
@@ -26654,7 +26654,7 @@
             <a:pPr algn="r">
               <a:defRPr sz="1000" b="0">
                 <a:solidFill>
-                  <a:srgbClr val="94A3B8"/>
+                  <a:srgbClr val="8C8C9A"/>
                 </a:solidFill>
                 <a:latin typeface="맑은 고딕"/>
               </a:defRPr>
@@ -26679,7 +26679,7 @@
     <p:bg>
       <p:bgPr>
         <a:solidFill>
-          <a:srgbClr val="1A1A2E"/>
+          <a:srgbClr val="FFFFFF"/>
         </a:solidFill>
         <a:effectLst/>
       </p:bgPr>
@@ -26706,7 +26706,7 @@
             <a:avLst/>
           </a:prstGeom>
           <a:solidFill>
-            <a:srgbClr val="0096D6"/>
+            <a:srgbClr val="0070C0"/>
           </a:solidFill>
           <a:ln>
             <a:noFill/>
@@ -26760,7 +26760,7 @@
             <a:pPr algn="l">
               <a:defRPr sz="2600" b="1">
                 <a:solidFill>
-                  <a:srgbClr val="FFFFFF"/>
+                  <a:srgbClr val="1F1F1F"/>
                 </a:solidFill>
                 <a:latin typeface="맑은 고딕"/>
               </a:defRPr>
@@ -26786,7 +26786,7 @@
             <a:avLst/>
           </a:prstGeom>
           <a:solidFill>
-            <a:srgbClr val="0096D6"/>
+            <a:srgbClr val="0070C0"/>
           </a:solidFill>
           <a:ln>
             <a:noFill/>
@@ -26830,11 +26830,11 @@
             <a:avLst/>
           </a:prstGeom>
           <a:solidFill>
-            <a:srgbClr val="24243E"/>
+            <a:srgbClr val="F8F9FB"/>
           </a:solidFill>
           <a:ln w="12700">
             <a:solidFill>
-              <a:srgbClr val="333355"/>
+              <a:srgbClr val="E0E0E8"/>
             </a:solidFill>
           </a:ln>
           <a:effectLst/>
@@ -26886,7 +26886,7 @@
             <a:pPr algn="l">
               <a:defRPr sz="1600" b="1">
                 <a:solidFill>
-                  <a:srgbClr val="0096D6"/>
+                  <a:srgbClr val="0070C0"/>
                 </a:solidFill>
                 <a:latin typeface="맑은 고딕"/>
               </a:defRPr>
@@ -26931,7 +26931,7 @@
               </a:spcAft>
               <a:defRPr sz="1400" b="0">
                 <a:solidFill>
-                  <a:srgbClr val="FFFFFF"/>
+                  <a:srgbClr val="1F1F1F"/>
                 </a:solidFill>
                 <a:latin typeface="맑은 고딕"/>
               </a:defRPr>
@@ -26953,7 +26953,7 @@
               </a:spcAft>
               <a:defRPr sz="1300">
                 <a:solidFill>
-                  <a:srgbClr val="94A3B8"/>
+                  <a:srgbClr val="8C8C9A"/>
                 </a:solidFill>
                 <a:latin typeface="맑은 고딕"/>
               </a:defRPr>
@@ -26975,7 +26975,7 @@
               </a:spcAft>
               <a:defRPr sz="1400" b="0">
                 <a:solidFill>
-                  <a:srgbClr val="FFFFFF"/>
+                  <a:srgbClr val="1F1F1F"/>
                 </a:solidFill>
                 <a:latin typeface="맑은 고딕"/>
               </a:defRPr>
@@ -27001,11 +27001,11 @@
             <a:avLst/>
           </a:prstGeom>
           <a:solidFill>
-            <a:srgbClr val="24243E"/>
+            <a:srgbClr val="F8F9FB"/>
           </a:solidFill>
           <a:ln w="12700">
             <a:solidFill>
-              <a:srgbClr val="333355"/>
+              <a:srgbClr val="E0E0E8"/>
             </a:solidFill>
           </a:ln>
           <a:effectLst/>
@@ -27057,7 +27057,7 @@
             <a:pPr algn="l">
               <a:defRPr sz="1600" b="1">
                 <a:solidFill>
-                  <a:srgbClr val="0096D6"/>
+                  <a:srgbClr val="0070C0"/>
                 </a:solidFill>
                 <a:latin typeface="맑은 고딕"/>
               </a:defRPr>
@@ -27102,7 +27102,7 @@
               </a:spcAft>
               <a:defRPr sz="1400" b="0">
                 <a:solidFill>
-                  <a:srgbClr val="FFFFFF"/>
+                  <a:srgbClr val="1F1F1F"/>
                 </a:solidFill>
                 <a:latin typeface="맑은 고딕"/>
               </a:defRPr>
@@ -27124,7 +27124,7 @@
               </a:spcAft>
               <a:defRPr sz="1300">
                 <a:solidFill>
-                  <a:srgbClr val="94A3B8"/>
+                  <a:srgbClr val="8C8C9A"/>
                 </a:solidFill>
                 <a:latin typeface="맑은 고딕"/>
               </a:defRPr>
@@ -27146,7 +27146,7 @@
               </a:spcAft>
               <a:defRPr sz="1400" b="0">
                 <a:solidFill>
-                  <a:srgbClr val="FFFFFF"/>
+                  <a:srgbClr val="1F1F1F"/>
                 </a:solidFill>
                 <a:latin typeface="맑은 고딕"/>
               </a:defRPr>
@@ -27168,7 +27168,7 @@
               </a:spcAft>
               <a:defRPr sz="1300">
                 <a:solidFill>
-                  <a:srgbClr val="94A3B8"/>
+                  <a:srgbClr val="8C8C9A"/>
                 </a:solidFill>
                 <a:latin typeface="맑은 고딕"/>
               </a:defRPr>
@@ -27204,7 +27204,7 @@
             <a:pPr algn="r">
               <a:defRPr sz="1000" b="0">
                 <a:solidFill>
-                  <a:srgbClr val="94A3B8"/>
+                  <a:srgbClr val="8C8C9A"/>
                 </a:solidFill>
                 <a:latin typeface="맑은 고딕"/>
               </a:defRPr>
@@ -27229,7 +27229,7 @@
     <p:bg>
       <p:bgPr>
         <a:solidFill>
-          <a:srgbClr val="1A1A2E"/>
+          <a:srgbClr val="FFFFFF"/>
         </a:solidFill>
         <a:effectLst/>
       </p:bgPr>
@@ -27256,7 +27256,7 @@
             <a:avLst/>
           </a:prstGeom>
           <a:solidFill>
-            <a:srgbClr val="0096D6"/>
+            <a:srgbClr val="0070C0"/>
           </a:solidFill>
           <a:ln>
             <a:noFill/>
@@ -27310,7 +27310,7 @@
             <a:pPr algn="l">
               <a:defRPr sz="2600" b="1">
                 <a:solidFill>
-                  <a:srgbClr val="FFFFFF"/>
+                  <a:srgbClr val="1F1F1F"/>
                 </a:solidFill>
                 <a:latin typeface="맑은 고딕"/>
               </a:defRPr>
@@ -27336,7 +27336,7 @@
             <a:avLst/>
           </a:prstGeom>
           <a:solidFill>
-            <a:srgbClr val="0096D6"/>
+            <a:srgbClr val="0070C0"/>
           </a:solidFill>
           <a:ln>
             <a:noFill/>
@@ -27380,11 +27380,11 @@
             <a:avLst/>
           </a:prstGeom>
           <a:solidFill>
-            <a:srgbClr val="24243E"/>
+            <a:srgbClr val="F8F9FB"/>
           </a:solidFill>
           <a:ln w="12700">
             <a:solidFill>
-              <a:srgbClr val="333355"/>
+              <a:srgbClr val="E0E0E8"/>
             </a:solidFill>
           </a:ln>
           <a:effectLst/>
@@ -27436,7 +27436,7 @@
             <a:pPr algn="l">
               <a:defRPr sz="1600" b="1">
                 <a:solidFill>
-                  <a:srgbClr val="0096D6"/>
+                  <a:srgbClr val="0070C0"/>
                 </a:solidFill>
                 <a:latin typeface="맑은 고딕"/>
               </a:defRPr>
@@ -27481,7 +27481,7 @@
               </a:spcAft>
               <a:defRPr sz="1400" b="0">
                 <a:solidFill>
-                  <a:srgbClr val="FFFFFF"/>
+                  <a:srgbClr val="1F1F1F"/>
                 </a:solidFill>
                 <a:latin typeface="맑은 고딕"/>
               </a:defRPr>
@@ -27503,7 +27503,7 @@
               </a:spcAft>
               <a:defRPr sz="1300">
                 <a:solidFill>
-                  <a:srgbClr val="94A3B8"/>
+                  <a:srgbClr val="8C8C9A"/>
                 </a:solidFill>
                 <a:latin typeface="맑은 고딕"/>
               </a:defRPr>
@@ -27525,7 +27525,7 @@
               </a:spcAft>
               <a:defRPr sz="1400" b="0">
                 <a:solidFill>
-                  <a:srgbClr val="FFFFFF"/>
+                  <a:srgbClr val="1F1F1F"/>
                 </a:solidFill>
                 <a:latin typeface="맑은 고딕"/>
               </a:defRPr>
@@ -27547,7 +27547,7 @@
               </a:spcAft>
               <a:defRPr sz="1300">
                 <a:solidFill>
-                  <a:srgbClr val="94A3B8"/>
+                  <a:srgbClr val="8C8C9A"/>
                 </a:solidFill>
                 <a:latin typeface="맑은 고딕"/>
               </a:defRPr>
@@ -27569,7 +27569,7 @@
               </a:spcAft>
               <a:defRPr sz="1400" b="0">
                 <a:solidFill>
-                  <a:srgbClr val="FFFFFF"/>
+                  <a:srgbClr val="1F1F1F"/>
                 </a:solidFill>
                 <a:latin typeface="맑은 고딕"/>
               </a:defRPr>
@@ -27595,11 +27595,11 @@
             <a:avLst/>
           </a:prstGeom>
           <a:solidFill>
-            <a:srgbClr val="24243E"/>
+            <a:srgbClr val="F8F9FB"/>
           </a:solidFill>
           <a:ln w="12700">
             <a:solidFill>
-              <a:srgbClr val="333355"/>
+              <a:srgbClr val="E0E0E8"/>
             </a:solidFill>
           </a:ln>
           <a:effectLst/>
@@ -27651,7 +27651,7 @@
             <a:pPr algn="l">
               <a:defRPr sz="1600" b="1">
                 <a:solidFill>
-                  <a:srgbClr val="0096D6"/>
+                  <a:srgbClr val="0070C0"/>
                 </a:solidFill>
                 <a:latin typeface="맑은 고딕"/>
               </a:defRPr>
@@ -27696,7 +27696,7 @@
               </a:spcAft>
               <a:defRPr sz="1400" b="0">
                 <a:solidFill>
-                  <a:srgbClr val="FFFFFF"/>
+                  <a:srgbClr val="1F1F1F"/>
                 </a:solidFill>
                 <a:latin typeface="맑은 고딕"/>
               </a:defRPr>
@@ -27718,7 +27718,7 @@
               </a:spcAft>
               <a:defRPr sz="1300">
                 <a:solidFill>
-                  <a:srgbClr val="94A3B8"/>
+                  <a:srgbClr val="8C8C9A"/>
                 </a:solidFill>
                 <a:latin typeface="맑은 고딕"/>
               </a:defRPr>
@@ -27740,7 +27740,7 @@
               </a:spcAft>
               <a:defRPr sz="1300">
                 <a:solidFill>
-                  <a:srgbClr val="94A3B8"/>
+                  <a:srgbClr val="8C8C9A"/>
                 </a:solidFill>
                 <a:latin typeface="맑은 고딕"/>
               </a:defRPr>
@@ -27762,7 +27762,7 @@
               </a:spcAft>
               <a:defRPr sz="1400" b="0">
                 <a:solidFill>
-                  <a:srgbClr val="FFFFFF"/>
+                  <a:srgbClr val="1F1F1F"/>
                 </a:solidFill>
                 <a:latin typeface="맑은 고딕"/>
               </a:defRPr>
@@ -27784,7 +27784,7 @@
               </a:spcAft>
               <a:defRPr sz="1300">
                 <a:solidFill>
-                  <a:srgbClr val="94A3B8"/>
+                  <a:srgbClr val="8C8C9A"/>
                 </a:solidFill>
                 <a:latin typeface="맑은 고딕"/>
               </a:defRPr>
@@ -27806,7 +27806,7 @@
               </a:spcAft>
               <a:defRPr sz="1300">
                 <a:solidFill>
-                  <a:srgbClr val="94A3B8"/>
+                  <a:srgbClr val="8C8C9A"/>
                 </a:solidFill>
                 <a:latin typeface="맑은 고딕"/>
               </a:defRPr>
@@ -27842,7 +27842,7 @@
             <a:pPr algn="r">
               <a:defRPr sz="1000" b="0">
                 <a:solidFill>
-                  <a:srgbClr val="94A3B8"/>
+                  <a:srgbClr val="8C8C9A"/>
                 </a:solidFill>
                 <a:latin typeface="맑은 고딕"/>
               </a:defRPr>
@@ -27867,7 +27867,7 @@
     <p:bg>
       <p:bgPr>
         <a:solidFill>
-          <a:srgbClr val="1A1A2E"/>
+          <a:srgbClr val="FFFFFF"/>
         </a:solidFill>
         <a:effectLst/>
       </p:bgPr>
@@ -27894,7 +27894,7 @@
             <a:avLst/>
           </a:prstGeom>
           <a:solidFill>
-            <a:srgbClr val="0096D6"/>
+            <a:srgbClr val="0070C0"/>
           </a:solidFill>
           <a:ln>
             <a:noFill/>
@@ -27948,7 +27948,7 @@
             <a:pPr algn="l">
               <a:defRPr sz="2600" b="1">
                 <a:solidFill>
-                  <a:srgbClr val="FFFFFF"/>
+                  <a:srgbClr val="1F1F1F"/>
                 </a:solidFill>
                 <a:latin typeface="맑은 고딕"/>
               </a:defRPr>
@@ -27974,7 +27974,7 @@
             <a:avLst/>
           </a:prstGeom>
           <a:solidFill>
-            <a:srgbClr val="0096D6"/>
+            <a:srgbClr val="0070C0"/>
           </a:solidFill>
           <a:ln>
             <a:noFill/>
@@ -28018,11 +28018,11 @@
             <a:avLst/>
           </a:prstGeom>
           <a:solidFill>
-            <a:srgbClr val="24243E"/>
+            <a:srgbClr val="F8F9FB"/>
           </a:solidFill>
           <a:ln w="12700">
             <a:solidFill>
-              <a:srgbClr val="333355"/>
+              <a:srgbClr val="E0E0E8"/>
             </a:solidFill>
           </a:ln>
           <a:effectLst/>
@@ -28083,7 +28083,7 @@
               </a:spcAft>
               <a:defRPr sz="1600" b="0">
                 <a:solidFill>
-                  <a:srgbClr val="FFFFFF"/>
+                  <a:srgbClr val="1F1F1F"/>
                 </a:solidFill>
                 <a:latin typeface="맑은 고딕"/>
               </a:defRPr>
@@ -28105,7 +28105,7 @@
               </a:spcAft>
               <a:defRPr sz="1500">
                 <a:solidFill>
-                  <a:srgbClr val="94A3B8"/>
+                  <a:srgbClr val="8C8C9A"/>
                 </a:solidFill>
                 <a:latin typeface="맑은 고딕"/>
               </a:defRPr>
@@ -28127,7 +28127,7 @@
               </a:spcAft>
               <a:defRPr sz="1600" b="0">
                 <a:solidFill>
-                  <a:srgbClr val="FFFFFF"/>
+                  <a:srgbClr val="1F1F1F"/>
                 </a:solidFill>
                 <a:latin typeface="맑은 고딕"/>
               </a:defRPr>
@@ -28149,7 +28149,7 @@
               </a:spcAft>
               <a:defRPr sz="1600" b="0">
                 <a:solidFill>
-                  <a:srgbClr val="FFFFFF"/>
+                  <a:srgbClr val="1F1F1F"/>
                 </a:solidFill>
                 <a:latin typeface="맑은 고딕"/>
               </a:defRPr>
@@ -28171,7 +28171,7 @@
               </a:spcAft>
               <a:defRPr sz="1500">
                 <a:solidFill>
-                  <a:srgbClr val="94A3B8"/>
+                  <a:srgbClr val="8C8C9A"/>
                 </a:solidFill>
                 <a:latin typeface="맑은 고딕"/>
               </a:defRPr>
@@ -28193,7 +28193,7 @@
               </a:spcAft>
               <a:defRPr sz="1600" b="0">
                 <a:solidFill>
-                  <a:srgbClr val="FFFFFF"/>
+                  <a:srgbClr val="1F1F1F"/>
                 </a:solidFill>
                 <a:latin typeface="맑은 고딕"/>
               </a:defRPr>
@@ -28215,7 +28215,7 @@
               </a:spcAft>
               <a:defRPr sz="1600" b="0">
                 <a:solidFill>
-                  <a:srgbClr val="FFFFFF"/>
+                  <a:srgbClr val="1F1F1F"/>
                 </a:solidFill>
                 <a:latin typeface="맑은 고딕"/>
               </a:defRPr>
@@ -28251,7 +28251,7 @@
             <a:pPr algn="r">
               <a:defRPr sz="1000" b="0">
                 <a:solidFill>
-                  <a:srgbClr val="94A3B8"/>
+                  <a:srgbClr val="8C8C9A"/>
                 </a:solidFill>
                 <a:latin typeface="맑은 고딕"/>
               </a:defRPr>
